--- a/docs/decks/UAF-Rewards-Logical-Architecture-L1.pptx
+++ b/docs/decks/UAF-Rewards-Logical-Architecture-L1.pptx
@@ -3103,7 +3103,7 @@
             <a:avLst/>
           </a:prstGeom>
           <a:solidFill>
-            <a:srgbClr val="F4F7FA"/>
+            <a:srgbClr val="F7F9FB"/>
           </a:solidFill>
           <a:ln>
             <a:noFill/>
@@ -3140,13 +3140,13 @@
         <p:spPr>
           <a:xfrm>
             <a:off x="0" y="0"/>
-            <a:ext cx="12191695" cy="36576"/>
+            <a:ext cx="12191695" cy="32004"/>
           </a:xfrm>
           <a:prstGeom prst="rect">
             <a:avLst/>
           </a:prstGeom>
           <a:solidFill>
-            <a:srgbClr val="1B4F72"/>
+            <a:srgbClr val="1B3A5F"/>
           </a:solidFill>
           <a:ln>
             <a:noFill/>
@@ -3182,8 +3182,8 @@
         </p:nvSpPr>
         <p:spPr>
           <a:xfrm>
-            <a:off x="201168" y="73152"/>
-            <a:ext cx="9326880" cy="256032"/>
+            <a:off x="256032" y="73152"/>
+            <a:ext cx="7863840" cy="256032"/>
           </a:xfrm>
           <a:prstGeom prst="rect">
             <a:avLst/>
@@ -3191,16 +3191,23 @@
           <a:noFill/>
         </p:spPr>
         <p:txBody>
-          <a:bodyPr wrap="square" lIns="25400" rIns="25400" tIns="0" bIns="0">
+          <a:bodyPr wrap="square" lIns="25400" rIns="25400" tIns="38100" bIns="25400">
             <a:spAutoFit/>
           </a:bodyPr>
           <a:lstStyle/>
           <a:p>
-            <a:pPr algn="l"/>
-            <a:r>
-              <a:rPr sz="1600" b="1">
-                <a:solidFill>
-                  <a:srgbClr val="1B4F72"/>
+            <a:pPr algn="l">
+              <a:spcBef>
+                <a:spcPts val="0"/>
+              </a:spcBef>
+              <a:spcAft>
+                <a:spcPts val="100"/>
+              </a:spcAft>
+            </a:pPr>
+            <a:r>
+              <a:rPr sz="1800" b="1">
+                <a:solidFill>
+                  <a:srgbClr val="1B3A5F"/>
                 </a:solidFill>
                 <a:latin typeface="Calibri"/>
               </a:rPr>
@@ -3217,8 +3224,8 @@
         </p:nvSpPr>
         <p:spPr>
           <a:xfrm>
-            <a:off x="201168" y="310896"/>
-            <a:ext cx="9326880" cy="164592"/>
+            <a:off x="256032" y="329184"/>
+            <a:ext cx="8046720" cy="182880"/>
           </a:xfrm>
           <a:prstGeom prst="rect">
             <a:avLst/>
@@ -3226,81 +3233,53 @@
           <a:noFill/>
         </p:spPr>
         <p:txBody>
-          <a:bodyPr wrap="square" lIns="25400" rIns="25400" tIns="0" bIns="0">
+          <a:bodyPr wrap="square" lIns="25400" rIns="25400" tIns="38100" bIns="25400">
             <a:spAutoFit/>
           </a:bodyPr>
           <a:lstStyle/>
           <a:p>
-            <a:pPr algn="l"/>
+            <a:pPr algn="l">
+              <a:spcBef>
+                <a:spcPts val="0"/>
+              </a:spcBef>
+              <a:spcAft>
+                <a:spcPts val="100"/>
+              </a:spcAft>
+            </a:pPr>
             <a:r>
               <a:rPr sz="1000" b="0">
                 <a:solidFill>
-                  <a:srgbClr val="7F8C8D"/>
+                  <a:srgbClr val="6B7C8D"/>
                 </a:solidFill>
                 <a:latin typeface="Calibri"/>
               </a:rPr>
-              <a:t>Channels stay thin  ·  Reward System is the core domain  ·  CRP owns coupon reality  ·  partners at the edge</a:t>
-            </a:r>
-          </a:p>
-        </p:txBody>
-      </p:sp>
-      <p:sp>
-        <p:nvSpPr>
-          <p:cNvPr id="6" name="TextBox 5"/>
-          <p:cNvSpPr txBox="1"/>
-          <p:nvPr/>
-        </p:nvSpPr>
-        <p:spPr>
-          <a:xfrm>
-            <a:off x="10881360" y="146304"/>
-            <a:ext cx="1097280" cy="201168"/>
-          </a:xfrm>
-          <a:prstGeom prst="rect">
-            <a:avLst/>
-          </a:prstGeom>
-          <a:noFill/>
-        </p:spPr>
-        <p:txBody>
-          <a:bodyPr wrap="square" lIns="25400" rIns="25400" tIns="0" bIns="0">
-            <a:spAutoFit/>
-          </a:bodyPr>
-          <a:lstStyle/>
-          <a:p>
-            <a:pPr algn="r"/>
-            <a:r>
-              <a:rPr sz="1100" b="1">
-                <a:solidFill>
-                  <a:srgbClr val="1B4F72"/>
-                </a:solidFill>
-                <a:latin typeface="Calibri"/>
-              </a:rPr>
-              <a:t>L1</a:t>
-            </a:r>
-          </a:p>
-        </p:txBody>
-      </p:sp>
-      <p:sp>
-        <p:nvSpPr>
-          <p:cNvPr id="7" name="Rounded Rectangle 6"/>
+              <a:t>Channels stay thin   ·   Reward System is the core domain   ·   CRP owns coupon reality   ·   partners at the edge</a:t>
+            </a:r>
+          </a:p>
+        </p:txBody>
+      </p:sp>
+      <p:sp>
+        <p:nvSpPr>
+          <p:cNvPr id="6" name="Rounded Rectangle 5"/>
           <p:cNvSpPr/>
           <p:nvPr/>
         </p:nvSpPr>
         <p:spPr>
           <a:xfrm>
-            <a:off x="7818120" y="73152"/>
-            <a:ext cx="960120" cy="201168"/>
+            <a:off x="8686800" y="146304"/>
+            <a:ext cx="164592" cy="128016"/>
           </a:xfrm>
           <a:prstGeom prst="roundRect">
             <a:avLst>
-              <a:gd name="adj" fmla="val 15000"/>
+              <a:gd name="adj" fmla="val 25000"/>
             </a:avLst>
           </a:prstGeom>
           <a:solidFill>
-            <a:srgbClr val="D4E6F1"/>
+            <a:srgbClr val="D6EAF8"/>
           </a:solidFill>
           <a:ln w="9525">
             <a:solidFill>
-              <a:srgbClr val="85C1E9"/>
+              <a:srgbClr val="7FB3D5"/>
             </a:solidFill>
           </a:ln>
         </p:spPr>
@@ -3319,14 +3298,47 @@
           </a:fontRef>
         </p:style>
         <p:txBody>
-          <a:bodyPr rtlCol="0" anchor="ctr" wrap="square" lIns="38100" rIns="38100" tIns="25400" bIns="12700"/>
+          <a:bodyPr rtlCol="0" anchor="ctr"/>
           <a:lstStyle/>
           <a:p>
             <a:pPr algn="ctr"/>
-            <a:r>
-              <a:rPr sz="800" b="1">
-                <a:solidFill>
-                  <a:srgbClr val="1C283A"/>
+          </a:p>
+        </p:txBody>
+      </p:sp>
+      <p:sp>
+        <p:nvSpPr>
+          <p:cNvPr id="7" name="TextBox 6"/>
+          <p:cNvSpPr txBox="1"/>
+          <p:nvPr/>
+        </p:nvSpPr>
+        <p:spPr>
+          <a:xfrm>
+            <a:off x="8887968" y="128016"/>
+            <a:ext cx="777240" cy="164592"/>
+          </a:xfrm>
+          <a:prstGeom prst="rect">
+            <a:avLst/>
+          </a:prstGeom>
+          <a:noFill/>
+        </p:spPr>
+        <p:txBody>
+          <a:bodyPr wrap="square" lIns="25400" rIns="25400" tIns="38100" bIns="25400">
+            <a:spAutoFit/>
+          </a:bodyPr>
+          <a:lstStyle/>
+          <a:p>
+            <a:pPr algn="l">
+              <a:spcBef>
+                <a:spcPts val="0"/>
+              </a:spcBef>
+              <a:spcAft>
+                <a:spcPts val="100"/>
+              </a:spcAft>
+            </a:pPr>
+            <a:r>
+              <a:rPr sz="900" b="0">
+                <a:solidFill>
+                  <a:srgbClr val="6B7C8D"/>
                 </a:solidFill>
                 <a:latin typeface="Calibri"/>
               </a:rPr>
@@ -3343,20 +3355,20 @@
         </p:nvSpPr>
         <p:spPr>
           <a:xfrm>
-            <a:off x="8842248" y="73152"/>
-            <a:ext cx="868680" cy="201168"/>
+            <a:off x="9646920" y="146304"/>
+            <a:ext cx="164592" cy="128016"/>
           </a:xfrm>
           <a:prstGeom prst="roundRect">
             <a:avLst>
-              <a:gd name="adj" fmla="val 15000"/>
+              <a:gd name="adj" fmla="val 25000"/>
             </a:avLst>
           </a:prstGeom>
           <a:solidFill>
-            <a:srgbClr val="F5B7B1"/>
+            <a:srgbClr val="F6C6C7"/>
           </a:solidFill>
           <a:ln w="9525">
             <a:solidFill>
-              <a:srgbClr val="E6B0AA"/>
+              <a:srgbClr val="E09A9A"/>
             </a:solidFill>
           </a:ln>
         </p:spPr>
@@ -3375,14 +3387,47 @@
           </a:fontRef>
         </p:style>
         <p:txBody>
-          <a:bodyPr rtlCol="0" anchor="ctr" wrap="square" lIns="38100" rIns="38100" tIns="25400" bIns="12700"/>
+          <a:bodyPr rtlCol="0" anchor="ctr"/>
           <a:lstStyle/>
           <a:p>
             <a:pPr algn="ctr"/>
-            <a:r>
-              <a:rPr sz="800" b="1">
-                <a:solidFill>
-                  <a:srgbClr val="1C283A"/>
+          </a:p>
+        </p:txBody>
+      </p:sp>
+      <p:sp>
+        <p:nvSpPr>
+          <p:cNvPr id="9" name="TextBox 8"/>
+          <p:cNvSpPr txBox="1"/>
+          <p:nvPr/>
+        </p:nvSpPr>
+        <p:spPr>
+          <a:xfrm>
+            <a:off x="9848088" y="128016"/>
+            <a:ext cx="777240" cy="164592"/>
+          </a:xfrm>
+          <a:prstGeom prst="rect">
+            <a:avLst/>
+          </a:prstGeom>
+          <a:noFill/>
+        </p:spPr>
+        <p:txBody>
+          <a:bodyPr wrap="square" lIns="25400" rIns="25400" tIns="38100" bIns="25400">
+            <a:spAutoFit/>
+          </a:bodyPr>
+          <a:lstStyle/>
+          <a:p>
+            <a:pPr algn="l">
+              <a:spcBef>
+                <a:spcPts val="0"/>
+              </a:spcBef>
+              <a:spcAft>
+                <a:spcPts val="100"/>
+              </a:spcAft>
+            </a:pPr>
+            <a:r>
+              <a:rPr sz="900" b="0">
+                <a:solidFill>
+                  <a:srgbClr val="6B7C8D"/>
                 </a:solidFill>
                 <a:latin typeface="Calibri"/>
               </a:rPr>
@@ -3393,26 +3438,26 @@
       </p:sp>
       <p:sp>
         <p:nvSpPr>
-          <p:cNvPr id="9" name="Rounded Rectangle 8"/>
+          <p:cNvPr id="10" name="Rounded Rectangle 9"/>
           <p:cNvSpPr/>
           <p:nvPr/>
         </p:nvSpPr>
         <p:spPr>
           <a:xfrm>
-            <a:off x="9774936" y="73152"/>
-            <a:ext cx="777240" cy="201168"/>
+            <a:off x="10442448" y="146304"/>
+            <a:ext cx="164592" cy="128016"/>
           </a:xfrm>
           <a:prstGeom prst="roundRect">
             <a:avLst>
-              <a:gd name="adj" fmla="val 15000"/>
+              <a:gd name="adj" fmla="val 25000"/>
             </a:avLst>
           </a:prstGeom>
           <a:solidFill>
-            <a:srgbClr val="D5F5E3"/>
+            <a:srgbClr val="D4EDDA"/>
           </a:solidFill>
           <a:ln w="9525">
             <a:solidFill>
-              <a:srgbClr val="82E0AA"/>
+              <a:srgbClr val="82C99B"/>
             </a:solidFill>
           </a:ln>
         </p:spPr>
@@ -3431,14 +3476,47 @@
           </a:fontRef>
         </p:style>
         <p:txBody>
-          <a:bodyPr rtlCol="0" anchor="ctr" wrap="square" lIns="38100" rIns="38100" tIns="25400" bIns="12700"/>
+          <a:bodyPr rtlCol="0" anchor="ctr"/>
           <a:lstStyle/>
           <a:p>
             <a:pPr algn="ctr"/>
-            <a:r>
-              <a:rPr sz="800" b="1">
-                <a:solidFill>
-                  <a:srgbClr val="1C283A"/>
+          </a:p>
+        </p:txBody>
+      </p:sp>
+      <p:sp>
+        <p:nvSpPr>
+          <p:cNvPr id="11" name="TextBox 10"/>
+          <p:cNvSpPr txBox="1"/>
+          <p:nvPr/>
+        </p:nvSpPr>
+        <p:spPr>
+          <a:xfrm>
+            <a:off x="10643616" y="128016"/>
+            <a:ext cx="777240" cy="164592"/>
+          </a:xfrm>
+          <a:prstGeom prst="rect">
+            <a:avLst/>
+          </a:prstGeom>
+          <a:noFill/>
+        </p:spPr>
+        <p:txBody>
+          <a:bodyPr wrap="square" lIns="25400" rIns="25400" tIns="38100" bIns="25400">
+            <a:spAutoFit/>
+          </a:bodyPr>
+          <a:lstStyle/>
+          <a:p>
+            <a:pPr algn="l">
+              <a:spcBef>
+                <a:spcPts val="0"/>
+              </a:spcBef>
+              <a:spcAft>
+                <a:spcPts val="100"/>
+              </a:spcAft>
+            </a:pPr>
+            <a:r>
+              <a:rPr sz="900" b="0">
+                <a:solidFill>
+                  <a:srgbClr val="6B7C8D"/>
                 </a:solidFill>
                 <a:latin typeface="Calibri"/>
               </a:rPr>
@@ -3449,26 +3527,26 @@
       </p:sp>
       <p:sp>
         <p:nvSpPr>
-          <p:cNvPr id="10" name="Rounded Rectangle 9"/>
+          <p:cNvPr id="12" name="Rounded Rectangle 11"/>
           <p:cNvSpPr/>
           <p:nvPr/>
         </p:nvSpPr>
         <p:spPr>
           <a:xfrm>
-            <a:off x="10616184" y="73152"/>
-            <a:ext cx="502920" cy="201168"/>
+            <a:off x="11265408" y="146304"/>
+            <a:ext cx="164592" cy="128016"/>
           </a:xfrm>
           <a:prstGeom prst="roundRect">
             <a:avLst>
-              <a:gd name="adj" fmla="val 15000"/>
+              <a:gd name="adj" fmla="val 25000"/>
             </a:avLst>
           </a:prstGeom>
           <a:solidFill>
-            <a:srgbClr val="D5DBDB"/>
+            <a:srgbClr val="E8ECF0"/>
           </a:solidFill>
           <a:ln w="9525">
             <a:solidFill>
-              <a:srgbClr val="BFC9CA"/>
+              <a:srgbClr val="D0D7DE"/>
             </a:solidFill>
           </a:ln>
         </p:spPr>
@@ -3487,14 +3565,47 @@
           </a:fontRef>
         </p:style>
         <p:txBody>
-          <a:bodyPr rtlCol="0" anchor="ctr" wrap="square" lIns="38100" rIns="38100" tIns="25400" bIns="12700"/>
+          <a:bodyPr rtlCol="0" anchor="ctr"/>
           <a:lstStyle/>
           <a:p>
             <a:pPr algn="ctr"/>
-            <a:r>
-              <a:rPr sz="800" b="1">
-                <a:solidFill>
-                  <a:srgbClr val="1C283A"/>
+          </a:p>
+        </p:txBody>
+      </p:sp>
+      <p:sp>
+        <p:nvSpPr>
+          <p:cNvPr id="13" name="TextBox 12"/>
+          <p:cNvSpPr txBox="1"/>
+          <p:nvPr/>
+        </p:nvSpPr>
+        <p:spPr>
+          <a:xfrm>
+            <a:off x="11466576" y="128016"/>
+            <a:ext cx="777240" cy="164592"/>
+          </a:xfrm>
+          <a:prstGeom prst="rect">
+            <a:avLst/>
+          </a:prstGeom>
+          <a:noFill/>
+        </p:spPr>
+        <p:txBody>
+          <a:bodyPr wrap="square" lIns="25400" rIns="25400" tIns="38100" bIns="25400">
+            <a:spAutoFit/>
+          </a:bodyPr>
+          <a:lstStyle/>
+          <a:p>
+            <a:pPr algn="l">
+              <a:spcBef>
+                <a:spcPts val="0"/>
+              </a:spcBef>
+              <a:spcAft>
+                <a:spcPts val="100"/>
+              </a:spcAft>
+            </a:pPr>
+            <a:r>
+              <a:rPr sz="900" b="0">
+                <a:solidFill>
+                  <a:srgbClr val="6B7C8D"/>
                 </a:solidFill>
                 <a:latin typeface="Calibri"/>
               </a:rPr>
@@ -3505,24 +3616,24 @@
       </p:sp>
       <p:sp>
         <p:nvSpPr>
-          <p:cNvPr id="11" name="Rectangle 10"/>
+          <p:cNvPr id="14" name="Rectangle 13"/>
           <p:cNvSpPr/>
           <p:nvPr/>
         </p:nvSpPr>
         <p:spPr>
           <a:xfrm>
-            <a:off x="804672" y="530352"/>
-            <a:ext cx="9646920" cy="960120"/>
+            <a:off x="1042416" y="566928"/>
+            <a:ext cx="9646920" cy="987552"/>
           </a:xfrm>
           <a:prstGeom prst="rect">
             <a:avLst/>
           </a:prstGeom>
           <a:solidFill>
-            <a:srgbClr val="EAF2F8"/>
-          </a:solidFill>
-          <a:ln w="9525">
+            <a:srgbClr val="EEF3F8"/>
+          </a:solidFill>
+          <a:ln w="7620">
             <a:solidFill>
-              <a:srgbClr val="BFC9CA"/>
+              <a:srgbClr val="D0D7DE"/>
             </a:solidFill>
           </a:ln>
         </p:spPr>
@@ -3550,25 +3661,23 @@
       </p:sp>
       <p:sp>
         <p:nvSpPr>
-          <p:cNvPr id="12" name="Rectangle 11"/>
+          <p:cNvPr id="15" name="Rectangle 14"/>
           <p:cNvSpPr/>
           <p:nvPr/>
         </p:nvSpPr>
         <p:spPr>
           <a:xfrm>
-            <a:off x="109728" y="530352"/>
-            <a:ext cx="640080" cy="960120"/>
+            <a:off x="201168" y="566928"/>
+            <a:ext cx="841248" cy="987552"/>
           </a:xfrm>
           <a:prstGeom prst="rect">
             <a:avLst/>
           </a:prstGeom>
           <a:solidFill>
-            <a:srgbClr val="EAF2F8"/>
-          </a:solidFill>
-          <a:ln w="9525">
-            <a:solidFill>
-              <a:srgbClr val="BFC9CA"/>
-            </a:solidFill>
+            <a:srgbClr val="1B3A5F"/>
+          </a:solidFill>
+          <a:ln>
+            <a:noFill/>
           </a:ln>
         </p:spPr>
         <p:style>
@@ -3586,95 +3695,58 @@
           </a:fontRef>
         </p:style>
         <p:txBody>
-          <a:bodyPr rtlCol="0" anchor="ctr"/>
-          <a:lstStyle/>
-          <a:p>
-            <a:pPr algn="ctr"/>
-          </a:p>
-        </p:txBody>
-      </p:sp>
-      <p:sp>
-        <p:nvSpPr>
-          <p:cNvPr id="13" name="TextBox 12"/>
-          <p:cNvSpPr txBox="1"/>
-          <p:nvPr/>
-        </p:nvSpPr>
-        <p:spPr>
-          <a:xfrm>
-            <a:off x="128016" y="585216"/>
-            <a:ext cx="603504" cy="329184"/>
-          </a:xfrm>
-          <a:prstGeom prst="rect">
-            <a:avLst/>
-          </a:prstGeom>
-          <a:noFill/>
-        </p:spPr>
-        <p:txBody>
-          <a:bodyPr wrap="square" lIns="25400" rIns="25400" tIns="0" bIns="0">
-            <a:spAutoFit/>
-          </a:bodyPr>
-          <a:lstStyle/>
-          <a:p>
-            <a:pPr algn="ctr"/>
-            <a:r>
-              <a:rPr sz="800" b="1">
-                <a:solidFill>
-                  <a:srgbClr val="1B4F72"/>
+          <a:bodyPr rtlCol="0" anchor="ctr" wrap="square" lIns="50800" rIns="50800" tIns="38100" bIns="25400"/>
+          <a:lstStyle/>
+          <a:p>
+            <a:pPr algn="ctr">
+              <a:spcBef>
+                <a:spcPts val="0"/>
+              </a:spcBef>
+              <a:spcAft>
+                <a:spcPts val="100"/>
+              </a:spcAft>
+            </a:pPr>
+            <a:r>
+              <a:rPr sz="800" b="0">
+                <a:solidFill>
+                  <a:srgbClr val="B7C9DC"/>
                 </a:solidFill>
                 <a:latin typeface="Calibri"/>
               </a:rPr>
-              <a:t>01
-Channels</a:t>
-            </a:r>
-          </a:p>
-        </p:txBody>
-      </p:sp>
-      <p:sp>
-        <p:nvSpPr>
-          <p:cNvPr id="14" name="TextBox 13"/>
-          <p:cNvSpPr txBox="1"/>
-          <p:nvPr/>
-        </p:nvSpPr>
-        <p:spPr>
-          <a:xfrm>
-            <a:off x="128016" y="896112"/>
-            <a:ext cx="603504" cy="365760"/>
-          </a:xfrm>
-          <a:prstGeom prst="rect">
-            <a:avLst/>
-          </a:prstGeom>
-          <a:noFill/>
-        </p:spPr>
-        <p:txBody>
-          <a:bodyPr wrap="square" lIns="25400" rIns="25400" tIns="0" bIns="0">
-            <a:spAutoFit/>
-          </a:bodyPr>
-          <a:lstStyle/>
-          <a:p>
-            <a:pPr algn="ctr"/>
-            <a:r>
-              <a:rPr sz="700" b="0">
-                <a:solidFill>
-                  <a:srgbClr val="7F8C8D"/>
+              <a:t>01</a:t>
+            </a:r>
+          </a:p>
+          <a:p>
+            <a:pPr algn="ctr">
+              <a:spcBef>
+                <a:spcPts val="0"/>
+              </a:spcBef>
+              <a:spcAft>
+                <a:spcPts val="100"/>
+              </a:spcAft>
+            </a:pPr>
+            <a:r>
+              <a:rPr sz="1000" b="1">
+                <a:solidFill>
+                  <a:srgbClr val="FFFFFF"/>
                 </a:solidFill>
                 <a:latin typeface="Calibri"/>
               </a:rPr>
-              <a:t>clients &amp;
-use-cases</a:t>
-            </a:r>
-          </a:p>
-        </p:txBody>
-      </p:sp>
-      <p:sp>
-        <p:nvSpPr>
-          <p:cNvPr id="15" name="Rounded Rectangle 14"/>
+              <a:t>CHANNELS</a:t>
+            </a:r>
+          </a:p>
+        </p:txBody>
+      </p:sp>
+      <p:sp>
+        <p:nvSpPr>
+          <p:cNvPr id="16" name="Rounded Rectangle 15"/>
           <p:cNvSpPr/>
           <p:nvPr/>
         </p:nvSpPr>
         <p:spPr>
           <a:xfrm>
-            <a:off x="896112" y="603504"/>
-            <a:ext cx="2148840" cy="804672"/>
+            <a:off x="1133856" y="658368"/>
+            <a:ext cx="2240280" cy="804672"/>
           </a:xfrm>
           <a:prstGeom prst="roundRect">
             <a:avLst>
@@ -3684,9 +3756,9 @@
           <a:solidFill>
             <a:srgbClr val="FFFFFF"/>
           </a:solidFill>
-          <a:ln w="9525">
+          <a:ln w="11430">
             <a:solidFill>
-              <a:srgbClr val="BFC9CA"/>
+              <a:srgbClr val="D0D7DE"/>
             </a:solidFill>
           </a:ln>
         </p:spPr>
@@ -3705,46 +3777,47 @@
           </a:fontRef>
         </p:style>
         <p:txBody>
-          <a:bodyPr rtlCol="0" anchor="ctr"/>
-          <a:lstStyle/>
-          <a:p>
-            <a:pPr algn="ctr"/>
-          </a:p>
-        </p:txBody>
-      </p:sp>
-      <p:sp>
-        <p:nvSpPr>
-          <p:cNvPr id="16" name="TextBox 15"/>
-          <p:cNvSpPr txBox="1"/>
-          <p:nvPr/>
-        </p:nvSpPr>
-        <p:spPr>
-          <a:xfrm>
-            <a:off x="960120" y="621792"/>
-            <a:ext cx="2011680" cy="146304"/>
-          </a:xfrm>
-          <a:prstGeom prst="rect">
-            <a:avLst/>
-          </a:prstGeom>
-          <a:noFill/>
-        </p:spPr>
-        <p:txBody>
-          <a:bodyPr wrap="square" lIns="25400" rIns="25400" tIns="0" bIns="0">
-            <a:spAutoFit/>
-          </a:bodyPr>
-          <a:lstStyle/>
-          <a:p>
-            <a:pPr algn="l"/>
-            <a:r>
-              <a:rPr sz="800" b="1">
-                <a:solidFill>
-                  <a:srgbClr val="1B4F72"/>
+          <a:bodyPr rtlCol="0" anchor="ctr" wrap="square" lIns="101600" rIns="101600" tIns="38100" bIns="25400"/>
+          <a:lstStyle/>
+          <a:p>
+            <a:pPr algn="l">
+              <a:spcBef>
+                <a:spcPts val="0"/>
+              </a:spcBef>
+              <a:spcAft>
+                <a:spcPts val="100"/>
+              </a:spcAft>
+            </a:pPr>
+            <a:r>
+              <a:rPr sz="1100" b="1">
+                <a:solidFill>
+                  <a:srgbClr val="1B3A5F"/>
                 </a:solidFill>
                 <a:latin typeface="Calibri"/>
               </a:rPr>
               <a:t>Business use-cases</a:t>
             </a:r>
           </a:p>
+          <a:p>
+            <a:pPr algn="l">
+              <a:spcBef>
+                <a:spcPts val="0"/>
+              </a:spcBef>
+              <a:spcAft>
+                <a:spcPts val="100"/>
+              </a:spcAft>
+            </a:pPr>
+            <a:r>
+              <a:rPr sz="900" b="0">
+                <a:solidFill>
+                  <a:srgbClr val="6B7C8D"/>
+                </a:solidFill>
+                <a:latin typeface="Calibri"/>
+              </a:rPr>
+              <a:t>Activation · Merchant · App event
+Campaign · Game · Offline</a:t>
+            </a:r>
+          </a:p>
         </p:txBody>
       </p:sp>
       <p:sp>
@@ -3755,20 +3828,20 @@
         </p:nvSpPr>
         <p:spPr>
           <a:xfrm>
-            <a:off x="960120" y="804672"/>
-            <a:ext cx="658368" cy="237744"/>
+            <a:off x="3465576" y="658368"/>
+            <a:ext cx="2331720" cy="804672"/>
           </a:xfrm>
           <a:prstGeom prst="roundRect">
             <a:avLst>
-              <a:gd name="adj" fmla="val 15000"/>
+              <a:gd name="adj" fmla="val 6000"/>
             </a:avLst>
           </a:prstGeom>
           <a:solidFill>
-            <a:srgbClr val="D4E6F1"/>
-          </a:solidFill>
-          <a:ln w="9525">
+            <a:srgbClr val="FFFFFF"/>
+          </a:solidFill>
+          <a:ln w="11430">
             <a:solidFill>
-              <a:srgbClr val="85C1E9"/>
+              <a:srgbClr val="D0D7DE"/>
             </a:solidFill>
           </a:ln>
         </p:spPr>
@@ -3787,18 +3860,44 @@
           </a:fontRef>
         </p:style>
         <p:txBody>
-          <a:bodyPr rtlCol="0" anchor="ctr" wrap="square" lIns="38100" rIns="38100" tIns="25400" bIns="12700"/>
-          <a:lstStyle/>
-          <a:p>
-            <a:pPr algn="ctr"/>
-            <a:r>
-              <a:rPr sz="700" b="1">
-                <a:solidFill>
-                  <a:srgbClr val="1C283A"/>
+          <a:bodyPr rtlCol="0" anchor="ctr" wrap="square" lIns="101600" rIns="101600" tIns="38100" bIns="25400"/>
+          <a:lstStyle/>
+          <a:p>
+            <a:pPr algn="l">
+              <a:spcBef>
+                <a:spcPts val="0"/>
+              </a:spcBef>
+              <a:spcAft>
+                <a:spcPts val="100"/>
+              </a:spcAft>
+            </a:pPr>
+            <a:r>
+              <a:rPr sz="1100" b="1">
+                <a:solidFill>
+                  <a:srgbClr val="1B3A5F"/>
                 </a:solidFill>
                 <a:latin typeface="Calibri"/>
               </a:rPr>
-              <a:t>Card activation</a:t>
+              <a:t>Public clients</a:t>
+            </a:r>
+          </a:p>
+          <a:p>
+            <a:pPr algn="l">
+              <a:spcBef>
+                <a:spcPts val="0"/>
+              </a:spcBef>
+              <a:spcAft>
+                <a:spcPts val="100"/>
+              </a:spcAft>
+            </a:pPr>
+            <a:r>
+              <a:rPr sz="900" b="0">
+                <a:solidFill>
+                  <a:srgbClr val="6B7C8D"/>
+                </a:solidFill>
+                <a:latin typeface="Calibri"/>
+              </a:rPr>
+              <a:t>Yes UA   ·   sim   ·   Web / QR</a:t>
             </a:r>
           </a:p>
         </p:txBody>
@@ -3811,20 +3910,20 @@
         </p:nvSpPr>
         <p:spPr>
           <a:xfrm>
-            <a:off x="1645920" y="804672"/>
-            <a:ext cx="658368" cy="237744"/>
+            <a:off x="5888736" y="658368"/>
+            <a:ext cx="1965960" cy="804672"/>
           </a:xfrm>
           <a:prstGeom prst="roundRect">
             <a:avLst>
-              <a:gd name="adj" fmla="val 15000"/>
+              <a:gd name="adj" fmla="val 6000"/>
             </a:avLst>
           </a:prstGeom>
           <a:solidFill>
-            <a:srgbClr val="D4E6F1"/>
-          </a:solidFill>
-          <a:ln w="9525">
+            <a:srgbClr val="FFFFFF"/>
+          </a:solidFill>
+          <a:ln w="11430">
             <a:solidFill>
-              <a:srgbClr val="85C1E9"/>
+              <a:srgbClr val="D0D7DE"/>
             </a:solidFill>
           </a:ln>
         </p:spPr>
@@ -3843,18 +3942,44 @@
           </a:fontRef>
         </p:style>
         <p:txBody>
-          <a:bodyPr rtlCol="0" anchor="ctr" wrap="square" lIns="38100" rIns="38100" tIns="25400" bIns="12700"/>
-          <a:lstStyle/>
-          <a:p>
-            <a:pPr algn="ctr"/>
-            <a:r>
-              <a:rPr sz="700" b="1">
-                <a:solidFill>
-                  <a:srgbClr val="1C283A"/>
+          <a:bodyPr rtlCol="0" anchor="ctr" wrap="square" lIns="101600" rIns="101600" tIns="38100" bIns="25400"/>
+          <a:lstStyle/>
+          <a:p>
+            <a:pPr algn="l">
+              <a:spcBef>
+                <a:spcPts val="0"/>
+              </a:spcBef>
+              <a:spcAft>
+                <a:spcPts val="100"/>
+              </a:spcAft>
+            </a:pPr>
+            <a:r>
+              <a:rPr sz="1100" b="1">
+                <a:solidFill>
+                  <a:srgbClr val="1B3A5F"/>
                 </a:solidFill>
                 <a:latin typeface="Calibri"/>
               </a:rPr>
-              <a:t>Merchant</a:t>
+              <a:t>Internal platform</a:t>
+            </a:r>
+          </a:p>
+          <a:p>
+            <a:pPr algn="l">
+              <a:spcBef>
+                <a:spcPts val="0"/>
+              </a:spcBef>
+              <a:spcAft>
+                <a:spcPts val="100"/>
+              </a:spcAft>
+            </a:pPr>
+            <a:r>
+              <a:rPr sz="900" b="0">
+                <a:solidFill>
+                  <a:srgbClr val="6B7C8D"/>
+                </a:solidFill>
+                <a:latin typeface="Calibri"/>
+              </a:rPr>
+              <a:t>Ops UI  ·  CSP  ·  IAM</a:t>
             </a:r>
           </a:p>
         </p:txBody>
@@ -3867,20 +3992,20 @@
         </p:nvSpPr>
         <p:spPr>
           <a:xfrm>
-            <a:off x="2331720" y="804672"/>
-            <a:ext cx="658368" cy="237744"/>
+            <a:off x="7946136" y="658368"/>
+            <a:ext cx="2651760" cy="804672"/>
           </a:xfrm>
           <a:prstGeom prst="roundRect">
             <a:avLst>
-              <a:gd name="adj" fmla="val 15000"/>
+              <a:gd name="adj" fmla="val 6000"/>
             </a:avLst>
           </a:prstGeom>
           <a:solidFill>
-            <a:srgbClr val="D4E6F1"/>
-          </a:solidFill>
-          <a:ln w="9525">
+            <a:srgbClr val="FFFFFF"/>
+          </a:solidFill>
+          <a:ln w="11430">
             <a:solidFill>
-              <a:srgbClr val="85C1E9"/>
+              <a:srgbClr val="D0D7DE"/>
             </a:solidFill>
           </a:ln>
         </p:spPr>
@@ -3899,18 +4024,25 @@
           </a:fontRef>
         </p:style>
         <p:txBody>
-          <a:bodyPr rtlCol="0" anchor="ctr" wrap="square" lIns="38100" rIns="38100" tIns="25400" bIns="12700"/>
-          <a:lstStyle/>
-          <a:p>
-            <a:pPr algn="ctr"/>
-            <a:r>
-              <a:rPr sz="700" b="1">
-                <a:solidFill>
-                  <a:srgbClr val="1C283A"/>
+          <a:bodyPr rtlCol="0" anchor="ctr" wrap="square" lIns="101600" rIns="101600" tIns="38100" bIns="25400"/>
+          <a:lstStyle/>
+          <a:p>
+            <a:pPr algn="l">
+              <a:spcBef>
+                <a:spcPts val="0"/>
+              </a:spcBef>
+              <a:spcAft>
+                <a:spcPts val="100"/>
+              </a:spcAft>
+            </a:pPr>
+            <a:r>
+              <a:rPr sz="1100" b="1">
+                <a:solidFill>
+                  <a:srgbClr val="1B3A5F"/>
                 </a:solidFill>
                 <a:latin typeface="Calibri"/>
               </a:rPr>
-              <a:t>App event</a:t>
+              <a:t>External rails</a:t>
             </a:r>
           </a:p>
         </p:txBody>
@@ -3923,20 +4055,20 @@
         </p:nvSpPr>
         <p:spPr>
           <a:xfrm>
-            <a:off x="960120" y="1078992"/>
-            <a:ext cx="658368" cy="237744"/>
+            <a:off x="8065008" y="969264"/>
+            <a:ext cx="768096" cy="219456"/>
           </a:xfrm>
           <a:prstGeom prst="roundRect">
             <a:avLst>
-              <a:gd name="adj" fmla="val 15000"/>
+              <a:gd name="adj" fmla="val 22000"/>
             </a:avLst>
           </a:prstGeom>
           <a:solidFill>
-            <a:srgbClr val="D4E6F1"/>
+            <a:srgbClr val="D4EDDA"/>
           </a:solidFill>
           <a:ln w="9525">
             <a:solidFill>
-              <a:srgbClr val="85C1E9"/>
+              <a:srgbClr val="82C99B"/>
             </a:solidFill>
           </a:ln>
         </p:spPr>
@@ -3955,18 +4087,25 @@
           </a:fontRef>
         </p:style>
         <p:txBody>
-          <a:bodyPr rtlCol="0" anchor="ctr" wrap="square" lIns="38100" rIns="38100" tIns="25400" bIns="12700"/>
-          <a:lstStyle/>
-          <a:p>
-            <a:pPr algn="ctr"/>
-            <a:r>
-              <a:rPr sz="700" b="1">
-                <a:solidFill>
-                  <a:srgbClr val="1C283A"/>
+          <a:bodyPr rtlCol="0" anchor="ctr" wrap="square" lIns="25400" rIns="25400" tIns="38100" bIns="25400"/>
+          <a:lstStyle/>
+          <a:p>
+            <a:pPr algn="ctr">
+              <a:spcBef>
+                <a:spcPts val="0"/>
+              </a:spcBef>
+              <a:spcAft>
+                <a:spcPts val="100"/>
+              </a:spcAft>
+            </a:pPr>
+            <a:r>
+              <a:rPr sz="800" b="1">
+                <a:solidFill>
+                  <a:srgbClr val="1E6B48"/>
                 </a:solidFill>
                 <a:latin typeface="Calibri"/>
               </a:rPr>
-              <a:t>Campaign</a:t>
+              <a:t>e6</a:t>
             </a:r>
           </a:p>
         </p:txBody>
@@ -3979,20 +4118,20 @@
         </p:nvSpPr>
         <p:spPr>
           <a:xfrm>
-            <a:off x="1645920" y="1078992"/>
-            <a:ext cx="658368" cy="237744"/>
+            <a:off x="8887968" y="969264"/>
+            <a:ext cx="768096" cy="219456"/>
           </a:xfrm>
           <a:prstGeom prst="roundRect">
             <a:avLst>
-              <a:gd name="adj" fmla="val 15000"/>
+              <a:gd name="adj" fmla="val 22000"/>
             </a:avLst>
           </a:prstGeom>
           <a:solidFill>
-            <a:srgbClr val="D4E6F1"/>
+            <a:srgbClr val="D4EDDA"/>
           </a:solidFill>
           <a:ln w="9525">
             <a:solidFill>
-              <a:srgbClr val="85C1E9"/>
+              <a:srgbClr val="82C99B"/>
             </a:solidFill>
           </a:ln>
         </p:spPr>
@@ -4011,18 +4150,25 @@
           </a:fontRef>
         </p:style>
         <p:txBody>
-          <a:bodyPr rtlCol="0" anchor="ctr" wrap="square" lIns="38100" rIns="38100" tIns="25400" bIns="12700"/>
-          <a:lstStyle/>
-          <a:p>
-            <a:pPr algn="ctr"/>
-            <a:r>
-              <a:rPr sz="700" b="1">
-                <a:solidFill>
-                  <a:srgbClr val="1C283A"/>
+          <a:bodyPr rtlCol="0" anchor="ctr" wrap="square" lIns="25400" rIns="25400" tIns="38100" bIns="25400"/>
+          <a:lstStyle/>
+          <a:p>
+            <a:pPr algn="ctr">
+              <a:spcBef>
+                <a:spcPts val="0"/>
+              </a:spcBef>
+              <a:spcAft>
+                <a:spcPts val="100"/>
+              </a:spcAft>
+            </a:pPr>
+            <a:r>
+              <a:rPr sz="800" b="1">
+                <a:solidFill>
+                  <a:srgbClr val="1E6B48"/>
                 </a:solidFill>
                 <a:latin typeface="Calibri"/>
               </a:rPr>
-              <a:t>Game</a:t>
+              <a:t>FPS</a:t>
             </a:r>
           </a:p>
         </p:txBody>
@@ -4035,20 +4181,20 @@
         </p:nvSpPr>
         <p:spPr>
           <a:xfrm>
-            <a:off x="2331720" y="1078992"/>
-            <a:ext cx="658368" cy="237744"/>
+            <a:off x="9710928" y="969264"/>
+            <a:ext cx="768096" cy="219456"/>
           </a:xfrm>
           <a:prstGeom prst="roundRect">
             <a:avLst>
-              <a:gd name="adj" fmla="val 15000"/>
+              <a:gd name="adj" fmla="val 22000"/>
             </a:avLst>
           </a:prstGeom>
           <a:solidFill>
-            <a:srgbClr val="D4E6F1"/>
+            <a:srgbClr val="D4EDDA"/>
           </a:solidFill>
           <a:ln w="9525">
             <a:solidFill>
-              <a:srgbClr val="85C1E9"/>
+              <a:srgbClr val="82C99B"/>
             </a:solidFill>
           </a:ln>
         </p:spPr>
@@ -4067,18 +4213,25 @@
           </a:fontRef>
         </p:style>
         <p:txBody>
-          <a:bodyPr rtlCol="0" anchor="ctr" wrap="square" lIns="38100" rIns="38100" tIns="25400" bIns="12700"/>
-          <a:lstStyle/>
-          <a:p>
-            <a:pPr algn="ctr"/>
-            <a:r>
-              <a:rPr sz="700" b="1">
-                <a:solidFill>
-                  <a:srgbClr val="1C283A"/>
+          <a:bodyPr rtlCol="0" anchor="ctr" wrap="square" lIns="25400" rIns="25400" tIns="38100" bIns="25400"/>
+          <a:lstStyle/>
+          <a:p>
+            <a:pPr algn="ctr">
+              <a:spcBef>
+                <a:spcPts val="0"/>
+              </a:spcBef>
+              <a:spcAft>
+                <a:spcPts val="100"/>
+              </a:spcAft>
+            </a:pPr>
+            <a:r>
+              <a:rPr sz="800" b="1">
+                <a:solidFill>
+                  <a:srgbClr val="1E6B48"/>
                 </a:solidFill>
                 <a:latin typeface="Calibri"/>
               </a:rPr>
-              <a:t>Offline</a:t>
+              <a:t>PPS</a:t>
             </a:r>
           </a:p>
         </p:txBody>
@@ -4091,20 +4244,20 @@
         </p:nvSpPr>
         <p:spPr>
           <a:xfrm>
-            <a:off x="3127248" y="603504"/>
-            <a:ext cx="2331720" cy="804672"/>
+            <a:off x="8065008" y="1225296"/>
+            <a:ext cx="768096" cy="219456"/>
           </a:xfrm>
           <a:prstGeom prst="roundRect">
             <a:avLst>
-              <a:gd name="adj" fmla="val 6000"/>
+              <a:gd name="adj" fmla="val 22000"/>
             </a:avLst>
           </a:prstGeom>
           <a:solidFill>
-            <a:srgbClr val="FFFFFF"/>
+            <a:srgbClr val="D4EDDA"/>
           </a:solidFill>
           <a:ln w="9525">
             <a:solidFill>
-              <a:srgbClr val="BFC9CA"/>
+              <a:srgbClr val="82C99B"/>
             </a:solidFill>
           </a:ln>
         </p:spPr>
@@ -4123,70 +4276,51 @@
           </a:fontRef>
         </p:style>
         <p:txBody>
-          <a:bodyPr rtlCol="0" anchor="ctr"/>
-          <a:lstStyle/>
-          <a:p>
-            <a:pPr algn="ctr"/>
-          </a:p>
-        </p:txBody>
-      </p:sp>
-      <p:sp>
-        <p:nvSpPr>
-          <p:cNvPr id="24" name="TextBox 23"/>
-          <p:cNvSpPr txBox="1"/>
-          <p:nvPr/>
-        </p:nvSpPr>
-        <p:spPr>
-          <a:xfrm>
-            <a:off x="3200400" y="621792"/>
-            <a:ext cx="2194560" cy="146304"/>
-          </a:xfrm>
-          <a:prstGeom prst="rect">
-            <a:avLst/>
-          </a:prstGeom>
-          <a:noFill/>
-        </p:spPr>
-        <p:txBody>
-          <a:bodyPr wrap="square" lIns="25400" rIns="25400" tIns="0" bIns="0">
-            <a:spAutoFit/>
-          </a:bodyPr>
-          <a:lstStyle/>
-          <a:p>
-            <a:pPr algn="l"/>
+          <a:bodyPr rtlCol="0" anchor="ctr" wrap="square" lIns="25400" rIns="25400" tIns="38100" bIns="25400"/>
+          <a:lstStyle/>
+          <a:p>
+            <a:pPr algn="ctr">
+              <a:spcBef>
+                <a:spcPts val="0"/>
+              </a:spcBef>
+              <a:spcAft>
+                <a:spcPts val="100"/>
+              </a:spcAft>
+            </a:pPr>
             <a:r>
               <a:rPr sz="800" b="1">
                 <a:solidFill>
-                  <a:srgbClr val="1B4F72"/>
+                  <a:srgbClr val="1E6B48"/>
                 </a:solidFill>
                 <a:latin typeface="Calibri"/>
               </a:rPr>
-              <a:t>Public clients</a:t>
-            </a:r>
-          </a:p>
-        </p:txBody>
-      </p:sp>
-      <p:sp>
-        <p:nvSpPr>
-          <p:cNvPr id="25" name="Rounded Rectangle 24"/>
+              <a:t>Circle K</a:t>
+            </a:r>
+          </a:p>
+        </p:txBody>
+      </p:sp>
+      <p:sp>
+        <p:nvSpPr>
+          <p:cNvPr id="24" name="Rounded Rectangle 23"/>
           <p:cNvSpPr/>
           <p:nvPr/>
         </p:nvSpPr>
         <p:spPr>
           <a:xfrm>
-            <a:off x="3218688" y="896112"/>
-            <a:ext cx="713232" cy="292608"/>
+            <a:off x="8887968" y="1225296"/>
+            <a:ext cx="768096" cy="219456"/>
           </a:xfrm>
           <a:prstGeom prst="roundRect">
             <a:avLst>
-              <a:gd name="adj" fmla="val 15000"/>
+              <a:gd name="adj" fmla="val 22000"/>
             </a:avLst>
           </a:prstGeom>
           <a:solidFill>
-            <a:srgbClr val="AED6F1"/>
+            <a:srgbClr val="D4EDDA"/>
           </a:solidFill>
           <a:ln w="9525">
             <a:solidFill>
-              <a:srgbClr val="5DAEE2"/>
+              <a:srgbClr val="82C99B"/>
             </a:solidFill>
           </a:ln>
         </p:spPr>
@@ -4205,44 +4339,49 @@
           </a:fontRef>
         </p:style>
         <p:txBody>
-          <a:bodyPr rtlCol="0" anchor="ctr" wrap="square" lIns="38100" rIns="38100" tIns="25400" bIns="12700"/>
-          <a:lstStyle/>
-          <a:p>
-            <a:pPr algn="ctr"/>
+          <a:bodyPr rtlCol="0" anchor="ctr" wrap="square" lIns="25400" rIns="25400" tIns="38100" bIns="25400"/>
+          <a:lstStyle/>
+          <a:p>
+            <a:pPr algn="ctr">
+              <a:spcBef>
+                <a:spcPts val="0"/>
+              </a:spcBef>
+              <a:spcAft>
+                <a:spcPts val="100"/>
+              </a:spcAft>
+            </a:pPr>
             <a:r>
               <a:rPr sz="800" b="1">
                 <a:solidFill>
-                  <a:srgbClr val="1C283A"/>
+                  <a:srgbClr val="1E6B48"/>
                 </a:solidFill>
                 <a:latin typeface="Calibri"/>
               </a:rPr>
-              <a:t>Yes UA</a:t>
-            </a:r>
-          </a:p>
-        </p:txBody>
-      </p:sp>
-      <p:sp>
-        <p:nvSpPr>
-          <p:cNvPr id="26" name="Rounded Rectangle 25"/>
+              <a:t>7-Eleven</a:t>
+            </a:r>
+          </a:p>
+        </p:txBody>
+      </p:sp>
+      <p:sp>
+        <p:nvSpPr>
+          <p:cNvPr id="25" name="Rectangle 24"/>
           <p:cNvSpPr/>
           <p:nvPr/>
         </p:nvSpPr>
         <p:spPr>
           <a:xfrm>
-            <a:off x="3968496" y="896112"/>
-            <a:ext cx="713232" cy="292608"/>
-          </a:xfrm>
-          <a:prstGeom prst="roundRect">
-            <a:avLst>
-              <a:gd name="adj" fmla="val 15000"/>
-            </a:avLst>
-          </a:prstGeom>
-          <a:solidFill>
-            <a:srgbClr val="AED6F1"/>
-          </a:solidFill>
-          <a:ln w="9525">
+            <a:off x="1042416" y="1627632"/>
+            <a:ext cx="9646920" cy="475488"/>
+          </a:xfrm>
+          <a:prstGeom prst="rect">
+            <a:avLst/>
+          </a:prstGeom>
+          <a:solidFill>
+            <a:srgbClr val="EEF3F8"/>
+          </a:solidFill>
+          <a:ln w="7620">
             <a:solidFill>
-              <a:srgbClr val="5DAEE2"/>
+              <a:srgbClr val="D0D7DE"/>
             </a:solidFill>
           </a:ln>
         </p:spPr>
@@ -4261,45 +4400,32 @@
           </a:fontRef>
         </p:style>
         <p:txBody>
-          <a:bodyPr rtlCol="0" anchor="ctr" wrap="square" lIns="38100" rIns="38100" tIns="25400" bIns="12700"/>
+          <a:bodyPr rtlCol="0" anchor="ctr"/>
           <a:lstStyle/>
           <a:p>
             <a:pPr algn="ctr"/>
-            <a:r>
-              <a:rPr sz="800" b="1">
-                <a:solidFill>
-                  <a:srgbClr val="1C283A"/>
-                </a:solidFill>
-                <a:latin typeface="Calibri"/>
-              </a:rPr>
-              <a:t>sim</a:t>
-            </a:r>
-          </a:p>
-        </p:txBody>
-      </p:sp>
-      <p:sp>
-        <p:nvSpPr>
-          <p:cNvPr id="27" name="Rounded Rectangle 26"/>
+          </a:p>
+        </p:txBody>
+      </p:sp>
+      <p:sp>
+        <p:nvSpPr>
+          <p:cNvPr id="26" name="Rectangle 25"/>
           <p:cNvSpPr/>
           <p:nvPr/>
         </p:nvSpPr>
         <p:spPr>
           <a:xfrm>
-            <a:off x="4718304" y="896112"/>
-            <a:ext cx="713232" cy="292608"/>
-          </a:xfrm>
-          <a:prstGeom prst="roundRect">
-            <a:avLst>
-              <a:gd name="adj" fmla="val 15000"/>
-            </a:avLst>
-          </a:prstGeom>
-          <a:solidFill>
-            <a:srgbClr val="AED6F1"/>
-          </a:solidFill>
-          <a:ln w="9525">
-            <a:solidFill>
-              <a:srgbClr val="5DAEE2"/>
-            </a:solidFill>
+            <a:off x="201168" y="1627632"/>
+            <a:ext cx="841248" cy="475488"/>
+          </a:xfrm>
+          <a:prstGeom prst="rect">
+            <a:avLst/>
+          </a:prstGeom>
+          <a:solidFill>
+            <a:srgbClr val="1B3A5F"/>
+          </a:solidFill>
+          <a:ln>
+            <a:noFill/>
           </a:ln>
         </p:spPr>
         <p:style>
@@ -4317,44 +4443,70 @@
           </a:fontRef>
         </p:style>
         <p:txBody>
-          <a:bodyPr rtlCol="0" anchor="ctr" wrap="square" lIns="38100" rIns="38100" tIns="25400" bIns="12700"/>
-          <a:lstStyle/>
-          <a:p>
-            <a:pPr algn="ctr"/>
-            <a:r>
-              <a:rPr sz="800" b="1">
-                <a:solidFill>
-                  <a:srgbClr val="1C283A"/>
+          <a:bodyPr rtlCol="0" anchor="ctr" wrap="square" lIns="50800" rIns="50800" tIns="38100" bIns="25400"/>
+          <a:lstStyle/>
+          <a:p>
+            <a:pPr algn="ctr">
+              <a:spcBef>
+                <a:spcPts val="0"/>
+              </a:spcBef>
+              <a:spcAft>
+                <a:spcPts val="100"/>
+              </a:spcAft>
+            </a:pPr>
+            <a:r>
+              <a:rPr sz="800" b="0">
+                <a:solidFill>
+                  <a:srgbClr val="B7C9DC"/>
                 </a:solidFill>
                 <a:latin typeface="Calibri"/>
               </a:rPr>
-              <a:t>Web / QR</a:t>
-            </a:r>
-          </a:p>
-        </p:txBody>
-      </p:sp>
-      <p:sp>
-        <p:nvSpPr>
-          <p:cNvPr id="28" name="Rounded Rectangle 27"/>
+              <a:t>02</a:t>
+            </a:r>
+          </a:p>
+          <a:p>
+            <a:pPr algn="ctr">
+              <a:spcBef>
+                <a:spcPts val="0"/>
+              </a:spcBef>
+              <a:spcAft>
+                <a:spcPts val="100"/>
+              </a:spcAft>
+            </a:pPr>
+            <a:r>
+              <a:rPr sz="1000" b="1">
+                <a:solidFill>
+                  <a:srgbClr val="FFFFFF"/>
+                </a:solidFill>
+                <a:latin typeface="Calibri"/>
+              </a:rPr>
+              <a:t>ACCESS</a:t>
+            </a:r>
+          </a:p>
+        </p:txBody>
+      </p:sp>
+      <p:sp>
+        <p:nvSpPr>
+          <p:cNvPr id="27" name="Rounded Rectangle 26"/>
           <p:cNvSpPr/>
           <p:nvPr/>
         </p:nvSpPr>
         <p:spPr>
           <a:xfrm>
-            <a:off x="5559552" y="603504"/>
-            <a:ext cx="1965960" cy="804672"/>
+            <a:off x="1545336" y="1709928"/>
+            <a:ext cx="4160520" cy="310896"/>
           </a:xfrm>
           <a:prstGeom prst="roundRect">
             <a:avLst>
-              <a:gd name="adj" fmla="val 6000"/>
+              <a:gd name="adj" fmla="val 12000"/>
             </a:avLst>
           </a:prstGeom>
           <a:solidFill>
-            <a:srgbClr val="FFFFFF"/>
-          </a:solidFill>
-          <a:ln w="9525">
+            <a:srgbClr val="F6C6C7"/>
+          </a:solidFill>
+          <a:ln w="12700">
             <a:solidFill>
-              <a:srgbClr val="BFC9CA"/>
+              <a:srgbClr val="E09A9A"/>
             </a:solidFill>
           </a:ln>
         </p:spPr>
@@ -4373,106 +4525,51 @@
           </a:fontRef>
         </p:style>
         <p:txBody>
-          <a:bodyPr rtlCol="0" anchor="ctr"/>
-          <a:lstStyle/>
-          <a:p>
-            <a:pPr algn="ctr"/>
-          </a:p>
-        </p:txBody>
-      </p:sp>
-      <p:sp>
-        <p:nvSpPr>
-          <p:cNvPr id="29" name="TextBox 28"/>
-          <p:cNvSpPr txBox="1"/>
-          <p:nvPr/>
-        </p:nvSpPr>
-        <p:spPr>
-          <a:xfrm>
-            <a:off x="5632704" y="621792"/>
-            <a:ext cx="1828800" cy="146304"/>
-          </a:xfrm>
-          <a:prstGeom prst="rect">
-            <a:avLst/>
-          </a:prstGeom>
-          <a:noFill/>
-        </p:spPr>
-        <p:txBody>
-          <a:bodyPr wrap="square" lIns="25400" rIns="25400" tIns="0" bIns="0">
-            <a:spAutoFit/>
-          </a:bodyPr>
-          <a:lstStyle/>
-          <a:p>
-            <a:pPr algn="l"/>
-            <a:r>
-              <a:rPr sz="800" b="1">
-                <a:solidFill>
-                  <a:srgbClr val="1B4F72"/>
+          <a:bodyPr rtlCol="0" anchor="ctr" wrap="square" lIns="50800" rIns="50800" tIns="38100" bIns="25400"/>
+          <a:lstStyle/>
+          <a:p>
+            <a:pPr algn="ctr">
+              <a:spcBef>
+                <a:spcPts val="0"/>
+              </a:spcBef>
+              <a:spcAft>
+                <a:spcPts val="100"/>
+              </a:spcAft>
+            </a:pPr>
+            <a:r>
+              <a:rPr sz="1200" b="1">
+                <a:solidFill>
+                  <a:srgbClr val="1B3A5F"/>
                 </a:solidFill>
                 <a:latin typeface="Calibri"/>
               </a:rPr>
-              <a:t>Internal platform</a:t>
-            </a:r>
-          </a:p>
-        </p:txBody>
-      </p:sp>
-      <p:sp>
-        <p:nvSpPr>
-          <p:cNvPr id="30" name="TextBox 29"/>
-          <p:cNvSpPr txBox="1"/>
-          <p:nvPr/>
-        </p:nvSpPr>
-        <p:spPr>
-          <a:xfrm>
-            <a:off x="5632704" y="822960"/>
-            <a:ext cx="1828800" cy="457200"/>
-          </a:xfrm>
-          <a:prstGeom prst="rect">
-            <a:avLst/>
-          </a:prstGeom>
-          <a:noFill/>
-        </p:spPr>
-        <p:txBody>
-          <a:bodyPr wrap="square" lIns="25400" rIns="25400" tIns="0" bIns="0">
-            <a:spAutoFit/>
-          </a:bodyPr>
-          <a:lstStyle/>
-          <a:p>
-            <a:pPr algn="l"/>
-            <a:r>
-              <a:rPr sz="800" b="0">
-                <a:solidFill>
-                  <a:srgbClr val="4A5568"/>
-                </a:solidFill>
-                <a:latin typeface="Calibri"/>
-              </a:rPr>
-              <a:t>Ops UI  ·  CSP  ·  IAM
-(UAF network)</a:t>
-            </a:r>
-          </a:p>
-        </p:txBody>
-      </p:sp>
-      <p:sp>
-        <p:nvSpPr>
-          <p:cNvPr id="31" name="Rounded Rectangle 30"/>
+              <a:t>API Gateway   ·   public ingress</a:t>
+            </a:r>
+          </a:p>
+        </p:txBody>
+      </p:sp>
+      <p:sp>
+        <p:nvSpPr>
+          <p:cNvPr id="28" name="Rounded Rectangle 27"/>
           <p:cNvSpPr/>
           <p:nvPr/>
         </p:nvSpPr>
         <p:spPr>
           <a:xfrm>
-            <a:off x="7635240" y="603504"/>
-            <a:ext cx="2697480" cy="804672"/>
+            <a:off x="5934456" y="1709928"/>
+            <a:ext cx="4160520" cy="310896"/>
           </a:xfrm>
           <a:prstGeom prst="roundRect">
             <a:avLst>
-              <a:gd name="adj" fmla="val 6000"/>
+              <a:gd name="adj" fmla="val 12000"/>
             </a:avLst>
           </a:prstGeom>
           <a:solidFill>
-            <a:srgbClr val="FFFFFF"/>
-          </a:solidFill>
-          <a:ln w="9525">
+            <a:srgbClr val="F6C6C7"/>
+          </a:solidFill>
+          <a:ln w="12700">
             <a:solidFill>
-              <a:srgbClr val="BFC9CA"/>
+              <a:srgbClr val="E09A9A"/>
             </a:solidFill>
           </a:ln>
         </p:spPr>
@@ -4491,70 +4588,49 @@
           </a:fontRef>
         </p:style>
         <p:txBody>
-          <a:bodyPr rtlCol="0" anchor="ctr"/>
-          <a:lstStyle/>
-          <a:p>
-            <a:pPr algn="ctr"/>
-          </a:p>
-        </p:txBody>
-      </p:sp>
-      <p:sp>
-        <p:nvSpPr>
-          <p:cNvPr id="32" name="TextBox 31"/>
-          <p:cNvSpPr txBox="1"/>
+          <a:bodyPr rtlCol="0" anchor="ctr" wrap="square" lIns="50800" rIns="50800" tIns="38100" bIns="25400"/>
+          <a:lstStyle/>
+          <a:p>
+            <a:pPr algn="ctr">
+              <a:spcBef>
+                <a:spcPts val="0"/>
+              </a:spcBef>
+              <a:spcAft>
+                <a:spcPts val="100"/>
+              </a:spcAft>
+            </a:pPr>
+            <a:r>
+              <a:rPr sz="1200" b="1">
+                <a:solidFill>
+                  <a:srgbClr val="1B3A5F"/>
+                </a:solidFill>
+                <a:latin typeface="Calibri"/>
+              </a:rPr>
+              <a:t>API Gateway   ·   internal / ops</a:t>
+            </a:r>
+          </a:p>
+        </p:txBody>
+      </p:sp>
+      <p:sp>
+        <p:nvSpPr>
+          <p:cNvPr id="29" name="Rectangle 28"/>
+          <p:cNvSpPr/>
           <p:nvPr/>
         </p:nvSpPr>
         <p:spPr>
           <a:xfrm>
-            <a:off x="7699248" y="621792"/>
-            <a:ext cx="2560320" cy="146304"/>
+            <a:off x="1042416" y="2176272"/>
+            <a:ext cx="9646920" cy="914400"/>
           </a:xfrm>
           <a:prstGeom prst="rect">
             <a:avLst/>
           </a:prstGeom>
-          <a:noFill/>
-        </p:spPr>
-        <p:txBody>
-          <a:bodyPr wrap="square" lIns="25400" rIns="25400" tIns="0" bIns="0">
-            <a:spAutoFit/>
-          </a:bodyPr>
-          <a:lstStyle/>
-          <a:p>
-            <a:pPr algn="l"/>
-            <a:r>
-              <a:rPr sz="800" b="1">
-                <a:solidFill>
-                  <a:srgbClr val="1B4F72"/>
-                </a:solidFill>
-                <a:latin typeface="Calibri"/>
-              </a:rPr>
-              <a:t>External parties / rails</a:t>
-            </a:r>
-          </a:p>
-        </p:txBody>
-      </p:sp>
-      <p:sp>
-        <p:nvSpPr>
-          <p:cNvPr id="33" name="Rounded Rectangle 32"/>
-          <p:cNvSpPr/>
-          <p:nvPr/>
-        </p:nvSpPr>
-        <p:spPr>
-          <a:xfrm>
-            <a:off x="7699248" y="914400"/>
-            <a:ext cx="493776" cy="292608"/>
-          </a:xfrm>
-          <a:prstGeom prst="roundRect">
-            <a:avLst>
-              <a:gd name="adj" fmla="val 15000"/>
-            </a:avLst>
-          </a:prstGeom>
-          <a:solidFill>
-            <a:srgbClr val="D5F5E3"/>
-          </a:solidFill>
-          <a:ln w="9525">
+          <a:solidFill>
+            <a:srgbClr val="EEF3F8"/>
+          </a:solidFill>
+          <a:ln w="7620">
             <a:solidFill>
-              <a:srgbClr val="82E0AA"/>
+              <a:srgbClr val="D0D7DE"/>
             </a:solidFill>
           </a:ln>
         </p:spPr>
@@ -4573,45 +4649,32 @@
           </a:fontRef>
         </p:style>
         <p:txBody>
-          <a:bodyPr rtlCol="0" anchor="ctr" wrap="square" lIns="38100" rIns="38100" tIns="25400" bIns="12700"/>
+          <a:bodyPr rtlCol="0" anchor="ctr"/>
           <a:lstStyle/>
           <a:p>
             <a:pPr algn="ctr"/>
-            <a:r>
-              <a:rPr sz="700" b="1">
-                <a:solidFill>
-                  <a:srgbClr val="1C283A"/>
-                </a:solidFill>
-                <a:latin typeface="Calibri"/>
-              </a:rPr>
-              <a:t>e6</a:t>
-            </a:r>
-          </a:p>
-        </p:txBody>
-      </p:sp>
-      <p:sp>
-        <p:nvSpPr>
-          <p:cNvPr id="34" name="Rounded Rectangle 33"/>
+          </a:p>
+        </p:txBody>
+      </p:sp>
+      <p:sp>
+        <p:nvSpPr>
+          <p:cNvPr id="30" name="Rectangle 29"/>
           <p:cNvSpPr/>
           <p:nvPr/>
         </p:nvSpPr>
         <p:spPr>
           <a:xfrm>
-            <a:off x="8211312" y="914400"/>
-            <a:ext cx="493776" cy="292608"/>
-          </a:xfrm>
-          <a:prstGeom prst="roundRect">
-            <a:avLst>
-              <a:gd name="adj" fmla="val 15000"/>
-            </a:avLst>
-          </a:prstGeom>
-          <a:solidFill>
-            <a:srgbClr val="D5F5E3"/>
-          </a:solidFill>
-          <a:ln w="9525">
-            <a:solidFill>
-              <a:srgbClr val="82E0AA"/>
-            </a:solidFill>
+            <a:off x="201168" y="2176272"/>
+            <a:ext cx="841248" cy="914400"/>
+          </a:xfrm>
+          <a:prstGeom prst="rect">
+            <a:avLst/>
+          </a:prstGeom>
+          <a:solidFill>
+            <a:srgbClr val="1B3A5F"/>
+          </a:solidFill>
+          <a:ln>
+            <a:noFill/>
           </a:ln>
         </p:spPr>
         <p:style>
@@ -4629,44 +4692,70 @@
           </a:fontRef>
         </p:style>
         <p:txBody>
-          <a:bodyPr rtlCol="0" anchor="ctr" wrap="square" lIns="38100" rIns="38100" tIns="25400" bIns="12700"/>
-          <a:lstStyle/>
-          <a:p>
-            <a:pPr algn="ctr"/>
-            <a:r>
-              <a:rPr sz="700" b="1">
-                <a:solidFill>
-                  <a:srgbClr val="1C283A"/>
+          <a:bodyPr rtlCol="0" anchor="ctr" wrap="square" lIns="50800" rIns="50800" tIns="38100" bIns="25400"/>
+          <a:lstStyle/>
+          <a:p>
+            <a:pPr algn="ctr">
+              <a:spcBef>
+                <a:spcPts val="0"/>
+              </a:spcBef>
+              <a:spcAft>
+                <a:spcPts val="100"/>
+              </a:spcAft>
+            </a:pPr>
+            <a:r>
+              <a:rPr sz="800" b="0">
+                <a:solidFill>
+                  <a:srgbClr val="B7C9DC"/>
                 </a:solidFill>
                 <a:latin typeface="Calibri"/>
               </a:rPr>
-              <a:t>FPS</a:t>
-            </a:r>
-          </a:p>
-        </p:txBody>
-      </p:sp>
-      <p:sp>
-        <p:nvSpPr>
-          <p:cNvPr id="35" name="Rounded Rectangle 34"/>
+              <a:t>03</a:t>
+            </a:r>
+          </a:p>
+          <a:p>
+            <a:pPr algn="ctr">
+              <a:spcBef>
+                <a:spcPts val="0"/>
+              </a:spcBef>
+              <a:spcAft>
+                <a:spcPts val="100"/>
+              </a:spcAft>
+            </a:pPr>
+            <a:r>
+              <a:rPr sz="1000" b="1">
+                <a:solidFill>
+                  <a:srgbClr val="FFFFFF"/>
+                </a:solidFill>
+                <a:latin typeface="Calibri"/>
+              </a:rPr>
+              <a:t>DOMAIN</a:t>
+            </a:r>
+          </a:p>
+        </p:txBody>
+      </p:sp>
+      <p:sp>
+        <p:nvSpPr>
+          <p:cNvPr id="31" name="Rounded Rectangle 30"/>
           <p:cNvSpPr/>
           <p:nvPr/>
         </p:nvSpPr>
         <p:spPr>
           <a:xfrm>
-            <a:off x="8723376" y="914400"/>
-            <a:ext cx="493776" cy="292608"/>
+            <a:off x="1133856" y="2267712"/>
+            <a:ext cx="5623560" cy="731520"/>
           </a:xfrm>
           <a:prstGeom prst="roundRect">
             <a:avLst>
-              <a:gd name="adj" fmla="val 15000"/>
+              <a:gd name="adj" fmla="val 6000"/>
             </a:avLst>
           </a:prstGeom>
           <a:solidFill>
-            <a:srgbClr val="D5F5E3"/>
-          </a:solidFill>
-          <a:ln w="9525">
+            <a:srgbClr val="FFFFFF"/>
+          </a:solidFill>
+          <a:ln w="11430">
             <a:solidFill>
-              <a:srgbClr val="82E0AA"/>
+              <a:srgbClr val="D0D7DE"/>
             </a:solidFill>
           </a:ln>
         </p:spPr>
@@ -4685,44 +4774,49 @@
           </a:fontRef>
         </p:style>
         <p:txBody>
-          <a:bodyPr rtlCol="0" anchor="ctr" wrap="square" lIns="38100" rIns="38100" tIns="25400" bIns="12700"/>
-          <a:lstStyle/>
-          <a:p>
-            <a:pPr algn="ctr"/>
-            <a:r>
-              <a:rPr sz="700" b="1">
-                <a:solidFill>
-                  <a:srgbClr val="1C283A"/>
+          <a:bodyPr rtlCol="0" anchor="ctr" wrap="square" lIns="101600" rIns="101600" tIns="38100" bIns="25400"/>
+          <a:lstStyle/>
+          <a:p>
+            <a:pPr algn="l">
+              <a:spcBef>
+                <a:spcPts val="0"/>
+              </a:spcBef>
+              <a:spcAft>
+                <a:spcPts val="100"/>
+              </a:spcAft>
+            </a:pPr>
+            <a:r>
+              <a:rPr sz="1100" b="1">
+                <a:solidFill>
+                  <a:srgbClr val="1B3A5F"/>
                 </a:solidFill>
                 <a:latin typeface="Calibri"/>
               </a:rPr>
-              <a:t>PPS</a:t>
-            </a:r>
-          </a:p>
-        </p:txBody>
-      </p:sp>
-      <p:sp>
-        <p:nvSpPr>
-          <p:cNvPr id="36" name="Rounded Rectangle 35"/>
+              <a:t>Credit Card microservices   (40+)  —  existing estate</a:t>
+            </a:r>
+          </a:p>
+        </p:txBody>
+      </p:sp>
+      <p:sp>
+        <p:nvSpPr>
+          <p:cNvPr id="32" name="Hexagon 31"/>
           <p:cNvSpPr/>
           <p:nvPr/>
         </p:nvSpPr>
         <p:spPr>
           <a:xfrm>
-            <a:off x="9235440" y="914400"/>
-            <a:ext cx="493776" cy="292608"/>
-          </a:xfrm>
-          <a:prstGeom prst="roundRect">
-            <a:avLst>
-              <a:gd name="adj" fmla="val 15000"/>
-            </a:avLst>
-          </a:prstGeom>
-          <a:solidFill>
-            <a:srgbClr val="D5F5E3"/>
+            <a:off x="1243584" y="2615184"/>
+            <a:ext cx="841248" cy="365760"/>
+          </a:xfrm>
+          <a:prstGeom prst="hexagon">
+            <a:avLst/>
+          </a:prstGeom>
+          <a:solidFill>
+            <a:srgbClr val="F6C6C7"/>
           </a:solidFill>
           <a:ln w="9525">
             <a:solidFill>
-              <a:srgbClr val="82E0AA"/>
+              <a:srgbClr val="E09A9A"/>
             </a:solidFill>
           </a:ln>
         </p:spPr>
@@ -4741,44 +4835,49 @@
           </a:fontRef>
         </p:style>
         <p:txBody>
-          <a:bodyPr rtlCol="0" anchor="ctr" wrap="square" lIns="38100" rIns="38100" tIns="25400" bIns="12700"/>
-          <a:lstStyle/>
-          <a:p>
-            <a:pPr algn="ctr"/>
-            <a:r>
-              <a:rPr sz="700" b="1">
-                <a:solidFill>
-                  <a:srgbClr val="1C283A"/>
+          <a:bodyPr rtlCol="0" anchor="ctr" wrap="square" lIns="12700" rIns="12700" tIns="38100" bIns="25400"/>
+          <a:lstStyle/>
+          <a:p>
+            <a:pPr algn="ctr">
+              <a:spcBef>
+                <a:spcPts val="0"/>
+              </a:spcBef>
+              <a:spcAft>
+                <a:spcPts val="100"/>
+              </a:spcAft>
+            </a:pPr>
+            <a:r>
+              <a:rPr sz="800" b="1">
+                <a:solidFill>
+                  <a:srgbClr val="1F2A37"/>
                 </a:solidFill>
                 <a:latin typeface="Calibri"/>
               </a:rPr>
-              <a:t>Circle K</a:t>
-            </a:r>
-          </a:p>
-        </p:txBody>
-      </p:sp>
-      <p:sp>
-        <p:nvSpPr>
-          <p:cNvPr id="37" name="Rounded Rectangle 36"/>
+              <a:t>ext-sapi</a:t>
+            </a:r>
+          </a:p>
+        </p:txBody>
+      </p:sp>
+      <p:sp>
+        <p:nvSpPr>
+          <p:cNvPr id="33" name="Hexagon 32"/>
           <p:cNvSpPr/>
           <p:nvPr/>
         </p:nvSpPr>
         <p:spPr>
           <a:xfrm>
-            <a:off x="9747504" y="914400"/>
-            <a:ext cx="493776" cy="292608"/>
-          </a:xfrm>
-          <a:prstGeom prst="roundRect">
-            <a:avLst>
-              <a:gd name="adj" fmla="val 15000"/>
-            </a:avLst>
-          </a:prstGeom>
-          <a:solidFill>
-            <a:srgbClr val="D5F5E3"/>
+            <a:off x="2157984" y="2615184"/>
+            <a:ext cx="841248" cy="365760"/>
+          </a:xfrm>
+          <a:prstGeom prst="hexagon">
+            <a:avLst/>
+          </a:prstGeom>
+          <a:solidFill>
+            <a:srgbClr val="F6C6C7"/>
           </a:solidFill>
           <a:ln w="9525">
             <a:solidFill>
-              <a:srgbClr val="82E0AA"/>
+              <a:srgbClr val="E09A9A"/>
             </a:solidFill>
           </a:ln>
         </p:spPr>
@@ -4797,42 +4896,49 @@
           </a:fontRef>
         </p:style>
         <p:txBody>
-          <a:bodyPr rtlCol="0" anchor="ctr" wrap="square" lIns="38100" rIns="38100" tIns="25400" bIns="12700"/>
-          <a:lstStyle/>
-          <a:p>
-            <a:pPr algn="ctr"/>
-            <a:r>
-              <a:rPr sz="700" b="1">
-                <a:solidFill>
-                  <a:srgbClr val="1C283A"/>
+          <a:bodyPr rtlCol="0" anchor="ctr" wrap="square" lIns="12700" rIns="12700" tIns="38100" bIns="25400"/>
+          <a:lstStyle/>
+          <a:p>
+            <a:pPr algn="ctr">
+              <a:spcBef>
+                <a:spcPts val="0"/>
+              </a:spcBef>
+              <a:spcAft>
+                <a:spcPts val="100"/>
+              </a:spcAft>
+            </a:pPr>
+            <a:r>
+              <a:rPr sz="800" b="1">
+                <a:solidFill>
+                  <a:srgbClr val="1F2A37"/>
                 </a:solidFill>
                 <a:latin typeface="Calibri"/>
               </a:rPr>
-              <a:t>7-Eleven</a:t>
-            </a:r>
-          </a:p>
-        </p:txBody>
-      </p:sp>
-      <p:sp>
-        <p:nvSpPr>
-          <p:cNvPr id="38" name="Rectangle 37"/>
+              <a:t>E6-XAPI</a:t>
+            </a:r>
+          </a:p>
+        </p:txBody>
+      </p:sp>
+      <p:sp>
+        <p:nvSpPr>
+          <p:cNvPr id="34" name="Hexagon 33"/>
           <p:cNvSpPr/>
           <p:nvPr/>
         </p:nvSpPr>
         <p:spPr>
           <a:xfrm>
-            <a:off x="804672" y="1554480"/>
-            <a:ext cx="9646920" cy="566928"/>
-          </a:xfrm>
-          <a:prstGeom prst="rect">
+            <a:off x="3072384" y="2615184"/>
+            <a:ext cx="841248" cy="365760"/>
+          </a:xfrm>
+          <a:prstGeom prst="hexagon">
             <a:avLst/>
           </a:prstGeom>
           <a:solidFill>
-            <a:srgbClr val="FDF2E9"/>
+            <a:srgbClr val="F6C6C7"/>
           </a:solidFill>
           <a:ln w="9525">
             <a:solidFill>
-              <a:srgbClr val="BFC9CA"/>
+              <a:srgbClr val="E09A9A"/>
             </a:solidFill>
           </a:ln>
         </p:spPr>
@@ -4851,33 +4957,49 @@
           </a:fontRef>
         </p:style>
         <p:txBody>
-          <a:bodyPr rtlCol="0" anchor="ctr"/>
-          <a:lstStyle/>
-          <a:p>
-            <a:pPr algn="ctr"/>
-          </a:p>
-        </p:txBody>
-      </p:sp>
-      <p:sp>
-        <p:nvSpPr>
-          <p:cNvPr id="39" name="Rectangle 38"/>
+          <a:bodyPr rtlCol="0" anchor="ctr" wrap="square" lIns="12700" rIns="12700" tIns="38100" bIns="25400"/>
+          <a:lstStyle/>
+          <a:p>
+            <a:pPr algn="ctr">
+              <a:spcBef>
+                <a:spcPts val="0"/>
+              </a:spcBef>
+              <a:spcAft>
+                <a:spcPts val="100"/>
+              </a:spcAft>
+            </a:pPr>
+            <a:r>
+              <a:rPr sz="800" b="1">
+                <a:solidFill>
+                  <a:srgbClr val="1F2A37"/>
+                </a:solidFill>
+                <a:latin typeface="Calibri"/>
+              </a:rPr>
+              <a:t>User-Auth</a:t>
+            </a:r>
+          </a:p>
+        </p:txBody>
+      </p:sp>
+      <p:sp>
+        <p:nvSpPr>
+          <p:cNvPr id="35" name="Hexagon 34"/>
           <p:cNvSpPr/>
           <p:nvPr/>
         </p:nvSpPr>
         <p:spPr>
           <a:xfrm>
-            <a:off x="109728" y="1554480"/>
-            <a:ext cx="640080" cy="566928"/>
-          </a:xfrm>
-          <a:prstGeom prst="rect">
+            <a:off x="3986784" y="2615184"/>
+            <a:ext cx="841248" cy="365760"/>
+          </a:xfrm>
+          <a:prstGeom prst="hexagon">
             <a:avLst/>
           </a:prstGeom>
           <a:solidFill>
-            <a:srgbClr val="FDF2E9"/>
+            <a:srgbClr val="F6C6C7"/>
           </a:solidFill>
           <a:ln w="9525">
             <a:solidFill>
-              <a:srgbClr val="BFC9CA"/>
+              <a:srgbClr val="E09A9A"/>
             </a:solidFill>
           </a:ln>
         </p:spPr>
@@ -4896,106 +5018,49 @@
           </a:fontRef>
         </p:style>
         <p:txBody>
-          <a:bodyPr rtlCol="0" anchor="ctr"/>
-          <a:lstStyle/>
-          <a:p>
-            <a:pPr algn="ctr"/>
-          </a:p>
-        </p:txBody>
-      </p:sp>
-      <p:sp>
-        <p:nvSpPr>
-          <p:cNvPr id="40" name="TextBox 39"/>
-          <p:cNvSpPr txBox="1"/>
-          <p:nvPr/>
-        </p:nvSpPr>
-        <p:spPr>
-          <a:xfrm>
-            <a:off x="128016" y="1609344"/>
-            <a:ext cx="603504" cy="329184"/>
-          </a:xfrm>
-          <a:prstGeom prst="rect">
-            <a:avLst/>
-          </a:prstGeom>
-          <a:noFill/>
-        </p:spPr>
-        <p:txBody>
-          <a:bodyPr wrap="square" lIns="25400" rIns="25400" tIns="0" bIns="0">
-            <a:spAutoFit/>
-          </a:bodyPr>
-          <a:lstStyle/>
-          <a:p>
-            <a:pPr algn="ctr"/>
+          <a:bodyPr rtlCol="0" anchor="ctr" wrap="square" lIns="12700" rIns="12700" tIns="38100" bIns="25400"/>
+          <a:lstStyle/>
+          <a:p>
+            <a:pPr algn="ctr">
+              <a:spcBef>
+                <a:spcPts val="0"/>
+              </a:spcBef>
+              <a:spcAft>
+                <a:spcPts val="100"/>
+              </a:spcAft>
+            </a:pPr>
             <a:r>
               <a:rPr sz="800" b="1">
                 <a:solidFill>
-                  <a:srgbClr val="1B4F72"/>
+                  <a:srgbClr val="1F2A37"/>
                 </a:solidFill>
                 <a:latin typeface="Calibri"/>
               </a:rPr>
-              <a:t>02
-Access</a:t>
-            </a:r>
-          </a:p>
-        </p:txBody>
-      </p:sp>
-      <p:sp>
-        <p:nvSpPr>
-          <p:cNvPr id="41" name="TextBox 40"/>
-          <p:cNvSpPr txBox="1"/>
-          <p:nvPr/>
-        </p:nvSpPr>
-        <p:spPr>
-          <a:xfrm>
-            <a:off x="128016" y="1920240"/>
-            <a:ext cx="603504" cy="365760"/>
-          </a:xfrm>
-          <a:prstGeom prst="rect">
-            <a:avLst/>
-          </a:prstGeom>
-          <a:noFill/>
-        </p:spPr>
-        <p:txBody>
-          <a:bodyPr wrap="square" lIns="25400" rIns="25400" tIns="0" bIns="0">
-            <a:spAutoFit/>
-          </a:bodyPr>
-          <a:lstStyle/>
-          <a:p>
-            <a:pPr algn="ctr"/>
-            <a:r>
-              <a:rPr sz="700" b="0">
-                <a:solidFill>
-                  <a:srgbClr val="7F8C8D"/>
-                </a:solidFill>
-                <a:latin typeface="Calibri"/>
-              </a:rPr>
-              <a:t>DMZ</a:t>
-            </a:r>
-          </a:p>
-        </p:txBody>
-      </p:sp>
-      <p:sp>
-        <p:nvSpPr>
-          <p:cNvPr id="42" name="Rounded Rectangle 41"/>
+              <a:t>Application</a:t>
+            </a:r>
+          </a:p>
+        </p:txBody>
+      </p:sp>
+      <p:sp>
+        <p:nvSpPr>
+          <p:cNvPr id="36" name="Hexagon 35"/>
           <p:cNvSpPr/>
           <p:nvPr/>
         </p:nvSpPr>
         <p:spPr>
           <a:xfrm>
-            <a:off x="2194560" y="1645920"/>
-            <a:ext cx="3108960" cy="384048"/>
-          </a:xfrm>
-          <a:prstGeom prst="roundRect">
-            <a:avLst>
-              <a:gd name="adj" fmla="val 8000"/>
-            </a:avLst>
-          </a:prstGeom>
-          <a:solidFill>
-            <a:srgbClr val="E6B0AA"/>
-          </a:solidFill>
-          <a:ln w="14604">
+            <a:off x="4901184" y="2615184"/>
+            <a:ext cx="841248" cy="365760"/>
+          </a:xfrm>
+          <a:prstGeom prst="hexagon">
+            <a:avLst/>
+          </a:prstGeom>
+          <a:solidFill>
+            <a:srgbClr val="F6C6C7"/>
+          </a:solidFill>
+          <a:ln w="9525">
             <a:solidFill>
-              <a:srgbClr val="C0392B"/>
+              <a:srgbClr val="E09A9A"/>
             </a:solidFill>
           </a:ln>
         </p:spPr>
@@ -5014,35 +5079,49 @@
           </a:fontRef>
         </p:style>
         <p:txBody>
-          <a:bodyPr rtlCol="0" anchor="ctr"/>
-          <a:lstStyle/>
-          <a:p>
-            <a:pPr algn="ctr"/>
-          </a:p>
-        </p:txBody>
-      </p:sp>
-      <p:sp>
-        <p:nvSpPr>
-          <p:cNvPr id="43" name="Rounded Rectangle 42"/>
+          <a:bodyPr rtlCol="0" anchor="ctr" wrap="square" lIns="12700" rIns="12700" tIns="38100" bIns="25400"/>
+          <a:lstStyle/>
+          <a:p>
+            <a:pPr algn="ctr">
+              <a:spcBef>
+                <a:spcPts val="0"/>
+              </a:spcBef>
+              <a:spcAft>
+                <a:spcPts val="100"/>
+              </a:spcAft>
+            </a:pPr>
+            <a:r>
+              <a:rPr sz="800" b="1">
+                <a:solidFill>
+                  <a:srgbClr val="1F2A37"/>
+                </a:solidFill>
+                <a:latin typeface="Calibri"/>
+              </a:rPr>
+              <a:t>Notification</a:t>
+            </a:r>
+          </a:p>
+        </p:txBody>
+      </p:sp>
+      <p:sp>
+        <p:nvSpPr>
+          <p:cNvPr id="37" name="Hexagon 36"/>
           <p:cNvSpPr/>
           <p:nvPr/>
         </p:nvSpPr>
         <p:spPr>
           <a:xfrm>
-            <a:off x="2194560" y="1645920"/>
-            <a:ext cx="3108960" cy="384048"/>
-          </a:xfrm>
-          <a:prstGeom prst="roundRect">
-            <a:avLst>
-              <a:gd name="adj" fmla="val 8000"/>
-            </a:avLst>
-          </a:prstGeom>
-          <a:solidFill>
-            <a:srgbClr val="E6B0AA"/>
-          </a:solidFill>
-          <a:ln w="14604">
+            <a:off x="5815584" y="2615184"/>
+            <a:ext cx="841248" cy="365760"/>
+          </a:xfrm>
+          <a:prstGeom prst="hexagon">
+            <a:avLst/>
+          </a:prstGeom>
+          <a:solidFill>
+            <a:srgbClr val="F6C6C7"/>
+          </a:solidFill>
+          <a:ln w="9525">
             <a:solidFill>
-              <a:srgbClr val="C0392B"/>
+              <a:srgbClr val="E09A9A"/>
             </a:solidFill>
           </a:ln>
         </p:spPr>
@@ -5061,44 +5140,51 @@
           </a:fontRef>
         </p:style>
         <p:txBody>
-          <a:bodyPr rtlCol="0" anchor="ctr" wrap="square" lIns="38100" rIns="38100" tIns="25400" bIns="12700"/>
-          <a:lstStyle/>
-          <a:p>
-            <a:pPr algn="ctr"/>
-            <a:r>
-              <a:rPr sz="1100" b="1">
-                <a:solidFill>
-                  <a:srgbClr val="1B4F72"/>
+          <a:bodyPr rtlCol="0" anchor="ctr" wrap="square" lIns="12700" rIns="12700" tIns="38100" bIns="25400"/>
+          <a:lstStyle/>
+          <a:p>
+            <a:pPr algn="ctr">
+              <a:spcBef>
+                <a:spcPts val="0"/>
+              </a:spcBef>
+              <a:spcAft>
+                <a:spcPts val="100"/>
+              </a:spcAft>
+            </a:pPr>
+            <a:r>
+              <a:rPr sz="800" b="1">
+                <a:solidFill>
+                  <a:srgbClr val="1F2A37"/>
                 </a:solidFill>
                 <a:latin typeface="Calibri"/>
               </a:rPr>
-              <a:t>API Gateway  ·  public ingress</a:t>
-            </a:r>
-          </a:p>
-        </p:txBody>
-      </p:sp>
-      <p:sp>
-        <p:nvSpPr>
-          <p:cNvPr id="44" name="Rounded Rectangle 43"/>
+              <a:t>Instalment</a:t>
+            </a:r>
+          </a:p>
+        </p:txBody>
+      </p:sp>
+      <p:sp>
+        <p:nvSpPr>
+          <p:cNvPr id="38" name="Rounded Rectangle 37"/>
           <p:cNvSpPr/>
           <p:nvPr/>
         </p:nvSpPr>
         <p:spPr>
           <a:xfrm>
-            <a:off x="5577840" y="1645920"/>
-            <a:ext cx="3108960" cy="384048"/>
+            <a:off x="6894576" y="2267712"/>
+            <a:ext cx="2331720" cy="731520"/>
           </a:xfrm>
           <a:prstGeom prst="roundRect">
             <a:avLst>
-              <a:gd name="adj" fmla="val 8000"/>
+              <a:gd name="adj" fmla="val 6000"/>
             </a:avLst>
           </a:prstGeom>
           <a:solidFill>
-            <a:srgbClr val="E6B0AA"/>
-          </a:solidFill>
-          <a:ln w="14604">
+            <a:srgbClr val="FFFFFF"/>
+          </a:solidFill>
+          <a:ln w="11430">
             <a:solidFill>
-              <a:srgbClr val="C0392B"/>
+              <a:srgbClr val="D0D7DE"/>
             </a:solidFill>
           </a:ln>
         </p:spPr>
@@ -5117,35 +5203,49 @@
           </a:fontRef>
         </p:style>
         <p:txBody>
-          <a:bodyPr rtlCol="0" anchor="ctr"/>
-          <a:lstStyle/>
-          <a:p>
-            <a:pPr algn="ctr"/>
-          </a:p>
-        </p:txBody>
-      </p:sp>
-      <p:sp>
-        <p:nvSpPr>
-          <p:cNvPr id="45" name="Rounded Rectangle 44"/>
+          <a:bodyPr rtlCol="0" anchor="ctr" wrap="square" lIns="101600" rIns="101600" tIns="38100" bIns="25400"/>
+          <a:lstStyle/>
+          <a:p>
+            <a:pPr algn="l">
+              <a:spcBef>
+                <a:spcPts val="0"/>
+              </a:spcBef>
+              <a:spcAft>
+                <a:spcPts val="100"/>
+              </a:spcAft>
+            </a:pPr>
+            <a:r>
+              <a:rPr sz="1100" b="1">
+                <a:solidFill>
+                  <a:srgbClr val="1B3A5F"/>
+                </a:solidFill>
+                <a:latin typeface="Calibri"/>
+              </a:rPr>
+              <a:t>Loan  (20+)</a:t>
+            </a:r>
+          </a:p>
+        </p:txBody>
+      </p:sp>
+      <p:sp>
+        <p:nvSpPr>
+          <p:cNvPr id="39" name="Hexagon 38"/>
           <p:cNvSpPr/>
           <p:nvPr/>
         </p:nvSpPr>
         <p:spPr>
           <a:xfrm>
-            <a:off x="5577840" y="1645920"/>
-            <a:ext cx="3108960" cy="384048"/>
-          </a:xfrm>
-          <a:prstGeom prst="roundRect">
-            <a:avLst>
-              <a:gd name="adj" fmla="val 8000"/>
-            </a:avLst>
-          </a:prstGeom>
-          <a:solidFill>
-            <a:srgbClr val="F5B7B1"/>
-          </a:solidFill>
-          <a:ln w="14604">
+            <a:off x="7031736" y="2615184"/>
+            <a:ext cx="987552" cy="365760"/>
+          </a:xfrm>
+          <a:prstGeom prst="hexagon">
+            <a:avLst/>
+          </a:prstGeom>
+          <a:solidFill>
+            <a:srgbClr val="F6C6C7"/>
+          </a:solidFill>
+          <a:ln w="9525">
             <a:solidFill>
-              <a:srgbClr val="C0392B"/>
+              <a:srgbClr val="E09A9A"/>
             </a:solidFill>
           </a:ln>
         </p:spPr>
@@ -5164,77 +5264,49 @@
           </a:fontRef>
         </p:style>
         <p:txBody>
-          <a:bodyPr rtlCol="0" anchor="ctr" wrap="square" lIns="38100" rIns="38100" tIns="25400" bIns="12700"/>
-          <a:lstStyle/>
-          <a:p>
-            <a:pPr algn="ctr"/>
-            <a:r>
-              <a:rPr sz="1100" b="1">
-                <a:solidFill>
-                  <a:srgbClr val="1B4F72"/>
+          <a:bodyPr rtlCol="0" anchor="ctr" wrap="square" lIns="12700" rIns="12700" tIns="38100" bIns="25400"/>
+          <a:lstStyle/>
+          <a:p>
+            <a:pPr algn="ctr">
+              <a:spcBef>
+                <a:spcPts val="0"/>
+              </a:spcBef>
+              <a:spcAft>
+                <a:spcPts val="100"/>
+              </a:spcAft>
+            </a:pPr>
+            <a:r>
+              <a:rPr sz="800" b="1">
+                <a:solidFill>
+                  <a:srgbClr val="1F2A37"/>
                 </a:solidFill>
                 <a:latin typeface="Calibri"/>
               </a:rPr>
-              <a:t>API Gateway  ·  internal / ops</a:t>
-            </a:r>
-          </a:p>
-        </p:txBody>
-      </p:sp>
-      <p:sp>
-        <p:nvSpPr>
-          <p:cNvPr id="46" name="TextBox 45"/>
-          <p:cNvSpPr txBox="1"/>
-          <p:nvPr/>
-        </p:nvSpPr>
-        <p:spPr>
-          <a:xfrm>
-            <a:off x="8869680" y="1719072"/>
-            <a:ext cx="1463040" cy="292608"/>
-          </a:xfrm>
-          <a:prstGeom prst="rect">
-            <a:avLst/>
-          </a:prstGeom>
-          <a:noFill/>
-        </p:spPr>
-        <p:txBody>
-          <a:bodyPr wrap="square" lIns="25400" rIns="25400" tIns="0" bIns="0">
-            <a:spAutoFit/>
-          </a:bodyPr>
-          <a:lstStyle/>
-          <a:p>
-            <a:pPr algn="l"/>
-            <a:r>
-              <a:rPr sz="800" b="0">
-                <a:solidFill>
-                  <a:srgbClr val="7F8C8D"/>
-                </a:solidFill>
-                <a:latin typeface="Calibri"/>
-              </a:rPr>
-              <a:t>Single controlled entry</a:t>
-            </a:r>
-          </a:p>
-        </p:txBody>
-      </p:sp>
-      <p:sp>
-        <p:nvSpPr>
-          <p:cNvPr id="47" name="Rectangle 46"/>
+              <a:t>application</a:t>
+            </a:r>
+          </a:p>
+        </p:txBody>
+      </p:sp>
+      <p:sp>
+        <p:nvSpPr>
+          <p:cNvPr id="40" name="Hexagon 39"/>
           <p:cNvSpPr/>
           <p:nvPr/>
         </p:nvSpPr>
         <p:spPr>
           <a:xfrm>
-            <a:off x="804672" y="2176272"/>
-            <a:ext cx="9646920" cy="868680"/>
-          </a:xfrm>
-          <a:prstGeom prst="rect">
+            <a:off x="8083296" y="2615184"/>
+            <a:ext cx="987552" cy="365760"/>
+          </a:xfrm>
+          <a:prstGeom prst="hexagon">
             <a:avLst/>
           </a:prstGeom>
           <a:solidFill>
-            <a:srgbClr val="EAF2F8"/>
+            <a:srgbClr val="F6C6C7"/>
           </a:solidFill>
           <a:ln w="9525">
             <a:solidFill>
-              <a:srgbClr val="BFC9CA"/>
+              <a:srgbClr val="E09A9A"/>
             </a:solidFill>
           </a:ln>
         </p:spPr>
@@ -5253,33 +5325,51 @@
           </a:fontRef>
         </p:style>
         <p:txBody>
-          <a:bodyPr rtlCol="0" anchor="ctr"/>
-          <a:lstStyle/>
-          <a:p>
-            <a:pPr algn="ctr"/>
-          </a:p>
-        </p:txBody>
-      </p:sp>
-      <p:sp>
-        <p:nvSpPr>
-          <p:cNvPr id="48" name="Rectangle 47"/>
+          <a:bodyPr rtlCol="0" anchor="ctr" wrap="square" lIns="12700" rIns="12700" tIns="38100" bIns="25400"/>
+          <a:lstStyle/>
+          <a:p>
+            <a:pPr algn="ctr">
+              <a:spcBef>
+                <a:spcPts val="0"/>
+              </a:spcBef>
+              <a:spcAft>
+                <a:spcPts val="100"/>
+              </a:spcAft>
+            </a:pPr>
+            <a:r>
+              <a:rPr sz="800" b="1">
+                <a:solidFill>
+                  <a:srgbClr val="1F2A37"/>
+                </a:solidFill>
+                <a:latin typeface="Calibri"/>
+              </a:rPr>
+              <a:t>repayment</a:t>
+            </a:r>
+          </a:p>
+        </p:txBody>
+      </p:sp>
+      <p:sp>
+        <p:nvSpPr>
+          <p:cNvPr id="41" name="Rounded Rectangle 40"/>
           <p:cNvSpPr/>
           <p:nvPr/>
         </p:nvSpPr>
         <p:spPr>
           <a:xfrm>
-            <a:off x="109728" y="2176272"/>
-            <a:ext cx="640080" cy="868680"/>
-          </a:xfrm>
-          <a:prstGeom prst="rect">
-            <a:avLst/>
-          </a:prstGeom>
-          <a:solidFill>
-            <a:srgbClr val="EAF2F8"/>
-          </a:solidFill>
-          <a:ln w="9525">
+            <a:off x="9317736" y="2267712"/>
+            <a:ext cx="1280160" cy="731520"/>
+          </a:xfrm>
+          <a:prstGeom prst="roundRect">
+            <a:avLst>
+              <a:gd name="adj" fmla="val 6000"/>
+            </a:avLst>
+          </a:prstGeom>
+          <a:solidFill>
+            <a:srgbClr val="D6EAF8"/>
+          </a:solidFill>
+          <a:ln w="11430">
             <a:solidFill>
-              <a:srgbClr val="BFC9CA"/>
+              <a:srgbClr val="7FB3D5"/>
             </a:solidFill>
           </a:ln>
         </p:spPr>
@@ -5298,107 +5388,69 @@
           </a:fontRef>
         </p:style>
         <p:txBody>
-          <a:bodyPr rtlCol="0" anchor="ctr"/>
-          <a:lstStyle/>
-          <a:p>
-            <a:pPr algn="ctr"/>
-          </a:p>
-        </p:txBody>
-      </p:sp>
-      <p:sp>
-        <p:nvSpPr>
-          <p:cNvPr id="49" name="TextBox 48"/>
-          <p:cNvSpPr txBox="1"/>
+          <a:bodyPr rtlCol="0" anchor="ctr" wrap="square" lIns="76200" rIns="76200" tIns="38100" bIns="25400"/>
+          <a:lstStyle/>
+          <a:p>
+            <a:pPr algn="ctr">
+              <a:spcBef>
+                <a:spcPts val="0"/>
+              </a:spcBef>
+              <a:spcAft>
+                <a:spcPts val="100"/>
+              </a:spcAft>
+            </a:pPr>
+            <a:r>
+              <a:rPr sz="1000" b="1">
+                <a:solidFill>
+                  <a:srgbClr val="1B3A5F"/>
+                </a:solidFill>
+                <a:latin typeface="Calibri"/>
+              </a:rPr>
+              <a:t>Emit only</a:t>
+            </a:r>
+          </a:p>
+          <a:p>
+            <a:pPr algn="ctr">
+              <a:spcBef>
+                <a:spcPts val="0"/>
+              </a:spcBef>
+              <a:spcAft>
+                <a:spcPts val="100"/>
+              </a:spcAft>
+            </a:pPr>
+            <a:r>
+              <a:rPr sz="900" b="0">
+                <a:solidFill>
+                  <a:srgbClr val="6B7C8D"/>
+                </a:solidFill>
+                <a:latin typeface="Calibri"/>
+              </a:rPr>
+              <a:t>No scoring.
+No ledger math.</a:t>
+            </a:r>
+          </a:p>
+        </p:txBody>
+      </p:sp>
+      <p:sp>
+        <p:nvSpPr>
+          <p:cNvPr id="42" name="Rectangle 41"/>
+          <p:cNvSpPr/>
           <p:nvPr/>
         </p:nvSpPr>
         <p:spPr>
           <a:xfrm>
-            <a:off x="128016" y="2231136"/>
-            <a:ext cx="603504" cy="329184"/>
+            <a:off x="1042416" y="3163824"/>
+            <a:ext cx="9646920" cy="1572768"/>
           </a:xfrm>
           <a:prstGeom prst="rect">
             <a:avLst/>
           </a:prstGeom>
-          <a:noFill/>
-        </p:spPr>
-        <p:txBody>
-          <a:bodyPr wrap="square" lIns="25400" rIns="25400" tIns="0" bIns="0">
-            <a:spAutoFit/>
-          </a:bodyPr>
-          <a:lstStyle/>
-          <a:p>
-            <a:pPr algn="ctr"/>
-            <a:r>
-              <a:rPr sz="800" b="1">
-                <a:solidFill>
-                  <a:srgbClr val="1B4F72"/>
-                </a:solidFill>
-                <a:latin typeface="Calibri"/>
-              </a:rPr>
-              <a:t>03
-Domain</a:t>
-            </a:r>
-          </a:p>
-        </p:txBody>
-      </p:sp>
-      <p:sp>
-        <p:nvSpPr>
-          <p:cNvPr id="50" name="TextBox 49"/>
-          <p:cNvSpPr txBox="1"/>
-          <p:nvPr/>
-        </p:nvSpPr>
-        <p:spPr>
-          <a:xfrm>
-            <a:off x="128016" y="2542032"/>
-            <a:ext cx="603504" cy="365760"/>
-          </a:xfrm>
-          <a:prstGeom prst="rect">
-            <a:avLst/>
-          </a:prstGeom>
-          <a:noFill/>
-        </p:spPr>
-        <p:txBody>
-          <a:bodyPr wrap="square" lIns="25400" rIns="25400" tIns="0" bIns="0">
-            <a:spAutoFit/>
-          </a:bodyPr>
-          <a:lstStyle/>
-          <a:p>
-            <a:pPr algn="ctr"/>
-            <a:r>
-              <a:rPr sz="700" b="0">
-                <a:solidFill>
-                  <a:srgbClr val="7F8C8D"/>
-                </a:solidFill>
-                <a:latin typeface="Calibri"/>
-              </a:rPr>
-              <a:t>existing
-estate</a:t>
-            </a:r>
-          </a:p>
-        </p:txBody>
-      </p:sp>
-      <p:sp>
-        <p:nvSpPr>
-          <p:cNvPr id="51" name="Rounded Rectangle 50"/>
-          <p:cNvSpPr/>
-          <p:nvPr/>
-        </p:nvSpPr>
-        <p:spPr>
-          <a:xfrm>
-            <a:off x="896112" y="2249424"/>
-            <a:ext cx="4892040" cy="713232"/>
-          </a:xfrm>
-          <a:prstGeom prst="roundRect">
-            <a:avLst>
-              <a:gd name="adj" fmla="val 5000"/>
-            </a:avLst>
-          </a:prstGeom>
-          <a:solidFill>
-            <a:srgbClr val="FFFFFF"/>
-          </a:solidFill>
-          <a:ln w="9525">
+          <a:solidFill>
+            <a:srgbClr val="EEF3F8"/>
+          </a:solidFill>
+          <a:ln w="7620">
             <a:solidFill>
-              <a:srgbClr val="BFC9CA"/>
+              <a:srgbClr val="D0D7DE"/>
             </a:solidFill>
           </a:ln>
         </p:spPr>
@@ -5426,60 +5478,23 @@
       </p:sp>
       <p:sp>
         <p:nvSpPr>
-          <p:cNvPr id="52" name="TextBox 51"/>
-          <p:cNvSpPr txBox="1"/>
+          <p:cNvPr id="43" name="Rectangle 42"/>
+          <p:cNvSpPr/>
           <p:nvPr/>
         </p:nvSpPr>
         <p:spPr>
           <a:xfrm>
-            <a:off x="987552" y="2267712"/>
-            <a:ext cx="3657600" cy="146304"/>
+            <a:off x="201168" y="3163824"/>
+            <a:ext cx="841248" cy="1572768"/>
           </a:xfrm>
           <a:prstGeom prst="rect">
             <a:avLst/>
           </a:prstGeom>
-          <a:noFill/>
-        </p:spPr>
-        <p:txBody>
-          <a:bodyPr wrap="square" lIns="25400" rIns="25400" tIns="0" bIns="0">
-            <a:spAutoFit/>
-          </a:bodyPr>
-          <a:lstStyle/>
-          <a:p>
-            <a:pPr algn="l"/>
-            <a:r>
-              <a:rPr sz="900" b="1">
-                <a:solidFill>
-                  <a:srgbClr val="1B4F72"/>
-                </a:solidFill>
-                <a:latin typeface="Calibri"/>
-              </a:rPr>
-              <a:t>Credit Card microservices  (40+)</a:t>
-            </a:r>
-          </a:p>
-        </p:txBody>
-      </p:sp>
-      <p:sp>
-        <p:nvSpPr>
-          <p:cNvPr id="53" name="Hexagon 52"/>
-          <p:cNvSpPr/>
-          <p:nvPr/>
-        </p:nvSpPr>
-        <p:spPr>
-          <a:xfrm>
-            <a:off x="987552" y="2468880"/>
-            <a:ext cx="548640" cy="384048"/>
-          </a:xfrm>
-          <a:prstGeom prst="hexagon">
-            <a:avLst/>
-          </a:prstGeom>
-          <a:solidFill>
-            <a:srgbClr val="F5B7B1"/>
-          </a:solidFill>
-          <a:ln w="9525">
-            <a:solidFill>
-              <a:srgbClr val="E6B0AA"/>
-            </a:solidFill>
+          <a:solidFill>
+            <a:srgbClr val="1B3A5F"/>
+          </a:solidFill>
+          <a:ln>
+            <a:noFill/>
           </a:ln>
         </p:spPr>
         <p:style>
@@ -5497,69 +5512,69 @@
           </a:fontRef>
         </p:style>
         <p:txBody>
-          <a:bodyPr rtlCol="0" anchor="ctr"/>
-          <a:lstStyle/>
-          <a:p>
-            <a:pPr algn="ctr"/>
-          </a:p>
-        </p:txBody>
-      </p:sp>
-      <p:sp>
-        <p:nvSpPr>
-          <p:cNvPr id="54" name="TextBox 53"/>
-          <p:cNvSpPr txBox="1"/>
-          <p:nvPr/>
-        </p:nvSpPr>
-        <p:spPr>
-          <a:xfrm>
-            <a:off x="969264" y="2542032"/>
-            <a:ext cx="585216" cy="274320"/>
-          </a:xfrm>
-          <a:prstGeom prst="rect">
-            <a:avLst/>
-          </a:prstGeom>
-          <a:noFill/>
-        </p:spPr>
-        <p:txBody>
-          <a:bodyPr wrap="square" lIns="25400" rIns="25400" tIns="0" bIns="0">
-            <a:spAutoFit/>
-          </a:bodyPr>
-          <a:lstStyle/>
-          <a:p>
-            <a:pPr algn="ctr"/>
-            <a:r>
-              <a:rPr sz="600" b="1">
-                <a:solidFill>
-                  <a:srgbClr val="1C283A"/>
+          <a:bodyPr rtlCol="0" anchor="ctr" wrap="square" lIns="50800" rIns="50800" tIns="38100" bIns="25400"/>
+          <a:lstStyle/>
+          <a:p>
+            <a:pPr algn="ctr">
+              <a:spcBef>
+                <a:spcPts val="0"/>
+              </a:spcBef>
+              <a:spcAft>
+                <a:spcPts val="100"/>
+              </a:spcAft>
+            </a:pPr>
+            <a:r>
+              <a:rPr sz="800" b="0">
+                <a:solidFill>
+                  <a:srgbClr val="B7C9DC"/>
                 </a:solidFill>
                 <a:latin typeface="Calibri"/>
               </a:rPr>
-              <a:t>CC-ext-sapi</a:t>
-            </a:r>
-          </a:p>
-        </p:txBody>
-      </p:sp>
-      <p:sp>
-        <p:nvSpPr>
-          <p:cNvPr id="55" name="Hexagon 54"/>
+              <a:t>04</a:t>
+            </a:r>
+          </a:p>
+          <a:p>
+            <a:pPr algn="ctr">
+              <a:spcBef>
+                <a:spcPts val="0"/>
+              </a:spcBef>
+              <a:spcAft>
+                <a:spcPts val="100"/>
+              </a:spcAft>
+            </a:pPr>
+            <a:r>
+              <a:rPr sz="1000" b="1">
+                <a:solidFill>
+                  <a:srgbClr val="FFFFFF"/>
+                </a:solidFill>
+                <a:latin typeface="Calibri"/>
+              </a:rPr>
+              <a:t>CORE</a:t>
+            </a:r>
+          </a:p>
+        </p:txBody>
+      </p:sp>
+      <p:sp>
+        <p:nvSpPr>
+          <p:cNvPr id="44" name="Rounded Rectangle 43"/>
           <p:cNvSpPr/>
           <p:nvPr/>
         </p:nvSpPr>
         <p:spPr>
           <a:xfrm>
-            <a:off x="1572768" y="2468880"/>
-            <a:ext cx="548640" cy="384048"/>
-          </a:xfrm>
-          <a:prstGeom prst="hexagon">
-            <a:avLst/>
-          </a:prstGeom>
-          <a:solidFill>
-            <a:srgbClr val="F5B7B1"/>
-          </a:solidFill>
-          <a:ln w="9525">
-            <a:solidFill>
-              <a:srgbClr val="E6B0AA"/>
-            </a:solidFill>
+            <a:off x="1133856" y="3255264"/>
+            <a:ext cx="9464040" cy="1389888"/>
+          </a:xfrm>
+          <a:prstGeom prst="roundRect">
+            <a:avLst>
+              <a:gd name="adj" fmla="val 5000"/>
+            </a:avLst>
+          </a:prstGeom>
+          <a:solidFill>
+            <a:srgbClr val="1B3A5F"/>
+          </a:solidFill>
+          <a:ln>
+            <a:noFill/>
           </a:ln>
         </p:spPr>
         <p:style>
@@ -5586,14 +5601,14 @@
       </p:sp>
       <p:sp>
         <p:nvSpPr>
-          <p:cNvPr id="56" name="TextBox 55"/>
+          <p:cNvPr id="45" name="TextBox 44"/>
           <p:cNvSpPr txBox="1"/>
           <p:nvPr/>
         </p:nvSpPr>
         <p:spPr>
           <a:xfrm>
-            <a:off x="1554480" y="2542032"/>
-            <a:ext cx="585216" cy="274320"/>
+            <a:off x="1243584" y="3291840"/>
+            <a:ext cx="8046720" cy="201168"/>
           </a:xfrm>
           <a:prstGeom prst="rect">
             <a:avLst/>
@@ -5601,45 +5616,94 @@
           <a:noFill/>
         </p:spPr>
         <p:txBody>
-          <a:bodyPr wrap="square" lIns="25400" rIns="25400" tIns="0" bIns="0">
+          <a:bodyPr wrap="square" lIns="25400" rIns="25400" tIns="38100" bIns="25400">
             <a:spAutoFit/>
           </a:bodyPr>
           <a:lstStyle/>
           <a:p>
-            <a:pPr algn="ctr"/>
-            <a:r>
-              <a:rPr sz="600" b="1">
-                <a:solidFill>
-                  <a:srgbClr val="1C283A"/>
+            <a:pPr algn="l">
+              <a:spcBef>
+                <a:spcPts val="0"/>
+              </a:spcBef>
+              <a:spcAft>
+                <a:spcPts val="100"/>
+              </a:spcAft>
+            </a:pPr>
+            <a:r>
+              <a:rPr sz="1300" b="1">
+                <a:solidFill>
+                  <a:srgbClr val="FFFFFF"/>
                 </a:solidFill>
                 <a:latin typeface="Calibri"/>
               </a:rPr>
-              <a:t>CC-E6-XAPI</a:t>
-            </a:r>
-          </a:p>
-        </p:txBody>
-      </p:sp>
-      <p:sp>
-        <p:nvSpPr>
-          <p:cNvPr id="57" name="Hexagon 56"/>
+              <a:t>Reward System     NEW DOMAIN WE STAND UP</a:t>
+            </a:r>
+          </a:p>
+        </p:txBody>
+      </p:sp>
+      <p:sp>
+        <p:nvSpPr>
+          <p:cNvPr id="46" name="TextBox 45"/>
+          <p:cNvSpPr txBox="1"/>
+          <p:nvPr/>
+        </p:nvSpPr>
+        <p:spPr>
+          <a:xfrm>
+            <a:off x="1243584" y="3493008"/>
+            <a:ext cx="8686800" cy="164592"/>
+          </a:xfrm>
+          <a:prstGeom prst="rect">
+            <a:avLst/>
+          </a:prstGeom>
+          <a:noFill/>
+        </p:spPr>
+        <p:txBody>
+          <a:bodyPr wrap="square" lIns="25400" rIns="25400" tIns="38100" bIns="25400">
+            <a:spAutoFit/>
+          </a:bodyPr>
+          <a:lstStyle/>
+          <a:p>
+            <a:pPr algn="l">
+              <a:spcBef>
+                <a:spcPts val="0"/>
+              </a:spcBef>
+              <a:spcAft>
+                <a:spcPts val="100"/>
+              </a:spcAft>
+            </a:pPr>
+            <a:r>
+              <a:rPr sz="900" b="0">
+                <a:solidFill>
+                  <a:srgbClr val="B7C9DC"/>
+                </a:solidFill>
+                <a:latin typeface="Calibri"/>
+              </a:rPr>
+              <a:t>Wallets · posting · calculation · books     ·     does not own coupon stock</a:t>
+            </a:r>
+          </a:p>
+        </p:txBody>
+      </p:sp>
+      <p:sp>
+        <p:nvSpPr>
+          <p:cNvPr id="47" name="Rounded Rectangle 46"/>
           <p:cNvSpPr/>
           <p:nvPr/>
         </p:nvSpPr>
         <p:spPr>
           <a:xfrm>
-            <a:off x="2157984" y="2468880"/>
-            <a:ext cx="548640" cy="384048"/>
-          </a:xfrm>
-          <a:prstGeom prst="hexagon">
-            <a:avLst/>
-          </a:prstGeom>
-          <a:solidFill>
-            <a:srgbClr val="F5B7B1"/>
-          </a:solidFill>
-          <a:ln w="9525">
-            <a:solidFill>
-              <a:srgbClr val="E6B0AA"/>
-            </a:solidFill>
+            <a:off x="10186416" y="3310128"/>
+            <a:ext cx="292608" cy="182880"/>
+          </a:xfrm>
+          <a:prstGeom prst="roundRect">
+            <a:avLst>
+              <a:gd name="adj" fmla="val 20000"/>
+            </a:avLst>
+          </a:prstGeom>
+          <a:solidFill>
+            <a:srgbClr val="5DAEE2"/>
+          </a:solidFill>
+          <a:ln>
+            <a:noFill/>
           </a:ln>
         </p:spPr>
         <p:style>
@@ -5657,68 +5721,51 @@
           </a:fontRef>
         </p:style>
         <p:txBody>
-          <a:bodyPr rtlCol="0" anchor="ctr"/>
-          <a:lstStyle/>
-          <a:p>
-            <a:pPr algn="ctr"/>
-          </a:p>
-        </p:txBody>
-      </p:sp>
-      <p:sp>
-        <p:nvSpPr>
-          <p:cNvPr id="58" name="TextBox 57"/>
-          <p:cNvSpPr txBox="1"/>
-          <p:nvPr/>
-        </p:nvSpPr>
-        <p:spPr>
-          <a:xfrm>
-            <a:off x="2139696" y="2542032"/>
-            <a:ext cx="585216" cy="274320"/>
-          </a:xfrm>
-          <a:prstGeom prst="rect">
-            <a:avLst/>
-          </a:prstGeom>
-          <a:noFill/>
-        </p:spPr>
-        <p:txBody>
-          <a:bodyPr wrap="square" lIns="25400" rIns="25400" tIns="0" bIns="0">
-            <a:spAutoFit/>
-          </a:bodyPr>
-          <a:lstStyle/>
-          <a:p>
-            <a:pPr algn="ctr"/>
-            <a:r>
-              <a:rPr sz="600" b="1">
-                <a:solidFill>
-                  <a:srgbClr val="1C283A"/>
+          <a:bodyPr rtlCol="0" anchor="ctr" wrap="square" lIns="12700" rIns="12700" tIns="38100" bIns="25400"/>
+          <a:lstStyle/>
+          <a:p>
+            <a:pPr algn="ctr">
+              <a:spcBef>
+                <a:spcPts val="0"/>
+              </a:spcBef>
+              <a:spcAft>
+                <a:spcPts val="100"/>
+              </a:spcAft>
+            </a:pPr>
+            <a:r>
+              <a:rPr sz="800" b="1">
+                <a:solidFill>
+                  <a:srgbClr val="FFFFFF"/>
                 </a:solidFill>
                 <a:latin typeface="Calibri"/>
               </a:rPr>
-              <a:t>CC-User-Auth</a:t>
-            </a:r>
-          </a:p>
-        </p:txBody>
-      </p:sp>
-      <p:sp>
-        <p:nvSpPr>
-          <p:cNvPr id="59" name="Hexagon 58"/>
+              <a:t>L2</a:t>
+            </a:r>
+          </a:p>
+        </p:txBody>
+      </p:sp>
+      <p:sp>
+        <p:nvSpPr>
+          <p:cNvPr id="48" name="Rounded Rectangle 47"/>
           <p:cNvSpPr/>
           <p:nvPr/>
         </p:nvSpPr>
         <p:spPr>
           <a:xfrm>
-            <a:off x="2743200" y="2468880"/>
-            <a:ext cx="548640" cy="384048"/>
-          </a:xfrm>
-          <a:prstGeom prst="hexagon">
-            <a:avLst/>
-          </a:prstGeom>
-          <a:solidFill>
-            <a:srgbClr val="F5B7B1"/>
-          </a:solidFill>
-          <a:ln w="9525">
+            <a:off x="1243584" y="3730752"/>
+            <a:ext cx="2212848" cy="877824"/>
+          </a:xfrm>
+          <a:prstGeom prst="roundRect">
+            <a:avLst>
+              <a:gd name="adj" fmla="val 7000"/>
+            </a:avLst>
+          </a:prstGeom>
+          <a:solidFill>
+            <a:srgbClr val="2A557A"/>
+          </a:solidFill>
+          <a:ln w="11430">
             <a:solidFill>
-              <a:srgbClr val="E6B0AA"/>
+              <a:srgbClr val="4A7AA8"/>
             </a:solidFill>
           </a:ln>
         </p:spPr>
@@ -5737,68 +5784,71 @@
           </a:fontRef>
         </p:style>
         <p:txBody>
-          <a:bodyPr rtlCol="0" anchor="ctr"/>
-          <a:lstStyle/>
-          <a:p>
-            <a:pPr algn="ctr"/>
-          </a:p>
-        </p:txBody>
-      </p:sp>
-      <p:sp>
-        <p:nvSpPr>
-          <p:cNvPr id="60" name="TextBox 59"/>
-          <p:cNvSpPr txBox="1"/>
-          <p:nvPr/>
-        </p:nvSpPr>
-        <p:spPr>
-          <a:xfrm>
-            <a:off x="2724912" y="2542032"/>
-            <a:ext cx="585216" cy="274320"/>
-          </a:xfrm>
-          <a:prstGeom prst="rect">
-            <a:avLst/>
-          </a:prstGeom>
-          <a:noFill/>
-        </p:spPr>
-        <p:txBody>
-          <a:bodyPr wrap="square" lIns="25400" rIns="25400" tIns="0" bIns="0">
-            <a:spAutoFit/>
-          </a:bodyPr>
-          <a:lstStyle/>
-          <a:p>
-            <a:pPr algn="ctr"/>
-            <a:r>
-              <a:rPr sz="600" b="1">
-                <a:solidFill>
-                  <a:srgbClr val="1C283A"/>
+          <a:bodyPr rtlCol="0" anchor="ctr" wrap="square" lIns="127000" rIns="127000" tIns="38100" bIns="25400"/>
+          <a:lstStyle/>
+          <a:p>
+            <a:pPr algn="l">
+              <a:spcBef>
+                <a:spcPts val="0"/>
+              </a:spcBef>
+              <a:spcAft>
+                <a:spcPts val="100"/>
+              </a:spcAft>
+            </a:pPr>
+            <a:r>
+              <a:rPr sz="1200" b="1">
+                <a:solidFill>
+                  <a:srgbClr val="FFFFFF"/>
                 </a:solidFill>
                 <a:latin typeface="Calibri"/>
               </a:rPr>
-              <a:t>CC-Application</a:t>
-            </a:r>
-          </a:p>
-        </p:txBody>
-      </p:sp>
-      <p:sp>
-        <p:nvSpPr>
-          <p:cNvPr id="61" name="Hexagon 60"/>
+              <a:t>Wallet</a:t>
+            </a:r>
+          </a:p>
+          <a:p>
+            <a:pPr algn="l">
+              <a:spcBef>
+                <a:spcPts val="0"/>
+              </a:spcBef>
+              <a:spcAft>
+                <a:spcPts val="100"/>
+              </a:spcAft>
+            </a:pPr>
+            <a:r>
+              <a:rPr sz="1000" b="0">
+                <a:solidFill>
+                  <a:srgbClr val="C5D8EA"/>
+                </a:solidFill>
+                <a:latin typeface="Calibri"/>
+              </a:rPr>
+              <a:t>Reward wallet  ·  Inquiry
+Hold &amp; release  ·  Tiering</a:t>
+            </a:r>
+          </a:p>
+        </p:txBody>
+      </p:sp>
+      <p:sp>
+        <p:nvSpPr>
+          <p:cNvPr id="49" name="Rounded Rectangle 48"/>
           <p:cNvSpPr/>
           <p:nvPr/>
         </p:nvSpPr>
         <p:spPr>
           <a:xfrm>
-            <a:off x="3328416" y="2468880"/>
-            <a:ext cx="548640" cy="384048"/>
-          </a:xfrm>
-          <a:prstGeom prst="hexagon">
-            <a:avLst/>
-          </a:prstGeom>
-          <a:solidFill>
-            <a:srgbClr val="F5B7B1"/>
-          </a:solidFill>
-          <a:ln w="9525">
+            <a:off x="3547872" y="3730752"/>
+            <a:ext cx="2212848" cy="877824"/>
+          </a:xfrm>
+          <a:prstGeom prst="roundRect">
+            <a:avLst>
+              <a:gd name="adj" fmla="val 7000"/>
+            </a:avLst>
+          </a:prstGeom>
+          <a:solidFill>
+            <a:srgbClr val="2A557A"/>
+          </a:solidFill>
+          <a:ln w="11430">
             <a:solidFill>
-              <a:srgbClr val="E6B0AA"/>
+              <a:srgbClr val="4A7AA8"/>
             </a:solidFill>
           </a:ln>
         </p:spPr>
@@ -5817,68 +5867,71 @@
           </a:fontRef>
         </p:style>
         <p:txBody>
-          <a:bodyPr rtlCol="0" anchor="ctr"/>
-          <a:lstStyle/>
-          <a:p>
-            <a:pPr algn="ctr"/>
-          </a:p>
-        </p:txBody>
-      </p:sp>
-      <p:sp>
-        <p:nvSpPr>
-          <p:cNvPr id="62" name="TextBox 61"/>
-          <p:cNvSpPr txBox="1"/>
-          <p:nvPr/>
-        </p:nvSpPr>
-        <p:spPr>
-          <a:xfrm>
-            <a:off x="3310128" y="2542032"/>
-            <a:ext cx="585216" cy="274320"/>
-          </a:xfrm>
-          <a:prstGeom prst="rect">
-            <a:avLst/>
-          </a:prstGeom>
-          <a:noFill/>
-        </p:spPr>
-        <p:txBody>
-          <a:bodyPr wrap="square" lIns="25400" rIns="25400" tIns="0" bIns="0">
-            <a:spAutoFit/>
-          </a:bodyPr>
-          <a:lstStyle/>
-          <a:p>
-            <a:pPr algn="ctr"/>
-            <a:r>
-              <a:rPr sz="600" b="1">
-                <a:solidFill>
-                  <a:srgbClr val="1C283A"/>
+          <a:bodyPr rtlCol="0" anchor="ctr" wrap="square" lIns="127000" rIns="127000" tIns="38100" bIns="25400"/>
+          <a:lstStyle/>
+          <a:p>
+            <a:pPr algn="l">
+              <a:spcBef>
+                <a:spcPts val="0"/>
+              </a:spcBef>
+              <a:spcAft>
+                <a:spcPts val="100"/>
+              </a:spcAft>
+            </a:pPr>
+            <a:r>
+              <a:rPr sz="1200" b="1">
+                <a:solidFill>
+                  <a:srgbClr val="FFFFFF"/>
                 </a:solidFill>
                 <a:latin typeface="Calibri"/>
               </a:rPr>
-              <a:t>CC-Notification</a:t>
-            </a:r>
-          </a:p>
-        </p:txBody>
-      </p:sp>
-      <p:sp>
-        <p:nvSpPr>
-          <p:cNvPr id="63" name="Hexagon 62"/>
+              <a:t>Ledger</a:t>
+            </a:r>
+          </a:p>
+          <a:p>
+            <a:pPr algn="l">
+              <a:spcBef>
+                <a:spcPts val="0"/>
+              </a:spcBef>
+              <a:spcAft>
+                <a:spcPts val="100"/>
+              </a:spcAft>
+            </a:pPr>
+            <a:r>
+              <a:rPr sz="1000" b="0">
+                <a:solidFill>
+                  <a:srgbClr val="C5D8EA"/>
+                </a:solidFill>
+                <a:latin typeface="Calibri"/>
+              </a:rPr>
+              <a:t>COA  ·  Double-entry posting
+Reconciliation  ·  Statement</a:t>
+            </a:r>
+          </a:p>
+        </p:txBody>
+      </p:sp>
+      <p:sp>
+        <p:nvSpPr>
+          <p:cNvPr id="50" name="Rounded Rectangle 49"/>
           <p:cNvSpPr/>
           <p:nvPr/>
         </p:nvSpPr>
         <p:spPr>
           <a:xfrm>
-            <a:off x="3913632" y="2468880"/>
-            <a:ext cx="548640" cy="384048"/>
-          </a:xfrm>
-          <a:prstGeom prst="hexagon">
-            <a:avLst/>
-          </a:prstGeom>
-          <a:solidFill>
-            <a:srgbClr val="F5B7B1"/>
-          </a:solidFill>
-          <a:ln w="9525">
+            <a:off x="5852160" y="3730752"/>
+            <a:ext cx="2212848" cy="877824"/>
+          </a:xfrm>
+          <a:prstGeom prst="roundRect">
+            <a:avLst>
+              <a:gd name="adj" fmla="val 7000"/>
+            </a:avLst>
+          </a:prstGeom>
+          <a:solidFill>
+            <a:srgbClr val="2A557A"/>
+          </a:solidFill>
+          <a:ln w="11430">
             <a:solidFill>
-              <a:srgbClr val="E6B0AA"/>
+              <a:srgbClr val="4A7AA8"/>
             </a:solidFill>
           </a:ln>
         </p:spPr>
@@ -5897,68 +5950,71 @@
           </a:fontRef>
         </p:style>
         <p:txBody>
-          <a:bodyPr rtlCol="0" anchor="ctr"/>
-          <a:lstStyle/>
-          <a:p>
-            <a:pPr algn="ctr"/>
-          </a:p>
-        </p:txBody>
-      </p:sp>
-      <p:sp>
-        <p:nvSpPr>
-          <p:cNvPr id="64" name="TextBox 63"/>
-          <p:cNvSpPr txBox="1"/>
-          <p:nvPr/>
-        </p:nvSpPr>
-        <p:spPr>
-          <a:xfrm>
-            <a:off x="3895344" y="2542032"/>
-            <a:ext cx="585216" cy="274320"/>
-          </a:xfrm>
-          <a:prstGeom prst="rect">
-            <a:avLst/>
-          </a:prstGeom>
-          <a:noFill/>
-        </p:spPr>
-        <p:txBody>
-          <a:bodyPr wrap="square" lIns="25400" rIns="25400" tIns="0" bIns="0">
-            <a:spAutoFit/>
-          </a:bodyPr>
-          <a:lstStyle/>
-          <a:p>
-            <a:pPr algn="ctr"/>
-            <a:r>
-              <a:rPr sz="600" b="1">
-                <a:solidFill>
-                  <a:srgbClr val="1C283A"/>
+          <a:bodyPr rtlCol="0" anchor="ctr" wrap="square" lIns="127000" rIns="127000" tIns="38100" bIns="25400"/>
+          <a:lstStyle/>
+          <a:p>
+            <a:pPr algn="l">
+              <a:spcBef>
+                <a:spcPts val="0"/>
+              </a:spcBef>
+              <a:spcAft>
+                <a:spcPts val="100"/>
+              </a:spcAft>
+            </a:pPr>
+            <a:r>
+              <a:rPr sz="1200" b="1">
+                <a:solidFill>
+                  <a:srgbClr val="FFFFFF"/>
                 </a:solidFill>
                 <a:latin typeface="Calibri"/>
               </a:rPr>
-              <a:t>CC-Instalment</a:t>
-            </a:r>
-          </a:p>
-        </p:txBody>
-      </p:sp>
-      <p:sp>
-        <p:nvSpPr>
-          <p:cNvPr id="65" name="Hexagon 64"/>
+              <a:t>Rules &amp; calc</a:t>
+            </a:r>
+          </a:p>
+          <a:p>
+            <a:pPr algn="l">
+              <a:spcBef>
+                <a:spcPts val="0"/>
+              </a:spcBef>
+              <a:spcAft>
+                <a:spcPts val="100"/>
+              </a:spcAft>
+            </a:pPr>
+            <a:r>
+              <a:rPr sz="1000" b="0">
+                <a:solidFill>
+                  <a:srgbClr val="C5D8EA"/>
+                </a:solidFill>
+                <a:latin typeface="Calibri"/>
+              </a:rPr>
+              <a:t>Eligibility  ·  Points formula
+Earn / burn engines  ·  Config</a:t>
+            </a:r>
+          </a:p>
+        </p:txBody>
+      </p:sp>
+      <p:sp>
+        <p:nvSpPr>
+          <p:cNvPr id="51" name="Rounded Rectangle 50"/>
           <p:cNvSpPr/>
           <p:nvPr/>
         </p:nvSpPr>
         <p:spPr>
           <a:xfrm>
-            <a:off x="4498848" y="2468880"/>
-            <a:ext cx="548640" cy="384048"/>
-          </a:xfrm>
-          <a:prstGeom prst="hexagon">
-            <a:avLst/>
-          </a:prstGeom>
-          <a:solidFill>
-            <a:srgbClr val="F5B7B1"/>
-          </a:solidFill>
-          <a:ln w="9525">
+            <a:off x="8156448" y="3730752"/>
+            <a:ext cx="2212848" cy="877824"/>
+          </a:xfrm>
+          <a:prstGeom prst="roundRect">
+            <a:avLst>
+              <a:gd name="adj" fmla="val 7000"/>
+            </a:avLst>
+          </a:prstGeom>
+          <a:solidFill>
+            <a:srgbClr val="2A557A"/>
+          </a:solidFill>
+          <a:ln w="11430">
             <a:solidFill>
-              <a:srgbClr val="E6B0AA"/>
+              <a:srgbClr val="4A7AA8"/>
             </a:solidFill>
           </a:ln>
         </p:spPr>
@@ -5977,68 +6033,69 @@
           </a:fontRef>
         </p:style>
         <p:txBody>
-          <a:bodyPr rtlCol="0" anchor="ctr"/>
-          <a:lstStyle/>
-          <a:p>
-            <a:pPr algn="ctr"/>
-          </a:p>
-        </p:txBody>
-      </p:sp>
-      <p:sp>
-        <p:nvSpPr>
-          <p:cNvPr id="66" name="TextBox 65"/>
-          <p:cNvSpPr txBox="1"/>
+          <a:bodyPr rtlCol="0" anchor="ctr" wrap="square" lIns="127000" rIns="127000" tIns="38100" bIns="25400"/>
+          <a:lstStyle/>
+          <a:p>
+            <a:pPr algn="l">
+              <a:spcBef>
+                <a:spcPts val="0"/>
+              </a:spcBef>
+              <a:spcAft>
+                <a:spcPts val="100"/>
+              </a:spcAft>
+            </a:pPr>
+            <a:r>
+              <a:rPr sz="1200" b="1">
+                <a:solidFill>
+                  <a:srgbClr val="FFFFFF"/>
+                </a:solidFill>
+                <a:latin typeface="Calibri"/>
+              </a:rPr>
+              <a:t>Lifecycle</a:t>
+            </a:r>
+          </a:p>
+          <a:p>
+            <a:pPr algn="l">
+              <a:spcBef>
+                <a:spcPts val="0"/>
+              </a:spcBef>
+              <a:spcAft>
+                <a:spcPts val="100"/>
+              </a:spcAft>
+            </a:pPr>
+            <a:r>
+              <a:rPr sz="1000" b="0">
+                <a:solidFill>
+                  <a:srgbClr val="C5D8EA"/>
+                </a:solidFill>
+                <a:latin typeface="Calibri"/>
+              </a:rPr>
+              <a:t>Referral  ·  Idempotency
+Reversal / adj  ·  Audit</a:t>
+            </a:r>
+          </a:p>
+        </p:txBody>
+      </p:sp>
+      <p:sp>
+        <p:nvSpPr>
+          <p:cNvPr id="52" name="Rectangle 51"/>
+          <p:cNvSpPr/>
           <p:nvPr/>
         </p:nvSpPr>
         <p:spPr>
           <a:xfrm>
-            <a:off x="4480560" y="2542032"/>
-            <a:ext cx="585216" cy="274320"/>
+            <a:off x="1042416" y="4809744"/>
+            <a:ext cx="9646920" cy="1005840"/>
           </a:xfrm>
           <a:prstGeom prst="rect">
             <a:avLst/>
           </a:prstGeom>
-          <a:noFill/>
-        </p:spPr>
-        <p:txBody>
-          <a:bodyPr wrap="square" lIns="25400" rIns="25400" tIns="0" bIns="0">
-            <a:spAutoFit/>
-          </a:bodyPr>
-          <a:lstStyle/>
-          <a:p>
-            <a:pPr algn="ctr"/>
-            <a:r>
-              <a:rPr sz="600" b="1">
-                <a:solidFill>
-                  <a:srgbClr val="1C283A"/>
-                </a:solidFill>
-                <a:latin typeface="Calibri"/>
-              </a:rPr>
-              <a:t>CC-Card-ops</a:t>
-            </a:r>
-          </a:p>
-        </p:txBody>
-      </p:sp>
-      <p:sp>
-        <p:nvSpPr>
-          <p:cNvPr id="67" name="Hexagon 66"/>
-          <p:cNvSpPr/>
-          <p:nvPr/>
-        </p:nvSpPr>
-        <p:spPr>
-          <a:xfrm>
-            <a:off x="5084064" y="2468880"/>
-            <a:ext cx="548640" cy="384048"/>
-          </a:xfrm>
-          <a:prstGeom prst="hexagon">
-            <a:avLst/>
-          </a:prstGeom>
-          <a:solidFill>
-            <a:srgbClr val="F5B7B1"/>
-          </a:solidFill>
-          <a:ln w="9525">
+          <a:solidFill>
+            <a:srgbClr val="EEF3F8"/>
+          </a:solidFill>
+          <a:ln w="7620">
             <a:solidFill>
-              <a:srgbClr val="E6B0AA"/>
+              <a:srgbClr val="D0D7DE"/>
             </a:solidFill>
           </a:ln>
         </p:spPr>
@@ -6066,62 +6123,23 @@
       </p:sp>
       <p:sp>
         <p:nvSpPr>
-          <p:cNvPr id="68" name="TextBox 67"/>
-          <p:cNvSpPr txBox="1"/>
+          <p:cNvPr id="53" name="Rectangle 52"/>
+          <p:cNvSpPr/>
           <p:nvPr/>
         </p:nvSpPr>
         <p:spPr>
           <a:xfrm>
-            <a:off x="5065776" y="2542032"/>
-            <a:ext cx="585216" cy="274320"/>
+            <a:off x="201168" y="4809744"/>
+            <a:ext cx="841248" cy="1005840"/>
           </a:xfrm>
           <a:prstGeom prst="rect">
             <a:avLst/>
           </a:prstGeom>
-          <a:noFill/>
-        </p:spPr>
-        <p:txBody>
-          <a:bodyPr wrap="square" lIns="25400" rIns="25400" tIns="0" bIns="0">
-            <a:spAutoFit/>
-          </a:bodyPr>
-          <a:lstStyle/>
-          <a:p>
-            <a:pPr algn="ctr"/>
-            <a:r>
-              <a:rPr sz="600" b="1">
-                <a:solidFill>
-                  <a:srgbClr val="1C283A"/>
-                </a:solidFill>
-                <a:latin typeface="Calibri"/>
-              </a:rPr>
-              <a:t>CC-BillPayment</a:t>
-            </a:r>
-          </a:p>
-        </p:txBody>
-      </p:sp>
-      <p:sp>
-        <p:nvSpPr>
-          <p:cNvPr id="69" name="Rounded Rectangle 68"/>
-          <p:cNvSpPr/>
-          <p:nvPr/>
-        </p:nvSpPr>
-        <p:spPr>
-          <a:xfrm>
-            <a:off x="5925312" y="2249424"/>
-            <a:ext cx="2606040" cy="713232"/>
-          </a:xfrm>
-          <a:prstGeom prst="roundRect">
-            <a:avLst>
-              <a:gd name="adj" fmla="val 5000"/>
-            </a:avLst>
-          </a:prstGeom>
-          <a:solidFill>
-            <a:srgbClr val="FFFFFF"/>
-          </a:solidFill>
-          <a:ln w="9525">
-            <a:solidFill>
-              <a:srgbClr val="BFC9CA"/>
-            </a:solidFill>
+          <a:solidFill>
+            <a:srgbClr val="1B3A5F"/>
+          </a:solidFill>
+          <a:ln>
+            <a:noFill/>
           </a:ln>
         </p:spPr>
         <p:style>
@@ -6139,68 +6157,70 @@
           </a:fontRef>
         </p:style>
         <p:txBody>
-          <a:bodyPr rtlCol="0" anchor="ctr"/>
-          <a:lstStyle/>
-          <a:p>
-            <a:pPr algn="ctr"/>
-          </a:p>
-        </p:txBody>
-      </p:sp>
-      <p:sp>
-        <p:nvSpPr>
-          <p:cNvPr id="70" name="TextBox 69"/>
-          <p:cNvSpPr txBox="1"/>
-          <p:nvPr/>
-        </p:nvSpPr>
-        <p:spPr>
-          <a:xfrm>
-            <a:off x="6016752" y="2267712"/>
-            <a:ext cx="2377440" cy="146304"/>
-          </a:xfrm>
-          <a:prstGeom prst="rect">
-            <a:avLst/>
-          </a:prstGeom>
-          <a:noFill/>
-        </p:spPr>
-        <p:txBody>
-          <a:bodyPr wrap="square" lIns="25400" rIns="25400" tIns="0" bIns="0">
-            <a:spAutoFit/>
-          </a:bodyPr>
-          <a:lstStyle/>
-          <a:p>
-            <a:pPr algn="l"/>
-            <a:r>
-              <a:rPr sz="900" b="1">
-                <a:solidFill>
-                  <a:srgbClr val="1B4F72"/>
+          <a:bodyPr rtlCol="0" anchor="ctr" wrap="square" lIns="50800" rIns="50800" tIns="38100" bIns="25400"/>
+          <a:lstStyle/>
+          <a:p>
+            <a:pPr algn="ctr">
+              <a:spcBef>
+                <a:spcPts val="0"/>
+              </a:spcBef>
+              <a:spcAft>
+                <a:spcPts val="100"/>
+              </a:spcAft>
+            </a:pPr>
+            <a:r>
+              <a:rPr sz="800" b="0">
+                <a:solidFill>
+                  <a:srgbClr val="B7C9DC"/>
                 </a:solidFill>
                 <a:latin typeface="Calibri"/>
               </a:rPr>
-              <a:t>Loan microservices  (20+)</a:t>
-            </a:r>
-          </a:p>
-        </p:txBody>
-      </p:sp>
-      <p:sp>
-        <p:nvSpPr>
-          <p:cNvPr id="71" name="Hexagon 70"/>
+              <a:t>05</a:t>
+            </a:r>
+          </a:p>
+          <a:p>
+            <a:pPr algn="ctr">
+              <a:spcBef>
+                <a:spcPts val="0"/>
+              </a:spcBef>
+              <a:spcAft>
+                <a:spcPts val="100"/>
+              </a:spcAft>
+            </a:pPr>
+            <a:r>
+              <a:rPr sz="1000" b="1">
+                <a:solidFill>
+                  <a:srgbClr val="FFFFFF"/>
+                </a:solidFill>
+                <a:latin typeface="Calibri"/>
+              </a:rPr>
+              <a:t>FULFILL</a:t>
+            </a:r>
+          </a:p>
+        </p:txBody>
+      </p:sp>
+      <p:sp>
+        <p:nvSpPr>
+          <p:cNvPr id="54" name="Rounded Rectangle 53"/>
           <p:cNvSpPr/>
           <p:nvPr/>
         </p:nvSpPr>
         <p:spPr>
           <a:xfrm>
-            <a:off x="6080760" y="2468880"/>
-            <a:ext cx="1097280" cy="384048"/>
-          </a:xfrm>
-          <a:prstGeom prst="hexagon">
-            <a:avLst/>
-          </a:prstGeom>
-          <a:solidFill>
-            <a:srgbClr val="F5B7B1"/>
-          </a:solidFill>
-          <a:ln w="9525">
+            <a:off x="1133856" y="4901184"/>
+            <a:ext cx="9464040" cy="822960"/>
+          </a:xfrm>
+          <a:prstGeom prst="roundRect">
+            <a:avLst>
+              <a:gd name="adj" fmla="val 5000"/>
+            </a:avLst>
+          </a:prstGeom>
+          <a:solidFill>
+            <a:srgbClr val="FFFFFF"/>
+          </a:solidFill>
+          <a:ln w="14604">
             <a:solidFill>
-              <a:srgbClr val="E6B0AA"/>
+              <a:srgbClr val="82C99B"/>
             </a:solidFill>
           </a:ln>
         </p:spPr>
@@ -6228,14 +6248,14 @@
       </p:sp>
       <p:sp>
         <p:nvSpPr>
-          <p:cNvPr id="72" name="TextBox 71"/>
+          <p:cNvPr id="55" name="TextBox 54"/>
           <p:cNvSpPr txBox="1"/>
           <p:nvPr/>
         </p:nvSpPr>
         <p:spPr>
           <a:xfrm>
-            <a:off x="6080760" y="2542032"/>
-            <a:ext cx="1097280" cy="256032"/>
+            <a:off x="1243584" y="4937760"/>
+            <a:ext cx="8412480" cy="182880"/>
           </a:xfrm>
           <a:prstGeom prst="rect">
             <a:avLst/>
@@ -6243,45 +6263,94 @@
           <a:noFill/>
         </p:spPr>
         <p:txBody>
-          <a:bodyPr wrap="square" lIns="25400" rIns="25400" tIns="0" bIns="0">
+          <a:bodyPr wrap="square" lIns="25400" rIns="25400" tIns="38100" bIns="25400">
             <a:spAutoFit/>
           </a:bodyPr>
           <a:lstStyle/>
           <a:p>
-            <a:pPr algn="ctr"/>
-            <a:r>
-              <a:rPr sz="800" b="1">
-                <a:solidFill>
-                  <a:srgbClr val="1C283A"/>
+            <a:pPr algn="l">
+              <a:spcBef>
+                <a:spcPts val="0"/>
+              </a:spcBef>
+              <a:spcAft>
+                <a:spcPts val="100"/>
+              </a:spcAft>
+            </a:pPr>
+            <a:r>
+              <a:rPr sz="1200" b="1">
+                <a:solidFill>
+                  <a:srgbClr val="1E6B48"/>
                 </a:solidFill>
                 <a:latin typeface="Calibri"/>
               </a:rPr>
-              <a:t>loan-application</a:t>
-            </a:r>
-          </a:p>
-        </p:txBody>
-      </p:sp>
-      <p:sp>
-        <p:nvSpPr>
-          <p:cNvPr id="73" name="Hexagon 72"/>
+              <a:t>CRP  ·  Centralized Redemption Platform      UAF-owned coupon control plane</a:t>
+            </a:r>
+          </a:p>
+        </p:txBody>
+      </p:sp>
+      <p:sp>
+        <p:nvSpPr>
+          <p:cNvPr id="56" name="TextBox 55"/>
+          <p:cNvSpPr txBox="1"/>
+          <p:nvPr/>
+        </p:nvSpPr>
+        <p:spPr>
+          <a:xfrm>
+            <a:off x="1243584" y="5120640"/>
+            <a:ext cx="8961120" cy="146304"/>
+          </a:xfrm>
+          <a:prstGeom prst="rect">
+            <a:avLst/>
+          </a:prstGeom>
+          <a:noFill/>
+        </p:spPr>
+        <p:txBody>
+          <a:bodyPr wrap="square" lIns="25400" rIns="25400" tIns="38100" bIns="25400">
+            <a:spAutoFit/>
+          </a:bodyPr>
+          <a:lstStyle/>
+          <a:p>
+            <a:pPr algn="l">
+              <a:spcBef>
+                <a:spcPts val="0"/>
+              </a:spcBef>
+              <a:spcAft>
+                <a:spcPts val="100"/>
+              </a:spcAft>
+            </a:pPr>
+            <a:r>
+              <a:rPr sz="900" b="0">
+                <a:solidFill>
+                  <a:srgbClr val="6B7C8D"/>
+                </a:solidFill>
+                <a:latin typeface="Calibri"/>
+              </a:rPr>
+              <a:t>Cross-boundary verbs from RS:   Request to issue coupon   ·   Request to use coupon   ·   Retrieve redeemable list</a:t>
+            </a:r>
+          </a:p>
+        </p:txBody>
+      </p:sp>
+      <p:sp>
+        <p:nvSpPr>
+          <p:cNvPr id="57" name="Rounded Rectangle 56"/>
           <p:cNvSpPr/>
           <p:nvPr/>
         </p:nvSpPr>
         <p:spPr>
           <a:xfrm>
-            <a:off x="7269480" y="2468880"/>
-            <a:ext cx="1097280" cy="384048"/>
-          </a:xfrm>
-          <a:prstGeom prst="hexagon">
-            <a:avLst/>
-          </a:prstGeom>
-          <a:solidFill>
-            <a:srgbClr val="F5B7B1"/>
-          </a:solidFill>
-          <a:ln w="9525">
-            <a:solidFill>
-              <a:srgbClr val="E6B0AA"/>
-            </a:solidFill>
+            <a:off x="10186416" y="4956048"/>
+            <a:ext cx="292608" cy="182880"/>
+          </a:xfrm>
+          <a:prstGeom prst="roundRect">
+            <a:avLst>
+              <a:gd name="adj" fmla="val 20000"/>
+            </a:avLst>
+          </a:prstGeom>
+          <a:solidFill>
+            <a:srgbClr val="D4EDDA"/>
+          </a:solidFill>
+          <a:ln>
+            <a:noFill/>
           </a:ln>
         </p:spPr>
         <p:style>
@@ -6299,70 +6368,51 @@
           </a:fontRef>
         </p:style>
         <p:txBody>
-          <a:bodyPr rtlCol="0" anchor="ctr"/>
-          <a:lstStyle/>
-          <a:p>
-            <a:pPr algn="ctr"/>
-          </a:p>
-        </p:txBody>
-      </p:sp>
-      <p:sp>
-        <p:nvSpPr>
-          <p:cNvPr id="74" name="TextBox 73"/>
-          <p:cNvSpPr txBox="1"/>
-          <p:nvPr/>
-        </p:nvSpPr>
-        <p:spPr>
-          <a:xfrm>
-            <a:off x="7269480" y="2542032"/>
-            <a:ext cx="1097280" cy="256032"/>
-          </a:xfrm>
-          <a:prstGeom prst="rect">
-            <a:avLst/>
-          </a:prstGeom>
-          <a:noFill/>
-        </p:spPr>
-        <p:txBody>
-          <a:bodyPr wrap="square" lIns="25400" rIns="25400" tIns="0" bIns="0">
-            <a:spAutoFit/>
-          </a:bodyPr>
-          <a:lstStyle/>
-          <a:p>
-            <a:pPr algn="ctr"/>
+          <a:bodyPr rtlCol="0" anchor="ctr" wrap="square" lIns="12700" rIns="12700" tIns="38100" bIns="25400"/>
+          <a:lstStyle/>
+          <a:p>
+            <a:pPr algn="ctr">
+              <a:spcBef>
+                <a:spcPts val="0"/>
+              </a:spcBef>
+              <a:spcAft>
+                <a:spcPts val="100"/>
+              </a:spcAft>
+            </a:pPr>
             <a:r>
               <a:rPr sz="800" b="1">
                 <a:solidFill>
-                  <a:srgbClr val="1C283A"/>
+                  <a:srgbClr val="1E6B48"/>
                 </a:solidFill>
                 <a:latin typeface="Calibri"/>
               </a:rPr>
-              <a:t>loan-repayment</a:t>
-            </a:r>
-          </a:p>
-        </p:txBody>
-      </p:sp>
-      <p:sp>
-        <p:nvSpPr>
-          <p:cNvPr id="75" name="Rounded Rectangle 74"/>
+              <a:t>L2</a:t>
+            </a:r>
+          </a:p>
+        </p:txBody>
+      </p:sp>
+      <p:sp>
+        <p:nvSpPr>
+          <p:cNvPr id="58" name="Rounded Rectangle 57"/>
           <p:cNvSpPr/>
           <p:nvPr/>
         </p:nvSpPr>
         <p:spPr>
           <a:xfrm>
-            <a:off x="8641080" y="2249424"/>
-            <a:ext cx="1691640" cy="713232"/>
+            <a:off x="1243584" y="5303520"/>
+            <a:ext cx="2971800" cy="420624"/>
           </a:xfrm>
           <a:prstGeom prst="roundRect">
             <a:avLst>
-              <a:gd name="adj" fmla="val 5000"/>
+              <a:gd name="adj" fmla="val 8000"/>
             </a:avLst>
           </a:prstGeom>
           <a:solidFill>
-            <a:srgbClr val="FFFFFF"/>
+            <a:srgbClr val="D4EDDA"/>
           </a:solidFill>
           <a:ln w="9525">
             <a:solidFill>
-              <a:srgbClr val="BFC9CA"/>
+              <a:srgbClr val="82C99B"/>
             </a:solidFill>
           </a:ln>
         </p:spPr>
@@ -6381,70 +6431,51 @@
           </a:fontRef>
         </p:style>
         <p:txBody>
-          <a:bodyPr rtlCol="0" anchor="ctr"/>
-          <a:lstStyle/>
-          <a:p>
-            <a:pPr algn="ctr"/>
-          </a:p>
-        </p:txBody>
-      </p:sp>
-      <p:sp>
-        <p:nvSpPr>
-          <p:cNvPr id="76" name="TextBox 75"/>
-          <p:cNvSpPr txBox="1"/>
-          <p:nvPr/>
-        </p:nvSpPr>
-        <p:spPr>
-          <a:xfrm>
-            <a:off x="8705088" y="2340864"/>
-            <a:ext cx="1554480" cy="502920"/>
-          </a:xfrm>
-          <a:prstGeom prst="rect">
-            <a:avLst/>
-          </a:prstGeom>
-          <a:noFill/>
-        </p:spPr>
-        <p:txBody>
-          <a:bodyPr wrap="square" lIns="25400" rIns="25400" tIns="0" bIns="0">
-            <a:spAutoFit/>
-          </a:bodyPr>
-          <a:lstStyle/>
-          <a:p>
-            <a:pPr algn="ctr"/>
-            <a:r>
-              <a:rPr sz="800" b="0">
-                <a:solidFill>
-                  <a:srgbClr val="4A5568"/>
+          <a:bodyPr rtlCol="0" anchor="ctr" wrap="square" lIns="101600" rIns="101600" tIns="38100" bIns="25400"/>
+          <a:lstStyle/>
+          <a:p>
+            <a:pPr algn="l">
+              <a:spcBef>
+                <a:spcPts val="0"/>
+              </a:spcBef>
+              <a:spcAft>
+                <a:spcPts val="100"/>
+              </a:spcAft>
+            </a:pPr>
+            <a:r>
+              <a:rPr sz="1000" b="1">
+                <a:solidFill>
+                  <a:srgbClr val="1E6B48"/>
                 </a:solidFill>
                 <a:latin typeface="Calibri"/>
               </a:rPr>
-              <a:t>Emit events /
-transactions only
-(no scoring)</a:t>
-            </a:r>
-          </a:p>
-        </p:txBody>
-      </p:sp>
-      <p:sp>
-        <p:nvSpPr>
-          <p:cNvPr id="77" name="Rectangle 76"/>
+              <a:t>Catalog &amp; stock     Inventory · Catalog · Codes</a:t>
+            </a:r>
+          </a:p>
+        </p:txBody>
+      </p:sp>
+      <p:sp>
+        <p:nvSpPr>
+          <p:cNvPr id="59" name="Rounded Rectangle 58"/>
           <p:cNvSpPr/>
           <p:nvPr/>
         </p:nvSpPr>
         <p:spPr>
           <a:xfrm>
-            <a:off x="804672" y="3108960"/>
-            <a:ext cx="9646920" cy="1572768"/>
-          </a:xfrm>
-          <a:prstGeom prst="rect">
-            <a:avLst/>
-          </a:prstGeom>
-          <a:solidFill>
-            <a:srgbClr val="E8EEF4"/>
+            <a:off x="4352544" y="5303520"/>
+            <a:ext cx="2971800" cy="420624"/>
+          </a:xfrm>
+          <a:prstGeom prst="roundRect">
+            <a:avLst>
+              <a:gd name="adj" fmla="val 8000"/>
+            </a:avLst>
+          </a:prstGeom>
+          <a:solidFill>
+            <a:srgbClr val="D4EDDA"/>
           </a:solidFill>
           <a:ln w="9525">
             <a:solidFill>
-              <a:srgbClr val="BFC9CA"/>
+              <a:srgbClr val="82C99B"/>
             </a:solidFill>
           </a:ln>
         </p:spPr>
@@ -6463,33 +6494,51 @@
           </a:fontRef>
         </p:style>
         <p:txBody>
-          <a:bodyPr rtlCol="0" anchor="ctr"/>
-          <a:lstStyle/>
-          <a:p>
-            <a:pPr algn="ctr"/>
-          </a:p>
-        </p:txBody>
-      </p:sp>
-      <p:sp>
-        <p:nvSpPr>
-          <p:cNvPr id="78" name="Rectangle 77"/>
+          <a:bodyPr rtlCol="0" anchor="ctr" wrap="square" lIns="101600" rIns="101600" tIns="38100" bIns="25400"/>
+          <a:lstStyle/>
+          <a:p>
+            <a:pPr algn="l">
+              <a:spcBef>
+                <a:spcPts val="0"/>
+              </a:spcBef>
+              <a:spcAft>
+                <a:spcPts val="100"/>
+              </a:spcAft>
+            </a:pPr>
+            <a:r>
+              <a:rPr sz="1000" b="1">
+                <a:solidFill>
+                  <a:srgbClr val="1E6B48"/>
+                </a:solidFill>
+                <a:latin typeface="Calibri"/>
+              </a:rPr>
+              <a:t>Redemption     Validate · Engine · Vendors</a:t>
+            </a:r>
+          </a:p>
+        </p:txBody>
+      </p:sp>
+      <p:sp>
+        <p:nvSpPr>
+          <p:cNvPr id="60" name="Rounded Rectangle 59"/>
           <p:cNvSpPr/>
           <p:nvPr/>
         </p:nvSpPr>
         <p:spPr>
           <a:xfrm>
-            <a:off x="109728" y="3108960"/>
-            <a:ext cx="640080" cy="1572768"/>
-          </a:xfrm>
-          <a:prstGeom prst="rect">
-            <a:avLst/>
-          </a:prstGeom>
-          <a:solidFill>
-            <a:srgbClr val="E8EEF4"/>
+            <a:off x="7461504" y="5303520"/>
+            <a:ext cx="2971800" cy="420624"/>
+          </a:xfrm>
+          <a:prstGeom prst="roundRect">
+            <a:avLst>
+              <a:gd name="adj" fmla="val 8000"/>
+            </a:avLst>
+          </a:prstGeom>
+          <a:solidFill>
+            <a:srgbClr val="D4EDDA"/>
           </a:solidFill>
           <a:ln w="9525">
             <a:solidFill>
-              <a:srgbClr val="BFC9CA"/>
+              <a:srgbClr val="82C99B"/>
             </a:solidFill>
           </a:ln>
         </p:spPr>
@@ -6508,107 +6557,49 @@
           </a:fontRef>
         </p:style>
         <p:txBody>
-          <a:bodyPr rtlCol="0" anchor="ctr"/>
-          <a:lstStyle/>
-          <a:p>
-            <a:pPr algn="ctr"/>
-          </a:p>
-        </p:txBody>
-      </p:sp>
-      <p:sp>
-        <p:nvSpPr>
-          <p:cNvPr id="79" name="TextBox 78"/>
-          <p:cNvSpPr txBox="1"/>
+          <a:bodyPr rtlCol="0" anchor="ctr" wrap="square" lIns="101600" rIns="101600" tIns="38100" bIns="25400"/>
+          <a:lstStyle/>
+          <a:p>
+            <a:pPr algn="l">
+              <a:spcBef>
+                <a:spcPts val="0"/>
+              </a:spcBef>
+              <a:spcAft>
+                <a:spcPts val="100"/>
+              </a:spcAft>
+            </a:pPr>
+            <a:r>
+              <a:rPr sz="1000" b="1">
+                <a:solidFill>
+                  <a:srgbClr val="1E6B48"/>
+                </a:solidFill>
+                <a:latin typeface="Calibri"/>
+              </a:rPr>
+              <a:t>Customer coupon     Ownership · History · Search</a:t>
+            </a:r>
+          </a:p>
+        </p:txBody>
+      </p:sp>
+      <p:sp>
+        <p:nvSpPr>
+          <p:cNvPr id="61" name="Rectangle 60"/>
+          <p:cNvSpPr/>
           <p:nvPr/>
         </p:nvSpPr>
         <p:spPr>
           <a:xfrm>
-            <a:off x="128016" y="3163824"/>
-            <a:ext cx="603504" cy="329184"/>
+            <a:off x="1042416" y="5888736"/>
+            <a:ext cx="9646920" cy="804672"/>
           </a:xfrm>
           <a:prstGeom prst="rect">
             <a:avLst/>
           </a:prstGeom>
-          <a:noFill/>
-        </p:spPr>
-        <p:txBody>
-          <a:bodyPr wrap="square" lIns="25400" rIns="25400" tIns="0" bIns="0">
-            <a:spAutoFit/>
-          </a:bodyPr>
-          <a:lstStyle/>
-          <a:p>
-            <a:pPr algn="ctr"/>
-            <a:r>
-              <a:rPr sz="800" b="1">
-                <a:solidFill>
-                  <a:srgbClr val="1B4F72"/>
-                </a:solidFill>
-                <a:latin typeface="Calibri"/>
-              </a:rPr>
-              <a:t>04
-Core</a:t>
-            </a:r>
-          </a:p>
-        </p:txBody>
-      </p:sp>
-      <p:sp>
-        <p:nvSpPr>
-          <p:cNvPr id="80" name="TextBox 79"/>
-          <p:cNvSpPr txBox="1"/>
-          <p:nvPr/>
-        </p:nvSpPr>
-        <p:spPr>
-          <a:xfrm>
-            <a:off x="128016" y="3474720"/>
-            <a:ext cx="603504" cy="365760"/>
-          </a:xfrm>
-          <a:prstGeom prst="rect">
-            <a:avLst/>
-          </a:prstGeom>
-          <a:noFill/>
-        </p:spPr>
-        <p:txBody>
-          <a:bodyPr wrap="square" lIns="25400" rIns="25400" tIns="0" bIns="0">
-            <a:spAutoFit/>
-          </a:bodyPr>
-          <a:lstStyle/>
-          <a:p>
-            <a:pPr algn="ctr"/>
-            <a:r>
-              <a:rPr sz="700" b="0">
-                <a:solidFill>
-                  <a:srgbClr val="7F8C8D"/>
-                </a:solidFill>
-                <a:latin typeface="Calibri"/>
-              </a:rPr>
-              <a:t>Reward
-System</a:t>
-            </a:r>
-          </a:p>
-        </p:txBody>
-      </p:sp>
-      <p:sp>
-        <p:nvSpPr>
-          <p:cNvPr id="81" name="Rounded Rectangle 80"/>
-          <p:cNvSpPr/>
-          <p:nvPr/>
-        </p:nvSpPr>
-        <p:spPr>
-          <a:xfrm>
-            <a:off x="896112" y="3182112"/>
-            <a:ext cx="9464040" cy="1426464"/>
-          </a:xfrm>
-          <a:prstGeom prst="roundRect">
-            <a:avLst>
-              <a:gd name="adj" fmla="val 3000"/>
-            </a:avLst>
-          </a:prstGeom>
-          <a:solidFill>
-            <a:srgbClr val="1A365D"/>
-          </a:solidFill>
-          <a:ln w="19050">
+          <a:solidFill>
+            <a:srgbClr val="EEF3F8"/>
+          </a:solidFill>
+          <a:ln w="7620">
             <a:solidFill>
-              <a:srgbClr val="1B4F72"/>
+              <a:srgbClr val="D0D7DE"/>
             </a:solidFill>
           </a:ln>
         </p:spPr>
@@ -6636,97 +6627,23 @@
       </p:sp>
       <p:sp>
         <p:nvSpPr>
-          <p:cNvPr id="82" name="TextBox 81"/>
-          <p:cNvSpPr txBox="1"/>
+          <p:cNvPr id="62" name="Rectangle 61"/>
+          <p:cNvSpPr/>
           <p:nvPr/>
         </p:nvSpPr>
         <p:spPr>
           <a:xfrm>
-            <a:off x="1005840" y="3200400"/>
-            <a:ext cx="5943600" cy="182880"/>
+            <a:off x="201168" y="5888736"/>
+            <a:ext cx="841248" cy="804672"/>
           </a:xfrm>
           <a:prstGeom prst="rect">
             <a:avLst/>
           </a:prstGeom>
-          <a:noFill/>
-        </p:spPr>
-        <p:txBody>
-          <a:bodyPr wrap="square" lIns="25400" rIns="25400" tIns="0" bIns="0">
-            <a:spAutoFit/>
-          </a:bodyPr>
-          <a:lstStyle/>
-          <a:p>
-            <a:pPr algn="l"/>
-            <a:r>
-              <a:rPr sz="1000" b="1">
-                <a:solidFill>
-                  <a:srgbClr val="FFFFFF"/>
-                </a:solidFill>
-                <a:latin typeface="Calibri"/>
-              </a:rPr>
-              <a:t>Reward System (RS)   ·   NEW DOMAIN WE STAND UP</a:t>
-            </a:r>
-          </a:p>
-        </p:txBody>
-      </p:sp>
-      <p:sp>
-        <p:nvSpPr>
-          <p:cNvPr id="83" name="TextBox 82"/>
-          <p:cNvSpPr txBox="1"/>
-          <p:nvPr/>
-        </p:nvSpPr>
-        <p:spPr>
-          <a:xfrm>
-            <a:off x="1005840" y="3364992"/>
-            <a:ext cx="6583680" cy="146304"/>
-          </a:xfrm>
-          <a:prstGeom prst="rect">
-            <a:avLst/>
-          </a:prstGeom>
-          <a:noFill/>
-        </p:spPr>
-        <p:txBody>
-          <a:bodyPr wrap="square" lIns="25400" rIns="25400" tIns="0" bIns="0">
-            <a:spAutoFit/>
-          </a:bodyPr>
-          <a:lstStyle/>
-          <a:p>
-            <a:pPr algn="l"/>
-            <a:r>
-              <a:rPr sz="800" b="0">
-                <a:solidFill>
-                  <a:srgbClr val="AEC6CF"/>
-                </a:solidFill>
-                <a:latin typeface="Calibri"/>
-              </a:rPr>
-              <a:t>Wallets · posting · calculation · books   ·   Kafka as the integration bus</a:t>
-            </a:r>
-          </a:p>
-        </p:txBody>
-      </p:sp>
-      <p:sp>
-        <p:nvSpPr>
-          <p:cNvPr id="84" name="Rounded Rectangle 83"/>
-          <p:cNvSpPr/>
-          <p:nvPr/>
-        </p:nvSpPr>
-        <p:spPr>
-          <a:xfrm>
-            <a:off x="1005840" y="3566160"/>
-            <a:ext cx="1737360" cy="237744"/>
-          </a:xfrm>
-          <a:prstGeom prst="roundRect">
-            <a:avLst>
-              <a:gd name="adj" fmla="val 15000"/>
-            </a:avLst>
-          </a:prstGeom>
-          <a:solidFill>
-            <a:srgbClr val="2E86AB"/>
-          </a:solidFill>
-          <a:ln w="9525">
-            <a:solidFill>
-              <a:srgbClr val="5DAEE2"/>
-            </a:solidFill>
+          <a:solidFill>
+            <a:srgbClr val="1B3A5F"/>
+          </a:solidFill>
+          <a:ln>
+            <a:noFill/>
           </a:ln>
         </p:spPr>
         <p:style>
@@ -6744,44 +6661,110 @@
           </a:fontRef>
         </p:style>
         <p:txBody>
-          <a:bodyPr rtlCol="0" anchor="ctr" wrap="square" lIns="38100" rIns="38100" tIns="25400" bIns="12700"/>
-          <a:lstStyle/>
-          <a:p>
-            <a:pPr algn="ctr"/>
-            <a:r>
-              <a:rPr sz="800" b="1">
-                <a:solidFill>
-                  <a:srgbClr val="FFFFFF"/>
+          <a:bodyPr rtlCol="0" anchor="ctr" wrap="square" lIns="50800" rIns="50800" tIns="38100" bIns="25400"/>
+          <a:lstStyle/>
+          <a:p>
+            <a:pPr algn="ctr">
+              <a:spcBef>
+                <a:spcPts val="0"/>
+              </a:spcBef>
+              <a:spcAft>
+                <a:spcPts val="100"/>
+              </a:spcAft>
+            </a:pPr>
+            <a:r>
+              <a:rPr sz="800" b="0">
+                <a:solidFill>
+                  <a:srgbClr val="B7C9DC"/>
                 </a:solidFill>
                 <a:latin typeface="Calibri"/>
               </a:rPr>
-              <a:t>Reward Wallet</a:t>
-            </a:r>
-          </a:p>
-        </p:txBody>
-      </p:sp>
-      <p:sp>
-        <p:nvSpPr>
-          <p:cNvPr id="85" name="Rounded Rectangle 84"/>
+              <a:t>06</a:t>
+            </a:r>
+          </a:p>
+          <a:p>
+            <a:pPr algn="ctr">
+              <a:spcBef>
+                <a:spcPts val="0"/>
+              </a:spcBef>
+              <a:spcAft>
+                <a:spcPts val="100"/>
+              </a:spcAft>
+            </a:pPr>
+            <a:r>
+              <a:rPr sz="1000" b="1">
+                <a:solidFill>
+                  <a:srgbClr val="FFFFFF"/>
+                </a:solidFill>
+                <a:latin typeface="Calibri"/>
+              </a:rPr>
+              <a:t>EDGE</a:t>
+            </a:r>
+          </a:p>
+        </p:txBody>
+      </p:sp>
+      <p:sp>
+        <p:nvSpPr>
+          <p:cNvPr id="63" name="TextBox 62"/>
+          <p:cNvSpPr txBox="1"/>
+          <p:nvPr/>
+        </p:nvSpPr>
+        <p:spPr>
+          <a:xfrm>
+            <a:off x="1152144" y="5943600"/>
+            <a:ext cx="1463040" cy="146304"/>
+          </a:xfrm>
+          <a:prstGeom prst="rect">
+            <a:avLst/>
+          </a:prstGeom>
+          <a:noFill/>
+        </p:spPr>
+        <p:txBody>
+          <a:bodyPr wrap="square" lIns="25400" rIns="25400" tIns="38100" bIns="25400">
+            <a:spAutoFit/>
+          </a:bodyPr>
+          <a:lstStyle/>
+          <a:p>
+            <a:pPr algn="l">
+              <a:spcBef>
+                <a:spcPts val="0"/>
+              </a:spcBef>
+              <a:spcAft>
+                <a:spcPts val="100"/>
+              </a:spcAft>
+            </a:pPr>
+            <a:r>
+              <a:rPr sz="900" b="1">
+                <a:solidFill>
+                  <a:srgbClr val="1B3A5F"/>
+                </a:solidFill>
+                <a:latin typeface="Calibri"/>
+              </a:rPr>
+              <a:t>Persistent layer</a:t>
+            </a:r>
+          </a:p>
+        </p:txBody>
+      </p:sp>
+      <p:sp>
+        <p:nvSpPr>
+          <p:cNvPr id="64" name="Can 63"/>
           <p:cNvSpPr/>
           <p:nvPr/>
         </p:nvSpPr>
         <p:spPr>
           <a:xfrm>
-            <a:off x="2816352" y="3566160"/>
-            <a:ext cx="1737360" cy="237744"/>
-          </a:xfrm>
-          <a:prstGeom prst="roundRect">
-            <a:avLst>
-              <a:gd name="adj" fmla="val 15000"/>
-            </a:avLst>
-          </a:prstGeom>
-          <a:solidFill>
-            <a:srgbClr val="2E86AB"/>
+            <a:off x="1152144" y="6126480"/>
+            <a:ext cx="987552" cy="475488"/>
+          </a:xfrm>
+          <a:prstGeom prst="can">
+            <a:avLst/>
+          </a:prstGeom>
+          <a:solidFill>
+            <a:srgbClr val="E8ECF0"/>
           </a:solidFill>
           <a:ln w="9525">
             <a:solidFill>
-              <a:srgbClr val="5DAEE2"/>
+              <a:srgbClr val="D0D7DE"/>
             </a:solidFill>
           </a:ln>
         </p:spPr>
@@ -6800,44 +6783,49 @@
           </a:fontRef>
         </p:style>
         <p:txBody>
-          <a:bodyPr rtlCol="0" anchor="ctr" wrap="square" lIns="38100" rIns="38100" tIns="25400" bIns="12700"/>
-          <a:lstStyle/>
-          <a:p>
-            <a:pPr algn="ctr"/>
-            <a:r>
-              <a:rPr sz="800" b="1">
-                <a:solidFill>
-                  <a:srgbClr val="FFFFFF"/>
+          <a:bodyPr rtlCol="0" anchor="ctr" wrap="square" lIns="25400" rIns="25400" tIns="38100" bIns="25400"/>
+          <a:lstStyle/>
+          <a:p>
+            <a:pPr algn="ctr">
+              <a:spcBef>
+                <a:spcPts val="0"/>
+              </a:spcBef>
+              <a:spcAft>
+                <a:spcPts val="100"/>
+              </a:spcAft>
+            </a:pPr>
+            <a:r>
+              <a:rPr sz="900" b="1">
+                <a:solidFill>
+                  <a:srgbClr val="1F2A37"/>
                 </a:solidFill>
                 <a:latin typeface="Calibri"/>
               </a:rPr>
-              <a:t>Chart of Accounts</a:t>
-            </a:r>
-          </a:p>
-        </p:txBody>
-      </p:sp>
-      <p:sp>
-        <p:nvSpPr>
-          <p:cNvPr id="86" name="Rounded Rectangle 85"/>
+              <a:t>Wallets</a:t>
+            </a:r>
+          </a:p>
+        </p:txBody>
+      </p:sp>
+      <p:sp>
+        <p:nvSpPr>
+          <p:cNvPr id="65" name="Can 64"/>
           <p:cNvSpPr/>
           <p:nvPr/>
         </p:nvSpPr>
         <p:spPr>
           <a:xfrm>
-            <a:off x="4626864" y="3566160"/>
-            <a:ext cx="1737360" cy="237744"/>
-          </a:xfrm>
-          <a:prstGeom prst="roundRect">
-            <a:avLst>
-              <a:gd name="adj" fmla="val 15000"/>
-            </a:avLst>
-          </a:prstGeom>
-          <a:solidFill>
-            <a:srgbClr val="2E86AB"/>
+            <a:off x="2231136" y="6126480"/>
+            <a:ext cx="987552" cy="475488"/>
+          </a:xfrm>
+          <a:prstGeom prst="can">
+            <a:avLst/>
+          </a:prstGeom>
+          <a:solidFill>
+            <a:srgbClr val="E8ECF0"/>
           </a:solidFill>
           <a:ln w="9525">
             <a:solidFill>
-              <a:srgbClr val="5DAEE2"/>
+              <a:srgbClr val="D0D7DE"/>
             </a:solidFill>
           </a:ln>
         </p:spPr>
@@ -6856,44 +6844,49 @@
           </a:fontRef>
         </p:style>
         <p:txBody>
-          <a:bodyPr rtlCol="0" anchor="ctr" wrap="square" lIns="38100" rIns="38100" tIns="25400" bIns="12700"/>
-          <a:lstStyle/>
-          <a:p>
-            <a:pPr algn="ctr"/>
-            <a:r>
-              <a:rPr sz="800" b="1">
-                <a:solidFill>
-                  <a:srgbClr val="FFFFFF"/>
+          <a:bodyPr rtlCol="0" anchor="ctr" wrap="square" lIns="25400" rIns="25400" tIns="38100" bIns="25400"/>
+          <a:lstStyle/>
+          <a:p>
+            <a:pPr algn="ctr">
+              <a:spcBef>
+                <a:spcPts val="0"/>
+              </a:spcBef>
+              <a:spcAft>
+                <a:spcPts val="100"/>
+              </a:spcAft>
+            </a:pPr>
+            <a:r>
+              <a:rPr sz="900" b="1">
+                <a:solidFill>
+                  <a:srgbClr val="1F2A37"/>
                 </a:solidFill>
                 <a:latin typeface="Calibri"/>
               </a:rPr>
-              <a:t>Points Calculation</a:t>
-            </a:r>
-          </a:p>
-        </p:txBody>
-      </p:sp>
-      <p:sp>
-        <p:nvSpPr>
-          <p:cNvPr id="87" name="Rounded Rectangle 86"/>
+              <a:t>Rewards</a:t>
+            </a:r>
+          </a:p>
+        </p:txBody>
+      </p:sp>
+      <p:sp>
+        <p:nvSpPr>
+          <p:cNvPr id="66" name="Can 65"/>
           <p:cNvSpPr/>
           <p:nvPr/>
         </p:nvSpPr>
         <p:spPr>
           <a:xfrm>
-            <a:off x="6437376" y="3566160"/>
-            <a:ext cx="1737360" cy="237744"/>
-          </a:xfrm>
-          <a:prstGeom prst="roundRect">
-            <a:avLst>
-              <a:gd name="adj" fmla="val 15000"/>
-            </a:avLst>
-          </a:prstGeom>
-          <a:solidFill>
-            <a:srgbClr val="2E86AB"/>
+            <a:off x="3310128" y="6126480"/>
+            <a:ext cx="987552" cy="475488"/>
+          </a:xfrm>
+          <a:prstGeom prst="can">
+            <a:avLst/>
+          </a:prstGeom>
+          <a:solidFill>
+            <a:srgbClr val="E8ECF0"/>
           </a:solidFill>
           <a:ln w="9525">
             <a:solidFill>
-              <a:srgbClr val="5DAEE2"/>
+              <a:srgbClr val="D0D7DE"/>
             </a:solidFill>
           </a:ln>
         </p:spPr>
@@ -6912,44 +6905,49 @@
           </a:fontRef>
         </p:style>
         <p:txBody>
-          <a:bodyPr rtlCol="0" anchor="ctr" wrap="square" lIns="38100" rIns="38100" tIns="25400" bIns="12700"/>
-          <a:lstStyle/>
-          <a:p>
-            <a:pPr algn="ctr"/>
-            <a:r>
-              <a:rPr sz="800" b="1">
-                <a:solidFill>
-                  <a:srgbClr val="FFFFFF"/>
+          <a:bodyPr rtlCol="0" anchor="ctr" wrap="square" lIns="25400" rIns="25400" tIns="38100" bIns="25400"/>
+          <a:lstStyle/>
+          <a:p>
+            <a:pPr algn="ctr">
+              <a:spcBef>
+                <a:spcPts val="0"/>
+              </a:spcBef>
+              <a:spcAft>
+                <a:spcPts val="100"/>
+              </a:spcAft>
+            </a:pPr>
+            <a:r>
+              <a:rPr sz="900" b="1">
+                <a:solidFill>
+                  <a:srgbClr val="1F2A37"/>
                 </a:solidFill>
                 <a:latin typeface="Calibri"/>
               </a:rPr>
-              <a:t>Hold &amp; Release</a:t>
-            </a:r>
-          </a:p>
-        </p:txBody>
-      </p:sp>
-      <p:sp>
-        <p:nvSpPr>
-          <p:cNvPr id="88" name="Rounded Rectangle 87"/>
+              <a:t>CBP</a:t>
+            </a:r>
+          </a:p>
+        </p:txBody>
+      </p:sp>
+      <p:sp>
+        <p:nvSpPr>
+          <p:cNvPr id="67" name="Can 66"/>
           <p:cNvSpPr/>
           <p:nvPr/>
         </p:nvSpPr>
         <p:spPr>
           <a:xfrm>
-            <a:off x="8247888" y="3566160"/>
-            <a:ext cx="1737360" cy="237744"/>
-          </a:xfrm>
-          <a:prstGeom prst="roundRect">
-            <a:avLst>
-              <a:gd name="adj" fmla="val 15000"/>
-            </a:avLst>
-          </a:prstGeom>
-          <a:solidFill>
-            <a:srgbClr val="2E86AB"/>
+            <a:off x="4389120" y="6126480"/>
+            <a:ext cx="987552" cy="475488"/>
+          </a:xfrm>
+          <a:prstGeom prst="can">
+            <a:avLst/>
+          </a:prstGeom>
+          <a:solidFill>
+            <a:srgbClr val="E8ECF0"/>
           </a:solidFill>
           <a:ln w="9525">
             <a:solidFill>
-              <a:srgbClr val="5DAEE2"/>
+              <a:srgbClr val="D0D7DE"/>
             </a:solidFill>
           </a:ln>
         </p:spPr>
@@ -6968,44 +6966,49 @@
           </a:fontRef>
         </p:style>
         <p:txBody>
-          <a:bodyPr rtlCol="0" anchor="ctr" wrap="square" lIns="38100" rIns="38100" tIns="25400" bIns="12700"/>
-          <a:lstStyle/>
-          <a:p>
-            <a:pPr algn="ctr"/>
-            <a:r>
-              <a:rPr sz="800" b="1">
-                <a:solidFill>
-                  <a:srgbClr val="FFFFFF"/>
+          <a:bodyPr rtlCol="0" anchor="ctr" wrap="square" lIns="25400" rIns="25400" tIns="38100" bIns="25400"/>
+          <a:lstStyle/>
+          <a:p>
+            <a:pPr algn="ctr">
+              <a:spcBef>
+                <a:spcPts val="0"/>
+              </a:spcBef>
+              <a:spcAft>
+                <a:spcPts val="100"/>
+              </a:spcAft>
+            </a:pPr>
+            <a:r>
+              <a:rPr sz="900" b="1">
+                <a:solidFill>
+                  <a:srgbClr val="1F2A37"/>
                 </a:solidFill>
                 <a:latin typeface="Calibri"/>
               </a:rPr>
-              <a:t>Referral Posting</a:t>
-            </a:r>
-          </a:p>
-        </p:txBody>
-      </p:sp>
-      <p:sp>
-        <p:nvSpPr>
-          <p:cNvPr id="89" name="Rounded Rectangle 88"/>
+              <a:t>Coupon stocks</a:t>
+            </a:r>
+          </a:p>
+        </p:txBody>
+      </p:sp>
+      <p:sp>
+        <p:nvSpPr>
+          <p:cNvPr id="68" name="Can 67"/>
           <p:cNvSpPr/>
           <p:nvPr/>
         </p:nvSpPr>
         <p:spPr>
           <a:xfrm>
-            <a:off x="1005840" y="3849624"/>
-            <a:ext cx="1737360" cy="237744"/>
-          </a:xfrm>
-          <a:prstGeom prst="roundRect">
-            <a:avLst>
-              <a:gd name="adj" fmla="val 15000"/>
-            </a:avLst>
-          </a:prstGeom>
-          <a:solidFill>
-            <a:srgbClr val="2E86AB"/>
+            <a:off x="5468112" y="6126480"/>
+            <a:ext cx="987552" cy="475488"/>
+          </a:xfrm>
+          <a:prstGeom prst="can">
+            <a:avLst/>
+          </a:prstGeom>
+          <a:solidFill>
+            <a:srgbClr val="E8ECF0"/>
           </a:solidFill>
           <a:ln w="9525">
             <a:solidFill>
-              <a:srgbClr val="5DAEE2"/>
+              <a:srgbClr val="D0D7DE"/>
             </a:solidFill>
           </a:ln>
         </p:spPr>
@@ -7024,44 +7027,51 @@
           </a:fontRef>
         </p:style>
         <p:txBody>
-          <a:bodyPr rtlCol="0" anchor="ctr" wrap="square" lIns="38100" rIns="38100" tIns="25400" bIns="12700"/>
-          <a:lstStyle/>
-          <a:p>
-            <a:pPr algn="ctr"/>
-            <a:r>
-              <a:rPr sz="800" b="1">
-                <a:solidFill>
-                  <a:srgbClr val="FFFFFF"/>
+          <a:bodyPr rtlCol="0" anchor="ctr" wrap="square" lIns="25400" rIns="25400" tIns="38100" bIns="25400"/>
+          <a:lstStyle/>
+          <a:p>
+            <a:pPr algn="ctr">
+              <a:spcBef>
+                <a:spcPts val="0"/>
+              </a:spcBef>
+              <a:spcAft>
+                <a:spcPts val="100"/>
+              </a:spcAft>
+            </a:pPr>
+            <a:r>
+              <a:rPr sz="900" b="1">
+                <a:solidFill>
+                  <a:srgbClr val="1F2A37"/>
                 </a:solidFill>
                 <a:latin typeface="Calibri"/>
               </a:rPr>
-              <a:t>Double-Entry Posting</a:t>
-            </a:r>
-          </a:p>
-        </p:txBody>
-      </p:sp>
-      <p:sp>
-        <p:nvSpPr>
-          <p:cNvPr id="90" name="Rounded Rectangle 89"/>
+              <a:t>Coupon wallet</a:t>
+            </a:r>
+          </a:p>
+        </p:txBody>
+      </p:sp>
+      <p:sp>
+        <p:nvSpPr>
+          <p:cNvPr id="69" name="Rounded Rectangle 68"/>
           <p:cNvSpPr/>
           <p:nvPr/>
         </p:nvSpPr>
         <p:spPr>
           <a:xfrm>
-            <a:off x="2816352" y="3849624"/>
-            <a:ext cx="1737360" cy="237744"/>
+            <a:off x="6711696" y="6053328"/>
+            <a:ext cx="1965960" cy="530352"/>
           </a:xfrm>
           <a:prstGeom prst="roundRect">
             <a:avLst>
-              <a:gd name="adj" fmla="val 15000"/>
+              <a:gd name="adj" fmla="val 10000"/>
             </a:avLst>
           </a:prstGeom>
           <a:solidFill>
-            <a:srgbClr val="2E86AB"/>
-          </a:solidFill>
-          <a:ln w="9525">
+            <a:srgbClr val="D4EDDA"/>
+          </a:solidFill>
+          <a:ln w="12700">
             <a:solidFill>
-              <a:srgbClr val="5DAEE2"/>
+              <a:srgbClr val="82C99B"/>
             </a:solidFill>
           </a:ln>
         </p:spPr>
@@ -7080,44 +7090,70 @@
           </a:fontRef>
         </p:style>
         <p:txBody>
-          <a:bodyPr rtlCol="0" anchor="ctr" wrap="square" lIns="38100" rIns="38100" tIns="25400" bIns="12700"/>
-          <a:lstStyle/>
-          <a:p>
-            <a:pPr algn="ctr"/>
-            <a:r>
-              <a:rPr sz="800" b="1">
-                <a:solidFill>
-                  <a:srgbClr val="FFFFFF"/>
+          <a:bodyPr rtlCol="0" anchor="ctr" wrap="square" lIns="50800" rIns="50800" tIns="38100" bIns="25400"/>
+          <a:lstStyle/>
+          <a:p>
+            <a:pPr algn="ctr">
+              <a:spcBef>
+                <a:spcPts val="0"/>
+              </a:spcBef>
+              <a:spcAft>
+                <a:spcPts val="100"/>
+              </a:spcAft>
+            </a:pPr>
+            <a:r>
+              <a:rPr sz="1100" b="1">
+                <a:solidFill>
+                  <a:srgbClr val="1E6B48"/>
                 </a:solidFill>
                 <a:latin typeface="Calibri"/>
               </a:rPr>
-              <a:t>Earn Engine</a:t>
-            </a:r>
-          </a:p>
-        </p:txBody>
-      </p:sp>
-      <p:sp>
-        <p:nvSpPr>
-          <p:cNvPr id="91" name="Rounded Rectangle 90"/>
+              <a:t>COD  ·  partner fulfill</a:t>
+            </a:r>
+          </a:p>
+          <a:p>
+            <a:pPr algn="ctr">
+              <a:spcBef>
+                <a:spcPts val="0"/>
+              </a:spcBef>
+              <a:spcAft>
+                <a:spcPts val="100"/>
+              </a:spcAft>
+            </a:pPr>
+            <a:r>
+              <a:rPr sz="900" b="0">
+                <a:solidFill>
+                  <a:srgbClr val="1E6B48"/>
+                </a:solidFill>
+                <a:latin typeface="Calibri"/>
+              </a:rPr>
+              <a:t>server / rails</a:t>
+            </a:r>
+          </a:p>
+        </p:txBody>
+      </p:sp>
+      <p:sp>
+        <p:nvSpPr>
+          <p:cNvPr id="70" name="Rounded Rectangle 69"/>
           <p:cNvSpPr/>
           <p:nvPr/>
         </p:nvSpPr>
         <p:spPr>
           <a:xfrm>
-            <a:off x="4626864" y="3849624"/>
-            <a:ext cx="1737360" cy="237744"/>
+            <a:off x="8814816" y="6053328"/>
+            <a:ext cx="1783080" cy="530352"/>
           </a:xfrm>
           <a:prstGeom prst="roundRect">
             <a:avLst>
-              <a:gd name="adj" fmla="val 15000"/>
+              <a:gd name="adj" fmla="val 10000"/>
             </a:avLst>
           </a:prstGeom>
           <a:solidFill>
-            <a:srgbClr val="2E86AB"/>
+            <a:srgbClr val="FFFFFF"/>
           </a:solidFill>
           <a:ln w="9525">
             <a:solidFill>
-              <a:srgbClr val="5DAEE2"/>
+              <a:srgbClr val="D0D7DE"/>
             </a:solidFill>
           </a:ln>
         </p:spPr>
@@ -7136,45 +7172,69 @@
           </a:fontRef>
         </p:style>
         <p:txBody>
-          <a:bodyPr rtlCol="0" anchor="ctr" wrap="square" lIns="38100" rIns="38100" tIns="25400" bIns="12700"/>
-          <a:lstStyle/>
-          <a:p>
-            <a:pPr algn="ctr"/>
-            <a:r>
-              <a:rPr sz="800" b="1">
-                <a:solidFill>
-                  <a:srgbClr val="FFFFFF"/>
+          <a:bodyPr rtlCol="0" anchor="ctr" wrap="square" lIns="76200" rIns="76200" tIns="38100" bIns="25400"/>
+          <a:lstStyle/>
+          <a:p>
+            <a:pPr algn="l">
+              <a:spcBef>
+                <a:spcPts val="0"/>
+              </a:spcBef>
+              <a:spcAft>
+                <a:spcPts val="100"/>
+              </a:spcAft>
+            </a:pPr>
+            <a:r>
+              <a:rPr sz="1000" b="1">
+                <a:solidFill>
+                  <a:srgbClr val="1F2A37"/>
                 </a:solidFill>
                 <a:latin typeface="Calibri"/>
               </a:rPr>
-              <a:t>Txn Eligibility</a:t>
-            </a:r>
-          </a:p>
-        </p:txBody>
-      </p:sp>
-      <p:sp>
-        <p:nvSpPr>
-          <p:cNvPr id="92" name="Rounded Rectangle 91"/>
+              <a:t>RS never holds stock.</a:t>
+            </a:r>
+          </a:p>
+          <a:p>
+            <a:pPr algn="l">
+              <a:spcBef>
+                <a:spcPts val="0"/>
+              </a:spcBef>
+              <a:spcAft>
+                <a:spcPts val="100"/>
+              </a:spcAft>
+            </a:pPr>
+            <a:r>
+              <a:rPr sz="900" b="0">
+                <a:solidFill>
+                  <a:srgbClr val="6B7C8D"/>
+                </a:solidFill>
+                <a:latin typeface="Calibri"/>
+              </a:rPr>
+              <a:t>CRP executes coupon reality.</a:t>
+            </a:r>
+          </a:p>
+        </p:txBody>
+      </p:sp>
+      <p:sp>
+        <p:nvSpPr>
+          <p:cNvPr id="71" name="Rounded Rectangle 70"/>
           <p:cNvSpPr/>
           <p:nvPr/>
         </p:nvSpPr>
         <p:spPr>
           <a:xfrm>
-            <a:off x="6437376" y="3849624"/>
-            <a:ext cx="1737360" cy="237744"/>
+            <a:off x="10881360" y="566928"/>
+            <a:ext cx="1115568" cy="6126480"/>
           </a:xfrm>
           <a:prstGeom prst="roundRect">
             <a:avLst>
-              <a:gd name="adj" fmla="val 15000"/>
+              <a:gd name="adj" fmla="val 4000"/>
             </a:avLst>
           </a:prstGeom>
           <a:solidFill>
-            <a:srgbClr val="2E86AB"/>
-          </a:solidFill>
-          <a:ln w="9525">
-            <a:solidFill>
-              <a:srgbClr val="5DAEE2"/>
-            </a:solidFill>
+            <a:srgbClr val="1B3A5F"/>
+          </a:solidFill>
+          <a:ln>
+            <a:noFill/>
           </a:ln>
         </p:spPr>
         <p:style>
@@ -7192,44 +7252,119 @@
           </a:fontRef>
         </p:style>
         <p:txBody>
-          <a:bodyPr rtlCol="0" anchor="ctr" wrap="square" lIns="38100" rIns="38100" tIns="25400" bIns="12700"/>
+          <a:bodyPr rtlCol="0" anchor="ctr"/>
           <a:lstStyle/>
           <a:p>
             <a:pPr algn="ctr"/>
-            <a:r>
-              <a:rPr sz="800" b="1">
+          </a:p>
+        </p:txBody>
+      </p:sp>
+      <p:sp>
+        <p:nvSpPr>
+          <p:cNvPr id="72" name="TextBox 71"/>
+          <p:cNvSpPr txBox="1"/>
+          <p:nvPr/>
+        </p:nvSpPr>
+        <p:spPr>
+          <a:xfrm>
+            <a:off x="10881360" y="640080"/>
+            <a:ext cx="1115568" cy="201168"/>
+          </a:xfrm>
+          <a:prstGeom prst="rect">
+            <a:avLst/>
+          </a:prstGeom>
+          <a:noFill/>
+        </p:spPr>
+        <p:txBody>
+          <a:bodyPr wrap="square" lIns="25400" rIns="25400" tIns="38100" bIns="25400">
+            <a:spAutoFit/>
+          </a:bodyPr>
+          <a:lstStyle/>
+          <a:p>
+            <a:pPr algn="ctr">
+              <a:spcBef>
+                <a:spcPts val="0"/>
+              </a:spcBef>
+              <a:spcAft>
+                <a:spcPts val="100"/>
+              </a:spcAft>
+            </a:pPr>
+            <a:r>
+              <a:rPr sz="900" b="1">
                 <a:solidFill>
                   <a:srgbClr val="FFFFFF"/>
                 </a:solidFill>
                 <a:latin typeface="Calibri"/>
               </a:rPr>
-              <a:t>Balance Inquiry</a:t>
-            </a:r>
-          </a:p>
-        </p:txBody>
-      </p:sp>
-      <p:sp>
-        <p:nvSpPr>
-          <p:cNvPr id="93" name="Rounded Rectangle 92"/>
+              <a:t>EVENT BUS</a:t>
+            </a:r>
+          </a:p>
+        </p:txBody>
+      </p:sp>
+      <p:sp>
+        <p:nvSpPr>
+          <p:cNvPr id="73" name="TextBox 72"/>
+          <p:cNvSpPr txBox="1"/>
+          <p:nvPr/>
+        </p:nvSpPr>
+        <p:spPr>
+          <a:xfrm>
+            <a:off x="10881360" y="822960"/>
+            <a:ext cx="1115568" cy="182880"/>
+          </a:xfrm>
+          <a:prstGeom prst="rect">
+            <a:avLst/>
+          </a:prstGeom>
+          <a:noFill/>
+        </p:spPr>
+        <p:txBody>
+          <a:bodyPr wrap="square" lIns="25400" rIns="25400" tIns="38100" bIns="25400">
+            <a:spAutoFit/>
+          </a:bodyPr>
+          <a:lstStyle/>
+          <a:p>
+            <a:pPr algn="ctr">
+              <a:spcBef>
+                <a:spcPts val="0"/>
+              </a:spcBef>
+              <a:spcAft>
+                <a:spcPts val="100"/>
+              </a:spcAft>
+            </a:pPr>
+            <a:r>
+              <a:rPr sz="1200" b="1">
+                <a:solidFill>
+                  <a:srgbClr val="7EC8E3"/>
+                </a:solidFill>
+                <a:latin typeface="Calibri"/>
+              </a:rPr>
+              <a:t>Kafka</a:t>
+            </a:r>
+          </a:p>
+        </p:txBody>
+      </p:sp>
+      <p:sp>
+        <p:nvSpPr>
+          <p:cNvPr id="74" name="Rounded Rectangle 73"/>
           <p:cNvSpPr/>
           <p:nvPr/>
         </p:nvSpPr>
         <p:spPr>
           <a:xfrm>
-            <a:off x="8247888" y="3849624"/>
-            <a:ext cx="1737360" cy="237744"/>
+            <a:off x="10972800" y="1115568"/>
+            <a:ext cx="932688" cy="640080"/>
           </a:xfrm>
           <a:prstGeom prst="roundRect">
             <a:avLst>
-              <a:gd name="adj" fmla="val 15000"/>
+              <a:gd name="adj" fmla="val 12000"/>
             </a:avLst>
           </a:prstGeom>
           <a:solidFill>
-            <a:srgbClr val="2E86AB"/>
+            <a:srgbClr val="2A557A"/>
           </a:solidFill>
           <a:ln w="9525">
             <a:solidFill>
-              <a:srgbClr val="5DAEE2"/>
+              <a:srgbClr val="4A7AA8"/>
             </a:solidFill>
           </a:ln>
         </p:spPr>
@@ -7248,44 +7383,51 @@
           </a:fontRef>
         </p:style>
         <p:txBody>
-          <a:bodyPr rtlCol="0" anchor="ctr" wrap="square" lIns="38100" rIns="38100" tIns="25400" bIns="12700"/>
-          <a:lstStyle/>
-          <a:p>
-            <a:pPr algn="ctr"/>
-            <a:r>
-              <a:rPr sz="800" b="1">
+          <a:bodyPr rtlCol="0" anchor="ctr" wrap="square" lIns="50800" rIns="50800" tIns="38100" bIns="25400"/>
+          <a:lstStyle/>
+          <a:p>
+            <a:pPr algn="ctr">
+              <a:spcBef>
+                <a:spcPts val="0"/>
+              </a:spcBef>
+              <a:spcAft>
+                <a:spcPts val="100"/>
+              </a:spcAft>
+            </a:pPr>
+            <a:r>
+              <a:rPr sz="900" b="1">
                 <a:solidFill>
                   <a:srgbClr val="FFFFFF"/>
                 </a:solidFill>
                 <a:latin typeface="Calibri"/>
               </a:rPr>
-              <a:t>Reconciliation</a:t>
-            </a:r>
-          </a:p>
-        </p:txBody>
-      </p:sp>
-      <p:sp>
-        <p:nvSpPr>
-          <p:cNvPr id="94" name="Rounded Rectangle 93"/>
+              <a:t>CC / Loan events</a:t>
+            </a:r>
+          </a:p>
+        </p:txBody>
+      </p:sp>
+      <p:sp>
+        <p:nvSpPr>
+          <p:cNvPr id="75" name="Rounded Rectangle 74"/>
           <p:cNvSpPr/>
           <p:nvPr/>
         </p:nvSpPr>
         <p:spPr>
           <a:xfrm>
-            <a:off x="1005840" y="4133088"/>
-            <a:ext cx="1737360" cy="237744"/>
+            <a:off x="10972800" y="1865376"/>
+            <a:ext cx="932688" cy="640080"/>
           </a:xfrm>
           <a:prstGeom prst="roundRect">
             <a:avLst>
-              <a:gd name="adj" fmla="val 15000"/>
+              <a:gd name="adj" fmla="val 12000"/>
             </a:avLst>
           </a:prstGeom>
           <a:solidFill>
-            <a:srgbClr val="2E86AB"/>
+            <a:srgbClr val="2A557A"/>
           </a:solidFill>
           <a:ln w="9525">
             <a:solidFill>
-              <a:srgbClr val="5DAEE2"/>
+              <a:srgbClr val="4A7AA8"/>
             </a:solidFill>
           </a:ln>
         </p:spPr>
@@ -7304,44 +7446,51 @@
           </a:fontRef>
         </p:style>
         <p:txBody>
-          <a:bodyPr rtlCol="0" anchor="ctr" wrap="square" lIns="38100" rIns="38100" tIns="25400" bIns="12700"/>
-          <a:lstStyle/>
-          <a:p>
-            <a:pPr algn="ctr"/>
-            <a:r>
-              <a:rPr sz="800" b="1">
+          <a:bodyPr rtlCol="0" anchor="ctr" wrap="square" lIns="50800" rIns="50800" tIns="38100" bIns="25400"/>
+          <a:lstStyle/>
+          <a:p>
+            <a:pPr algn="ctr">
+              <a:spcBef>
+                <a:spcPts val="0"/>
+              </a:spcBef>
+              <a:spcAft>
+                <a:spcPts val="100"/>
+              </a:spcAft>
+            </a:pPr>
+            <a:r>
+              <a:rPr sz="900" b="1">
                 <a:solidFill>
                   <a:srgbClr val="FFFFFF"/>
                 </a:solidFill>
                 <a:latin typeface="Calibri"/>
               </a:rPr>
-              <a:t>Accounting Rules</a:t>
-            </a:r>
-          </a:p>
-        </p:txBody>
-      </p:sp>
-      <p:sp>
-        <p:nvSpPr>
-          <p:cNvPr id="95" name="Rounded Rectangle 94"/>
+              <a:t>Idempotent ingest</a:t>
+            </a:r>
+          </a:p>
+        </p:txBody>
+      </p:sp>
+      <p:sp>
+        <p:nvSpPr>
+          <p:cNvPr id="76" name="Rounded Rectangle 75"/>
           <p:cNvSpPr/>
           <p:nvPr/>
         </p:nvSpPr>
         <p:spPr>
           <a:xfrm>
-            <a:off x="2816352" y="4133088"/>
-            <a:ext cx="1737360" cy="237744"/>
+            <a:off x="10972800" y="2615184"/>
+            <a:ext cx="932688" cy="640080"/>
           </a:xfrm>
           <a:prstGeom prst="roundRect">
             <a:avLst>
-              <a:gd name="adj" fmla="val 15000"/>
+              <a:gd name="adj" fmla="val 12000"/>
             </a:avLst>
           </a:prstGeom>
           <a:solidFill>
-            <a:srgbClr val="2E86AB"/>
+            <a:srgbClr val="2A557A"/>
           </a:solidFill>
           <a:ln w="9525">
             <a:solidFill>
-              <a:srgbClr val="5DAEE2"/>
+              <a:srgbClr val="4A7AA8"/>
             </a:solidFill>
           </a:ln>
         </p:spPr>
@@ -7360,44 +7509,51 @@
           </a:fontRef>
         </p:style>
         <p:txBody>
-          <a:bodyPr rtlCol="0" anchor="ctr" wrap="square" lIns="38100" rIns="38100" tIns="25400" bIns="12700"/>
-          <a:lstStyle/>
-          <a:p>
-            <a:pPr algn="ctr"/>
-            <a:r>
-              <a:rPr sz="800" b="1">
+          <a:bodyPr rtlCol="0" anchor="ctr" wrap="square" lIns="50800" rIns="50800" tIns="38100" bIns="25400"/>
+          <a:lstStyle/>
+          <a:p>
+            <a:pPr algn="ctr">
+              <a:spcBef>
+                <a:spcPts val="0"/>
+              </a:spcBef>
+              <a:spcAft>
+                <a:spcPts val="100"/>
+              </a:spcAft>
+            </a:pPr>
+            <a:r>
+              <a:rPr sz="900" b="1">
                 <a:solidFill>
                   <a:srgbClr val="FFFFFF"/>
                 </a:solidFill>
                 <a:latin typeface="Calibri"/>
               </a:rPr>
-              <a:t>Burn Engine</a:t>
-            </a:r>
-          </a:p>
-        </p:txBody>
-      </p:sp>
-      <p:sp>
-        <p:nvSpPr>
-          <p:cNvPr id="96" name="Rounded Rectangle 95"/>
+              <a:t>Balance updated</a:t>
+            </a:r>
+          </a:p>
+        </p:txBody>
+      </p:sp>
+      <p:sp>
+        <p:nvSpPr>
+          <p:cNvPr id="77" name="Rounded Rectangle 76"/>
           <p:cNvSpPr/>
           <p:nvPr/>
         </p:nvSpPr>
         <p:spPr>
           <a:xfrm>
-            <a:off x="4626864" y="4133088"/>
-            <a:ext cx="1737360" cy="237744"/>
+            <a:off x="10972800" y="3364992"/>
+            <a:ext cx="932688" cy="640080"/>
           </a:xfrm>
           <a:prstGeom prst="roundRect">
             <a:avLst>
-              <a:gd name="adj" fmla="val 15000"/>
+              <a:gd name="adj" fmla="val 12000"/>
             </a:avLst>
           </a:prstGeom>
           <a:solidFill>
-            <a:srgbClr val="2E86AB"/>
+            <a:srgbClr val="2A557A"/>
           </a:solidFill>
           <a:ln w="9525">
             <a:solidFill>
-              <a:srgbClr val="5DAEE2"/>
+              <a:srgbClr val="4A7AA8"/>
             </a:solidFill>
           </a:ln>
         </p:spPr>
@@ -7416,44 +7572,51 @@
           </a:fontRef>
         </p:style>
         <p:txBody>
-          <a:bodyPr rtlCol="0" anchor="ctr" wrap="square" lIns="38100" rIns="38100" tIns="25400" bIns="12700"/>
-          <a:lstStyle/>
-          <a:p>
-            <a:pPr algn="ctr"/>
-            <a:r>
-              <a:rPr sz="800" b="1">
+          <a:bodyPr rtlCol="0" anchor="ctr" wrap="square" lIns="50800" rIns="50800" tIns="38100" bIns="25400"/>
+          <a:lstStyle/>
+          <a:p>
+            <a:pPr algn="ctr">
+              <a:spcBef>
+                <a:spcPts val="0"/>
+              </a:spcBef>
+              <a:spcAft>
+                <a:spcPts val="100"/>
+              </a:spcAft>
+            </a:pPr>
+            <a:r>
+              <a:rPr sz="900" b="1">
                 <a:solidFill>
                   <a:srgbClr val="FFFFFF"/>
                 </a:solidFill>
                 <a:latin typeface="Calibri"/>
               </a:rPr>
-              <a:t>Rule Configurator</a:t>
-            </a:r>
-          </a:p>
-        </p:txBody>
-      </p:sp>
-      <p:sp>
-        <p:nvSpPr>
-          <p:cNvPr id="97" name="Rounded Rectangle 96"/>
+              <a:t>Issue-coupon intent</a:t>
+            </a:r>
+          </a:p>
+        </p:txBody>
+      </p:sp>
+      <p:sp>
+        <p:nvSpPr>
+          <p:cNvPr id="78" name="Rounded Rectangle 77"/>
           <p:cNvSpPr/>
           <p:nvPr/>
         </p:nvSpPr>
         <p:spPr>
           <a:xfrm>
-            <a:off x="6437376" y="4133088"/>
-            <a:ext cx="1737360" cy="237744"/>
+            <a:off x="10972800" y="4114800"/>
+            <a:ext cx="932688" cy="640080"/>
           </a:xfrm>
           <a:prstGeom prst="roundRect">
             <a:avLst>
-              <a:gd name="adj" fmla="val 15000"/>
+              <a:gd name="adj" fmla="val 12000"/>
             </a:avLst>
           </a:prstGeom>
           <a:solidFill>
-            <a:srgbClr val="2E86AB"/>
+            <a:srgbClr val="2A557A"/>
           </a:solidFill>
           <a:ln w="9525">
             <a:solidFill>
-              <a:srgbClr val="5DAEE2"/>
+              <a:srgbClr val="4A7AA8"/>
             </a:solidFill>
           </a:ln>
         </p:spPr>
@@ -7472,44 +7635,51 @@
           </a:fontRef>
         </p:style>
         <p:txBody>
-          <a:bodyPr rtlCol="0" anchor="ctr" wrap="square" lIns="38100" rIns="38100" tIns="25400" bIns="12700"/>
-          <a:lstStyle/>
-          <a:p>
-            <a:pPr algn="ctr"/>
-            <a:r>
-              <a:rPr sz="800" b="1">
+          <a:bodyPr rtlCol="0" anchor="ctr" wrap="square" lIns="50800" rIns="50800" tIns="38100" bIns="25400"/>
+          <a:lstStyle/>
+          <a:p>
+            <a:pPr algn="ctr">
+              <a:spcBef>
+                <a:spcPts val="0"/>
+              </a:spcBef>
+              <a:spcAft>
+                <a:spcPts val="100"/>
+              </a:spcAft>
+            </a:pPr>
+            <a:r>
+              <a:rPr sz="900" b="1">
                 <a:solidFill>
                   <a:srgbClr val="FFFFFF"/>
                 </a:solidFill>
                 <a:latin typeface="Calibri"/>
               </a:rPr>
-              <a:t>Referrer Mgmt</a:t>
-            </a:r>
-          </a:p>
-        </p:txBody>
-      </p:sp>
-      <p:sp>
-        <p:nvSpPr>
-          <p:cNvPr id="98" name="Rounded Rectangle 97"/>
+              <a:t>Use-coupon intent</a:t>
+            </a:r>
+          </a:p>
+        </p:txBody>
+      </p:sp>
+      <p:sp>
+        <p:nvSpPr>
+          <p:cNvPr id="79" name="Rounded Rectangle 78"/>
           <p:cNvSpPr/>
           <p:nvPr/>
         </p:nvSpPr>
         <p:spPr>
           <a:xfrm>
-            <a:off x="8247888" y="4133088"/>
-            <a:ext cx="1737360" cy="237744"/>
+            <a:off x="10972800" y="4864608"/>
+            <a:ext cx="932688" cy="640080"/>
           </a:xfrm>
           <a:prstGeom prst="roundRect">
             <a:avLst>
-              <a:gd name="adj" fmla="val 15000"/>
+              <a:gd name="adj" fmla="val 12000"/>
             </a:avLst>
           </a:prstGeom>
           <a:solidFill>
-            <a:srgbClr val="2E86AB"/>
+            <a:srgbClr val="2A557A"/>
           </a:solidFill>
           <a:ln w="9525">
             <a:solidFill>
-              <a:srgbClr val="5DAEE2"/>
+              <a:srgbClr val="4A7AA8"/>
             </a:solidFill>
           </a:ln>
         </p:spPr>
@@ -7528,44 +7698,51 @@
           </a:fontRef>
         </p:style>
         <p:txBody>
-          <a:bodyPr rtlCol="0" anchor="ctr" wrap="square" lIns="38100" rIns="38100" tIns="25400" bIns="12700"/>
-          <a:lstStyle/>
-          <a:p>
-            <a:pPr algn="ctr"/>
-            <a:r>
-              <a:rPr sz="800" b="1">
+          <a:bodyPr rtlCol="0" anchor="ctr" wrap="square" lIns="50800" rIns="50800" tIns="38100" bIns="25400"/>
+          <a:lstStyle/>
+          <a:p>
+            <a:pPr algn="ctr">
+              <a:spcBef>
+                <a:spcPts val="0"/>
+              </a:spcBef>
+              <a:spcAft>
+                <a:spcPts val="100"/>
+              </a:spcAft>
+            </a:pPr>
+            <a:r>
+              <a:rPr sz="900" b="1">
                 <a:solidFill>
                   <a:srgbClr val="FFFFFF"/>
                 </a:solidFill>
                 <a:latin typeface="Calibri"/>
               </a:rPr>
-              <a:t>Audit Trail</a:t>
-            </a:r>
-          </a:p>
-        </p:txBody>
-      </p:sp>
-      <p:sp>
-        <p:nvSpPr>
-          <p:cNvPr id="99" name="Rounded Rectangle 98"/>
+              <a:t>Redeemable list</a:t>
+            </a:r>
+          </a:p>
+        </p:txBody>
+      </p:sp>
+      <p:sp>
+        <p:nvSpPr>
+          <p:cNvPr id="80" name="Rounded Rectangle 79"/>
           <p:cNvSpPr/>
           <p:nvPr/>
         </p:nvSpPr>
         <p:spPr>
           <a:xfrm>
-            <a:off x="1005840" y="4416552"/>
-            <a:ext cx="1737360" cy="237744"/>
+            <a:off x="10972800" y="5614416"/>
+            <a:ext cx="932688" cy="640080"/>
           </a:xfrm>
           <a:prstGeom prst="roundRect">
             <a:avLst>
-              <a:gd name="adj" fmla="val 15000"/>
+              <a:gd name="adj" fmla="val 12000"/>
             </a:avLst>
           </a:prstGeom>
           <a:solidFill>
-            <a:srgbClr val="2E86AB"/>
+            <a:srgbClr val="2A557A"/>
           </a:solidFill>
           <a:ln w="9525">
             <a:solidFill>
-              <a:srgbClr val="5DAEE2"/>
+              <a:srgbClr val="4A7AA8"/>
             </a:solidFill>
           </a:ln>
         </p:spPr>
@@ -7584,2466 +7761,25 @@
           </a:fontRef>
         </p:style>
         <p:txBody>
-          <a:bodyPr rtlCol="0" anchor="ctr" wrap="square" lIns="38100" rIns="38100" tIns="25400" bIns="12700"/>
-          <a:lstStyle/>
-          <a:p>
-            <a:pPr algn="ctr"/>
-            <a:r>
-              <a:rPr sz="800" b="1">
+          <a:bodyPr rtlCol="0" anchor="ctr" wrap="square" lIns="50800" rIns="50800" tIns="38100" bIns="25400"/>
+          <a:lstStyle/>
+          <a:p>
+            <a:pPr algn="ctr">
+              <a:spcBef>
+                <a:spcPts val="0"/>
+              </a:spcBef>
+              <a:spcAft>
+                <a:spcPts val="100"/>
+              </a:spcAft>
+            </a:pPr>
+            <a:r>
+              <a:rPr sz="900" b="1">
                 <a:solidFill>
                   <a:srgbClr val="FFFFFF"/>
                 </a:solidFill>
                 <a:latin typeface="Calibri"/>
               </a:rPr>
-              <a:t>Idempotency Queue</a:t>
-            </a:r>
-          </a:p>
-        </p:txBody>
-      </p:sp>
-      <p:sp>
-        <p:nvSpPr>
-          <p:cNvPr id="100" name="Rounded Rectangle 99"/>
-          <p:cNvSpPr/>
-          <p:nvPr/>
-        </p:nvSpPr>
-        <p:spPr>
-          <a:xfrm>
-            <a:off x="2816352" y="4416552"/>
-            <a:ext cx="1737360" cy="237744"/>
-          </a:xfrm>
-          <a:prstGeom prst="roundRect">
-            <a:avLst>
-              <a:gd name="adj" fmla="val 15000"/>
-            </a:avLst>
-          </a:prstGeom>
-          <a:solidFill>
-            <a:srgbClr val="2E86AB"/>
-          </a:solidFill>
-          <a:ln w="9525">
-            <a:solidFill>
-              <a:srgbClr val="5DAEE2"/>
-            </a:solidFill>
-          </a:ln>
-        </p:spPr>
-        <p:style>
-          <a:lnRef idx="1">
-            <a:schemeClr val="accent1"/>
-          </a:lnRef>
-          <a:fillRef idx="3">
-            <a:schemeClr val="accent1"/>
-          </a:fillRef>
-          <a:effectRef idx="2">
-            <a:schemeClr val="accent1"/>
-          </a:effectRef>
-          <a:fontRef idx="minor">
-            <a:schemeClr val="lt1"/>
-          </a:fontRef>
-        </p:style>
-        <p:txBody>
-          <a:bodyPr rtlCol="0" anchor="ctr" wrap="square" lIns="38100" rIns="38100" tIns="25400" bIns="12700"/>
-          <a:lstStyle/>
-          <a:p>
-            <a:pPr algn="ctr"/>
-            <a:r>
-              <a:rPr sz="800" b="1">
-                <a:solidFill>
-                  <a:srgbClr val="FFFFFF"/>
-                </a:solidFill>
-                <a:latin typeface="Calibri"/>
-              </a:rPr>
-              <a:t>Wallet Tiering</a:t>
-            </a:r>
-          </a:p>
-        </p:txBody>
-      </p:sp>
-      <p:sp>
-        <p:nvSpPr>
-          <p:cNvPr id="101" name="Rounded Rectangle 100"/>
-          <p:cNvSpPr/>
-          <p:nvPr/>
-        </p:nvSpPr>
-        <p:spPr>
-          <a:xfrm>
-            <a:off x="4626864" y="4416552"/>
-            <a:ext cx="1737360" cy="237744"/>
-          </a:xfrm>
-          <a:prstGeom prst="roundRect">
-            <a:avLst>
-              <a:gd name="adj" fmla="val 15000"/>
-            </a:avLst>
-          </a:prstGeom>
-          <a:solidFill>
-            <a:srgbClr val="2E86AB"/>
-          </a:solidFill>
-          <a:ln w="9525">
-            <a:solidFill>
-              <a:srgbClr val="5DAEE2"/>
-            </a:solidFill>
-          </a:ln>
-        </p:spPr>
-        <p:style>
-          <a:lnRef idx="1">
-            <a:schemeClr val="accent1"/>
-          </a:lnRef>
-          <a:fillRef idx="3">
-            <a:schemeClr val="accent1"/>
-          </a:fillRef>
-          <a:effectRef idx="2">
-            <a:schemeClr val="accent1"/>
-          </a:effectRef>
-          <a:fontRef idx="minor">
-            <a:schemeClr val="lt1"/>
-          </a:fontRef>
-        </p:style>
-        <p:txBody>
-          <a:bodyPr rtlCol="0" anchor="ctr" wrap="square" lIns="38100" rIns="38100" tIns="25400" bIns="12700"/>
-          <a:lstStyle/>
-          <a:p>
-            <a:pPr algn="ctr"/>
-            <a:r>
-              <a:rPr sz="800" b="1">
-                <a:solidFill>
-                  <a:srgbClr val="FFFFFF"/>
-                </a:solidFill>
-                <a:latin typeface="Calibri"/>
-              </a:rPr>
-              <a:t>Balance Reversal</a:t>
-            </a:r>
-          </a:p>
-        </p:txBody>
-      </p:sp>
-      <p:sp>
-        <p:nvSpPr>
-          <p:cNvPr id="102" name="Rounded Rectangle 101"/>
-          <p:cNvSpPr/>
-          <p:nvPr/>
-        </p:nvSpPr>
-        <p:spPr>
-          <a:xfrm>
-            <a:off x="6437376" y="4416552"/>
-            <a:ext cx="1737360" cy="237744"/>
-          </a:xfrm>
-          <a:prstGeom prst="roundRect">
-            <a:avLst>
-              <a:gd name="adj" fmla="val 15000"/>
-            </a:avLst>
-          </a:prstGeom>
-          <a:solidFill>
-            <a:srgbClr val="2E86AB"/>
-          </a:solidFill>
-          <a:ln w="9525">
-            <a:solidFill>
-              <a:srgbClr val="5DAEE2"/>
-            </a:solidFill>
-          </a:ln>
-        </p:spPr>
-        <p:style>
-          <a:lnRef idx="1">
-            <a:schemeClr val="accent1"/>
-          </a:lnRef>
-          <a:fillRef idx="3">
-            <a:schemeClr val="accent1"/>
-          </a:fillRef>
-          <a:effectRef idx="2">
-            <a:schemeClr val="accent1"/>
-          </a:effectRef>
-          <a:fontRef idx="minor">
-            <a:schemeClr val="lt1"/>
-          </a:fontRef>
-        </p:style>
-        <p:txBody>
-          <a:bodyPr rtlCol="0" anchor="ctr" wrap="square" lIns="38100" rIns="38100" tIns="25400" bIns="12700"/>
-          <a:lstStyle/>
-          <a:p>
-            <a:pPr algn="ctr"/>
-            <a:r>
-              <a:rPr sz="800" b="1">
-                <a:solidFill>
-                  <a:srgbClr val="FFFFFF"/>
-                </a:solidFill>
-                <a:latin typeface="Calibri"/>
-              </a:rPr>
-              <a:t>Balance Adjustment</a:t>
-            </a:r>
-          </a:p>
-        </p:txBody>
-      </p:sp>
-      <p:sp>
-        <p:nvSpPr>
-          <p:cNvPr id="103" name="Rounded Rectangle 102"/>
-          <p:cNvSpPr/>
-          <p:nvPr/>
-        </p:nvSpPr>
-        <p:spPr>
-          <a:xfrm>
-            <a:off x="8247888" y="4416552"/>
-            <a:ext cx="1737360" cy="237744"/>
-          </a:xfrm>
-          <a:prstGeom prst="roundRect">
-            <a:avLst>
-              <a:gd name="adj" fmla="val 15000"/>
-            </a:avLst>
-          </a:prstGeom>
-          <a:solidFill>
-            <a:srgbClr val="2E86AB"/>
-          </a:solidFill>
-          <a:ln w="9525">
-            <a:solidFill>
-              <a:srgbClr val="5DAEE2"/>
-            </a:solidFill>
-          </a:ln>
-        </p:spPr>
-        <p:style>
-          <a:lnRef idx="1">
-            <a:schemeClr val="accent1"/>
-          </a:lnRef>
-          <a:fillRef idx="3">
-            <a:schemeClr val="accent1"/>
-          </a:fillRef>
-          <a:effectRef idx="2">
-            <a:schemeClr val="accent1"/>
-          </a:effectRef>
-          <a:fontRef idx="minor">
-            <a:schemeClr val="lt1"/>
-          </a:fontRef>
-        </p:style>
-        <p:txBody>
-          <a:bodyPr rtlCol="0" anchor="ctr" wrap="square" lIns="38100" rIns="38100" tIns="25400" bIns="12700"/>
-          <a:lstStyle/>
-          <a:p>
-            <a:pPr algn="ctr"/>
-            <a:r>
-              <a:rPr sz="800" b="1">
-                <a:solidFill>
-                  <a:srgbClr val="FFFFFF"/>
-                </a:solidFill>
-                <a:latin typeface="Calibri"/>
-              </a:rPr>
-              <a:t>Statement</a:t>
-            </a:r>
-          </a:p>
-        </p:txBody>
-      </p:sp>
-      <p:sp>
-        <p:nvSpPr>
-          <p:cNvPr id="104" name="Rectangle 103"/>
-          <p:cNvSpPr/>
-          <p:nvPr/>
-        </p:nvSpPr>
-        <p:spPr>
-          <a:xfrm>
-            <a:off x="804672" y="4736592"/>
-            <a:ext cx="9646920" cy="1078992"/>
-          </a:xfrm>
-          <a:prstGeom prst="rect">
-            <a:avLst/>
-          </a:prstGeom>
-          <a:solidFill>
-            <a:srgbClr val="EAF7F0"/>
-          </a:solidFill>
-          <a:ln w="9525">
-            <a:solidFill>
-              <a:srgbClr val="BFC9CA"/>
-            </a:solidFill>
-          </a:ln>
-        </p:spPr>
-        <p:style>
-          <a:lnRef idx="1">
-            <a:schemeClr val="accent1"/>
-          </a:lnRef>
-          <a:fillRef idx="3">
-            <a:schemeClr val="accent1"/>
-          </a:fillRef>
-          <a:effectRef idx="2">
-            <a:schemeClr val="accent1"/>
-          </a:effectRef>
-          <a:fontRef idx="minor">
-            <a:schemeClr val="lt1"/>
-          </a:fontRef>
-        </p:style>
-        <p:txBody>
-          <a:bodyPr rtlCol="0" anchor="ctr"/>
-          <a:lstStyle/>
-          <a:p>
-            <a:pPr algn="ctr"/>
-          </a:p>
-        </p:txBody>
-      </p:sp>
-      <p:sp>
-        <p:nvSpPr>
-          <p:cNvPr id="105" name="Rectangle 104"/>
-          <p:cNvSpPr/>
-          <p:nvPr/>
-        </p:nvSpPr>
-        <p:spPr>
-          <a:xfrm>
-            <a:off x="109728" y="4736592"/>
-            <a:ext cx="640080" cy="1078992"/>
-          </a:xfrm>
-          <a:prstGeom prst="rect">
-            <a:avLst/>
-          </a:prstGeom>
-          <a:solidFill>
-            <a:srgbClr val="EAF7F0"/>
-          </a:solidFill>
-          <a:ln w="9525">
-            <a:solidFill>
-              <a:srgbClr val="BFC9CA"/>
-            </a:solidFill>
-          </a:ln>
-        </p:spPr>
-        <p:style>
-          <a:lnRef idx="1">
-            <a:schemeClr val="accent1"/>
-          </a:lnRef>
-          <a:fillRef idx="3">
-            <a:schemeClr val="accent1"/>
-          </a:fillRef>
-          <a:effectRef idx="2">
-            <a:schemeClr val="accent1"/>
-          </a:effectRef>
-          <a:fontRef idx="minor">
-            <a:schemeClr val="lt1"/>
-          </a:fontRef>
-        </p:style>
-        <p:txBody>
-          <a:bodyPr rtlCol="0" anchor="ctr"/>
-          <a:lstStyle/>
-          <a:p>
-            <a:pPr algn="ctr"/>
-          </a:p>
-        </p:txBody>
-      </p:sp>
-      <p:sp>
-        <p:nvSpPr>
-          <p:cNvPr id="106" name="TextBox 105"/>
-          <p:cNvSpPr txBox="1"/>
-          <p:nvPr/>
-        </p:nvSpPr>
-        <p:spPr>
-          <a:xfrm>
-            <a:off x="128016" y="4791456"/>
-            <a:ext cx="603504" cy="329184"/>
-          </a:xfrm>
-          <a:prstGeom prst="rect">
-            <a:avLst/>
-          </a:prstGeom>
-          <a:noFill/>
-        </p:spPr>
-        <p:txBody>
-          <a:bodyPr wrap="square" lIns="25400" rIns="25400" tIns="0" bIns="0">
-            <a:spAutoFit/>
-          </a:bodyPr>
-          <a:lstStyle/>
-          <a:p>
-            <a:pPr algn="ctr"/>
-            <a:r>
-              <a:rPr sz="800" b="1">
-                <a:solidFill>
-                  <a:srgbClr val="1B4F72"/>
-                </a:solidFill>
-                <a:latin typeface="Calibri"/>
-              </a:rPr>
-              <a:t>05
-Fulfill</a:t>
-            </a:r>
-          </a:p>
-        </p:txBody>
-      </p:sp>
-      <p:sp>
-        <p:nvSpPr>
-          <p:cNvPr id="107" name="TextBox 106"/>
-          <p:cNvSpPr txBox="1"/>
-          <p:nvPr/>
-        </p:nvSpPr>
-        <p:spPr>
-          <a:xfrm>
-            <a:off x="128016" y="5102352"/>
-            <a:ext cx="603504" cy="365760"/>
-          </a:xfrm>
-          <a:prstGeom prst="rect">
-            <a:avLst/>
-          </a:prstGeom>
-          <a:noFill/>
-        </p:spPr>
-        <p:txBody>
-          <a:bodyPr wrap="square" lIns="25400" rIns="25400" tIns="0" bIns="0">
-            <a:spAutoFit/>
-          </a:bodyPr>
-          <a:lstStyle/>
-          <a:p>
-            <a:pPr algn="ctr"/>
-            <a:r>
-              <a:rPr sz="700" b="0">
-                <a:solidFill>
-                  <a:srgbClr val="7F8C8D"/>
-                </a:solidFill>
-                <a:latin typeface="Calibri"/>
-              </a:rPr>
-              <a:t>CRP</a:t>
-            </a:r>
-          </a:p>
-        </p:txBody>
-      </p:sp>
-      <p:sp>
-        <p:nvSpPr>
-          <p:cNvPr id="108" name="Rounded Rectangle 107"/>
-          <p:cNvSpPr/>
-          <p:nvPr/>
-        </p:nvSpPr>
-        <p:spPr>
-          <a:xfrm>
-            <a:off x="896112" y="4791456"/>
-            <a:ext cx="9464040" cy="969264"/>
-          </a:xfrm>
-          <a:prstGeom prst="roundRect">
-            <a:avLst>
-              <a:gd name="adj" fmla="val 4000"/>
-            </a:avLst>
-          </a:prstGeom>
-          <a:solidFill>
-            <a:srgbClr val="FFFFFF"/>
-          </a:solidFill>
-          <a:ln w="14604">
-            <a:solidFill>
-              <a:srgbClr val="1E8449"/>
-            </a:solidFill>
-          </a:ln>
-        </p:spPr>
-        <p:style>
-          <a:lnRef idx="1">
-            <a:schemeClr val="accent1"/>
-          </a:lnRef>
-          <a:fillRef idx="3">
-            <a:schemeClr val="accent1"/>
-          </a:fillRef>
-          <a:effectRef idx="2">
-            <a:schemeClr val="accent1"/>
-          </a:effectRef>
-          <a:fontRef idx="minor">
-            <a:schemeClr val="lt1"/>
-          </a:fontRef>
-        </p:style>
-        <p:txBody>
-          <a:bodyPr rtlCol="0" anchor="ctr"/>
-          <a:lstStyle/>
-          <a:p>
-            <a:pPr algn="ctr"/>
-          </a:p>
-        </p:txBody>
-      </p:sp>
-      <p:sp>
-        <p:nvSpPr>
-          <p:cNvPr id="109" name="TextBox 108"/>
-          <p:cNvSpPr txBox="1"/>
-          <p:nvPr/>
-        </p:nvSpPr>
-        <p:spPr>
-          <a:xfrm>
-            <a:off x="1005840" y="4809744"/>
-            <a:ext cx="8686800" cy="164592"/>
-          </a:xfrm>
-          <a:prstGeom prst="rect">
-            <a:avLst/>
-          </a:prstGeom>
-          <a:noFill/>
-        </p:spPr>
-        <p:txBody>
-          <a:bodyPr wrap="square" lIns="25400" rIns="25400" tIns="0" bIns="0">
-            <a:spAutoFit/>
-          </a:bodyPr>
-          <a:lstStyle/>
-          <a:p>
-            <a:pPr algn="l"/>
-            <a:r>
-              <a:rPr sz="1000" b="1">
-                <a:solidFill>
-                  <a:srgbClr val="14532D"/>
-                </a:solidFill>
-                <a:latin typeface="Calibri"/>
-              </a:rPr>
-              <a:t>CRP  ·  Centralized Redemption Platform     UAF-owned coupon control plane</a:t>
-            </a:r>
-          </a:p>
-        </p:txBody>
-      </p:sp>
-      <p:sp>
-        <p:nvSpPr>
-          <p:cNvPr id="110" name="TextBox 109"/>
-          <p:cNvSpPr txBox="1"/>
-          <p:nvPr/>
-        </p:nvSpPr>
-        <p:spPr>
-          <a:xfrm>
-            <a:off x="1005840" y="4974336"/>
-            <a:ext cx="8961120" cy="128016"/>
-          </a:xfrm>
-          <a:prstGeom prst="rect">
-            <a:avLst/>
-          </a:prstGeom>
-          <a:noFill/>
-        </p:spPr>
-        <p:txBody>
-          <a:bodyPr wrap="square" lIns="25400" rIns="25400" tIns="0" bIns="0">
-            <a:spAutoFit/>
-          </a:bodyPr>
-          <a:lstStyle/>
-          <a:p>
-            <a:pPr algn="l"/>
-            <a:r>
-              <a:rPr sz="800" b="0">
-                <a:solidFill>
-                  <a:srgbClr val="7F8C8D"/>
-                </a:solidFill>
-                <a:latin typeface="Calibri"/>
-              </a:rPr>
-              <a:t>Cross-boundary verbs from RS:  Request to issue coupon  ·  Request to use coupon  ·  Retrieve redeemable list</a:t>
-            </a:r>
-          </a:p>
-        </p:txBody>
-      </p:sp>
-      <p:sp>
-        <p:nvSpPr>
-          <p:cNvPr id="111" name="Rounded Rectangle 110"/>
-          <p:cNvSpPr/>
-          <p:nvPr/>
-        </p:nvSpPr>
-        <p:spPr>
-          <a:xfrm>
-            <a:off x="1005840" y="5157216"/>
-            <a:ext cx="1243584" cy="237744"/>
-          </a:xfrm>
-          <a:prstGeom prst="roundRect">
-            <a:avLst>
-              <a:gd name="adj" fmla="val 15000"/>
-            </a:avLst>
-          </a:prstGeom>
-          <a:solidFill>
-            <a:srgbClr val="D5F5E3"/>
-          </a:solidFill>
-          <a:ln w="9525">
-            <a:solidFill>
-              <a:srgbClr val="58D68D"/>
-            </a:solidFill>
-          </a:ln>
-        </p:spPr>
-        <p:style>
-          <a:lnRef idx="1">
-            <a:schemeClr val="accent1"/>
-          </a:lnRef>
-          <a:fillRef idx="3">
-            <a:schemeClr val="accent1"/>
-          </a:fillRef>
-          <a:effectRef idx="2">
-            <a:schemeClr val="accent1"/>
-          </a:effectRef>
-          <a:fontRef idx="minor">
-            <a:schemeClr val="lt1"/>
-          </a:fontRef>
-        </p:style>
-        <p:txBody>
-          <a:bodyPr rtlCol="0" anchor="ctr" wrap="square" lIns="38100" rIns="38100" tIns="25400" bIns="12700"/>
-          <a:lstStyle/>
-          <a:p>
-            <a:pPr algn="ctr"/>
-            <a:r>
-              <a:rPr sz="700" b="1">
-                <a:solidFill>
-                  <a:srgbClr val="14532D"/>
-                </a:solidFill>
-                <a:latin typeface="Calibri"/>
-              </a:rPr>
-              <a:t>Coupon Validation</a:t>
-            </a:r>
-          </a:p>
-        </p:txBody>
-      </p:sp>
-      <p:sp>
-        <p:nvSpPr>
-          <p:cNvPr id="112" name="Rounded Rectangle 111"/>
-          <p:cNvSpPr/>
-          <p:nvPr/>
-        </p:nvSpPr>
-        <p:spPr>
-          <a:xfrm>
-            <a:off x="2304288" y="5157216"/>
-            <a:ext cx="1243584" cy="237744"/>
-          </a:xfrm>
-          <a:prstGeom prst="roundRect">
-            <a:avLst>
-              <a:gd name="adj" fmla="val 15000"/>
-            </a:avLst>
-          </a:prstGeom>
-          <a:solidFill>
-            <a:srgbClr val="D5F5E3"/>
-          </a:solidFill>
-          <a:ln w="9525">
-            <a:solidFill>
-              <a:srgbClr val="58D68D"/>
-            </a:solidFill>
-          </a:ln>
-        </p:spPr>
-        <p:style>
-          <a:lnRef idx="1">
-            <a:schemeClr val="accent1"/>
-          </a:lnRef>
-          <a:fillRef idx="3">
-            <a:schemeClr val="accent1"/>
-          </a:fillRef>
-          <a:effectRef idx="2">
-            <a:schemeClr val="accent1"/>
-          </a:effectRef>
-          <a:fontRef idx="minor">
-            <a:schemeClr val="lt1"/>
-          </a:fontRef>
-        </p:style>
-        <p:txBody>
-          <a:bodyPr rtlCol="0" anchor="ctr" wrap="square" lIns="38100" rIns="38100" tIns="25400" bIns="12700"/>
-          <a:lstStyle/>
-          <a:p>
-            <a:pPr algn="ctr"/>
-            <a:r>
-              <a:rPr sz="700" b="1">
-                <a:solidFill>
-                  <a:srgbClr val="14532D"/>
-                </a:solidFill>
-                <a:latin typeface="Calibri"/>
-              </a:rPr>
-              <a:t>Inventory Mgmt</a:t>
-            </a:r>
-          </a:p>
-        </p:txBody>
-      </p:sp>
-      <p:sp>
-        <p:nvSpPr>
-          <p:cNvPr id="113" name="Rounded Rectangle 112"/>
-          <p:cNvSpPr/>
-          <p:nvPr/>
-        </p:nvSpPr>
-        <p:spPr>
-          <a:xfrm>
-            <a:off x="3602736" y="5157216"/>
-            <a:ext cx="1243584" cy="237744"/>
-          </a:xfrm>
-          <a:prstGeom prst="roundRect">
-            <a:avLst>
-              <a:gd name="adj" fmla="val 15000"/>
-            </a:avLst>
-          </a:prstGeom>
-          <a:solidFill>
-            <a:srgbClr val="D5F5E3"/>
-          </a:solidFill>
-          <a:ln w="9525">
-            <a:solidFill>
-              <a:srgbClr val="58D68D"/>
-            </a:solidFill>
-          </a:ln>
-        </p:spPr>
-        <p:style>
-          <a:lnRef idx="1">
-            <a:schemeClr val="accent1"/>
-          </a:lnRef>
-          <a:fillRef idx="3">
-            <a:schemeClr val="accent1"/>
-          </a:fillRef>
-          <a:effectRef idx="2">
-            <a:schemeClr val="accent1"/>
-          </a:effectRef>
-          <a:fontRef idx="minor">
-            <a:schemeClr val="lt1"/>
-          </a:fontRef>
-        </p:style>
-        <p:txBody>
-          <a:bodyPr rtlCol="0" anchor="ctr" wrap="square" lIns="38100" rIns="38100" tIns="25400" bIns="12700"/>
-          <a:lstStyle/>
-          <a:p>
-            <a:pPr algn="ctr"/>
-            <a:r>
-              <a:rPr sz="700" b="1">
-                <a:solidFill>
-                  <a:srgbClr val="14532D"/>
-                </a:solidFill>
-                <a:latin typeface="Calibri"/>
-              </a:rPr>
-              <a:t>Coupon Catalog</a:t>
-            </a:r>
-          </a:p>
-        </p:txBody>
-      </p:sp>
-      <p:sp>
-        <p:nvSpPr>
-          <p:cNvPr id="114" name="Rounded Rectangle 113"/>
-          <p:cNvSpPr/>
-          <p:nvPr/>
-        </p:nvSpPr>
-        <p:spPr>
-          <a:xfrm>
-            <a:off x="4901184" y="5157216"/>
-            <a:ext cx="1243584" cy="237744"/>
-          </a:xfrm>
-          <a:prstGeom prst="roundRect">
-            <a:avLst>
-              <a:gd name="adj" fmla="val 15000"/>
-            </a:avLst>
-          </a:prstGeom>
-          <a:solidFill>
-            <a:srgbClr val="D5F5E3"/>
-          </a:solidFill>
-          <a:ln w="9525">
-            <a:solidFill>
-              <a:srgbClr val="58D68D"/>
-            </a:solidFill>
-          </a:ln>
-        </p:spPr>
-        <p:style>
-          <a:lnRef idx="1">
-            <a:schemeClr val="accent1"/>
-          </a:lnRef>
-          <a:fillRef idx="3">
-            <a:schemeClr val="accent1"/>
-          </a:fillRef>
-          <a:effectRef idx="2">
-            <a:schemeClr val="accent1"/>
-          </a:effectRef>
-          <a:fontRef idx="minor">
-            <a:schemeClr val="lt1"/>
-          </a:fontRef>
-        </p:style>
-        <p:txBody>
-          <a:bodyPr rtlCol="0" anchor="ctr" wrap="square" lIns="38100" rIns="38100" tIns="25400" bIns="12700"/>
-          <a:lstStyle/>
-          <a:p>
-            <a:pPr algn="ctr"/>
-            <a:r>
-              <a:rPr sz="700" b="1">
-                <a:solidFill>
-                  <a:srgbClr val="14532D"/>
-                </a:solidFill>
-                <a:latin typeface="Calibri"/>
-              </a:rPr>
-              <a:t>Redemption Engine</a:t>
-            </a:r>
-          </a:p>
-        </p:txBody>
-      </p:sp>
-      <p:sp>
-        <p:nvSpPr>
-          <p:cNvPr id="115" name="Rounded Rectangle 114"/>
-          <p:cNvSpPr/>
-          <p:nvPr/>
-        </p:nvSpPr>
-        <p:spPr>
-          <a:xfrm>
-            <a:off x="6199632" y="5157216"/>
-            <a:ext cx="1243584" cy="237744"/>
-          </a:xfrm>
-          <a:prstGeom prst="roundRect">
-            <a:avLst>
-              <a:gd name="adj" fmla="val 15000"/>
-            </a:avLst>
-          </a:prstGeom>
-          <a:solidFill>
-            <a:srgbClr val="D5F5E3"/>
-          </a:solidFill>
-          <a:ln w="9525">
-            <a:solidFill>
-              <a:srgbClr val="58D68D"/>
-            </a:solidFill>
-          </a:ln>
-        </p:spPr>
-        <p:style>
-          <a:lnRef idx="1">
-            <a:schemeClr val="accent1"/>
-          </a:lnRef>
-          <a:fillRef idx="3">
-            <a:schemeClr val="accent1"/>
-          </a:fillRef>
-          <a:effectRef idx="2">
-            <a:schemeClr val="accent1"/>
-          </a:effectRef>
-          <a:fontRef idx="minor">
-            <a:schemeClr val="lt1"/>
-          </a:fontRef>
-        </p:style>
-        <p:txBody>
-          <a:bodyPr rtlCol="0" anchor="ctr" wrap="square" lIns="38100" rIns="38100" tIns="25400" bIns="12700"/>
-          <a:lstStyle/>
-          <a:p>
-            <a:pPr algn="ctr"/>
-            <a:r>
-              <a:rPr sz="700" b="1">
-                <a:solidFill>
-                  <a:srgbClr val="14532D"/>
-                </a:solidFill>
-                <a:latin typeface="Calibri"/>
-              </a:rPr>
-              <a:t>Code Generation</a:t>
-            </a:r>
-          </a:p>
-        </p:txBody>
-      </p:sp>
-      <p:sp>
-        <p:nvSpPr>
-          <p:cNvPr id="116" name="Rounded Rectangle 115"/>
-          <p:cNvSpPr/>
-          <p:nvPr/>
-        </p:nvSpPr>
-        <p:spPr>
-          <a:xfrm>
-            <a:off x="7498080" y="5157216"/>
-            <a:ext cx="1243584" cy="237744"/>
-          </a:xfrm>
-          <a:prstGeom prst="roundRect">
-            <a:avLst>
-              <a:gd name="adj" fmla="val 15000"/>
-            </a:avLst>
-          </a:prstGeom>
-          <a:solidFill>
-            <a:srgbClr val="D5F5E3"/>
-          </a:solidFill>
-          <a:ln w="9525">
-            <a:solidFill>
-              <a:srgbClr val="58D68D"/>
-            </a:solidFill>
-          </a:ln>
-        </p:spPr>
-        <p:style>
-          <a:lnRef idx="1">
-            <a:schemeClr val="accent1"/>
-          </a:lnRef>
-          <a:fillRef idx="3">
-            <a:schemeClr val="accent1"/>
-          </a:fillRef>
-          <a:effectRef idx="2">
-            <a:schemeClr val="accent1"/>
-          </a:effectRef>
-          <a:fontRef idx="minor">
-            <a:schemeClr val="lt1"/>
-          </a:fontRef>
-        </p:style>
-        <p:txBody>
-          <a:bodyPr rtlCol="0" anchor="ctr" wrap="square" lIns="38100" rIns="38100" tIns="25400" bIns="12700"/>
-          <a:lstStyle/>
-          <a:p>
-            <a:pPr algn="ctr"/>
-            <a:r>
-              <a:rPr sz="700" b="1">
-                <a:solidFill>
-                  <a:srgbClr val="14532D"/>
-                </a:solidFill>
-                <a:latin typeface="Calibri"/>
-              </a:rPr>
-              <a:t>Usage Reporting</a:t>
-            </a:r>
-          </a:p>
-        </p:txBody>
-      </p:sp>
-      <p:sp>
-        <p:nvSpPr>
-          <p:cNvPr id="117" name="Rounded Rectangle 116"/>
-          <p:cNvSpPr/>
-          <p:nvPr/>
-        </p:nvSpPr>
-        <p:spPr>
-          <a:xfrm>
-            <a:off x="8796528" y="5157216"/>
-            <a:ext cx="1243584" cy="237744"/>
-          </a:xfrm>
-          <a:prstGeom prst="roundRect">
-            <a:avLst>
-              <a:gd name="adj" fmla="val 15000"/>
-            </a:avLst>
-          </a:prstGeom>
-          <a:solidFill>
-            <a:srgbClr val="D5F5E3"/>
-          </a:solidFill>
-          <a:ln w="9525">
-            <a:solidFill>
-              <a:srgbClr val="58D68D"/>
-            </a:solidFill>
-          </a:ln>
-        </p:spPr>
-        <p:style>
-          <a:lnRef idx="1">
-            <a:schemeClr val="accent1"/>
-          </a:lnRef>
-          <a:fillRef idx="3">
-            <a:schemeClr val="accent1"/>
-          </a:fillRef>
-          <a:effectRef idx="2">
-            <a:schemeClr val="accent1"/>
-          </a:effectRef>
-          <a:fontRef idx="minor">
-            <a:schemeClr val="lt1"/>
-          </a:fontRef>
-        </p:style>
-        <p:txBody>
-          <a:bodyPr rtlCol="0" anchor="ctr" wrap="square" lIns="38100" rIns="38100" tIns="25400" bIns="12700"/>
-          <a:lstStyle/>
-          <a:p>
-            <a:pPr algn="ctr"/>
-            <a:r>
-              <a:rPr sz="700" b="1">
-                <a:solidFill>
-                  <a:srgbClr val="14532D"/>
-                </a:solidFill>
-                <a:latin typeface="Calibri"/>
-              </a:rPr>
-              <a:t>Vendor Mgmt</a:t>
-            </a:r>
-          </a:p>
-        </p:txBody>
-      </p:sp>
-      <p:sp>
-        <p:nvSpPr>
-          <p:cNvPr id="118" name="Rounded Rectangle 117"/>
-          <p:cNvSpPr/>
-          <p:nvPr/>
-        </p:nvSpPr>
-        <p:spPr>
-          <a:xfrm>
-            <a:off x="1005840" y="5431536"/>
-            <a:ext cx="1243584" cy="237744"/>
-          </a:xfrm>
-          <a:prstGeom prst="roundRect">
-            <a:avLst>
-              <a:gd name="adj" fmla="val 15000"/>
-            </a:avLst>
-          </a:prstGeom>
-          <a:solidFill>
-            <a:srgbClr val="D5F5E3"/>
-          </a:solidFill>
-          <a:ln w="9525">
-            <a:solidFill>
-              <a:srgbClr val="58D68D"/>
-            </a:solidFill>
-          </a:ln>
-        </p:spPr>
-        <p:style>
-          <a:lnRef idx="1">
-            <a:schemeClr val="accent1"/>
-          </a:lnRef>
-          <a:fillRef idx="3">
-            <a:schemeClr val="accent1"/>
-          </a:fillRef>
-          <a:effectRef idx="2">
-            <a:schemeClr val="accent1"/>
-          </a:effectRef>
-          <a:fontRef idx="minor">
-            <a:schemeClr val="lt1"/>
-          </a:fontRef>
-        </p:style>
-        <p:txBody>
-          <a:bodyPr rtlCol="0" anchor="ctr" wrap="square" lIns="38100" rIns="38100" tIns="25400" bIns="12700"/>
-          <a:lstStyle/>
-          <a:p>
-            <a:pPr algn="ctr"/>
-            <a:r>
-              <a:rPr sz="700" b="1">
-                <a:solidFill>
-                  <a:srgbClr val="14532D"/>
-                </a:solidFill>
-                <a:latin typeface="Calibri"/>
-              </a:rPr>
-              <a:t>UA Coupon Provider</a:t>
-            </a:r>
-          </a:p>
-        </p:txBody>
-      </p:sp>
-      <p:sp>
-        <p:nvSpPr>
-          <p:cNvPr id="119" name="Rounded Rectangle 118"/>
-          <p:cNvSpPr/>
-          <p:nvPr/>
-        </p:nvSpPr>
-        <p:spPr>
-          <a:xfrm>
-            <a:off x="2304288" y="5431536"/>
-            <a:ext cx="1243584" cy="237744"/>
-          </a:xfrm>
-          <a:prstGeom prst="roundRect">
-            <a:avLst>
-              <a:gd name="adj" fmla="val 15000"/>
-            </a:avLst>
-          </a:prstGeom>
-          <a:solidFill>
-            <a:srgbClr val="D5F5E3"/>
-          </a:solidFill>
-          <a:ln w="9525">
-            <a:solidFill>
-              <a:srgbClr val="58D68D"/>
-            </a:solidFill>
-          </a:ln>
-        </p:spPr>
-        <p:style>
-          <a:lnRef idx="1">
-            <a:schemeClr val="accent1"/>
-          </a:lnRef>
-          <a:fillRef idx="3">
-            <a:schemeClr val="accent1"/>
-          </a:fillRef>
-          <a:effectRef idx="2">
-            <a:schemeClr val="accent1"/>
-          </a:effectRef>
-          <a:fontRef idx="minor">
-            <a:schemeClr val="lt1"/>
-          </a:fontRef>
-        </p:style>
-        <p:txBody>
-          <a:bodyPr rtlCol="0" anchor="ctr" wrap="square" lIns="38100" rIns="38100" tIns="25400" bIns="12700"/>
-          <a:lstStyle/>
-          <a:p>
-            <a:pPr algn="ctr"/>
-            <a:r>
-              <a:rPr sz="700" b="1">
-                <a:solidFill>
-                  <a:srgbClr val="14532D"/>
-                </a:solidFill>
-                <a:latin typeface="Calibri"/>
-              </a:rPr>
-              <a:t>Audit Trail</a:t>
-            </a:r>
-          </a:p>
-        </p:txBody>
-      </p:sp>
-      <p:sp>
-        <p:nvSpPr>
-          <p:cNvPr id="120" name="Rounded Rectangle 119"/>
-          <p:cNvSpPr/>
-          <p:nvPr/>
-        </p:nvSpPr>
-        <p:spPr>
-          <a:xfrm>
-            <a:off x="3602736" y="5431536"/>
-            <a:ext cx="1243584" cy="237744"/>
-          </a:xfrm>
-          <a:prstGeom prst="roundRect">
-            <a:avLst>
-              <a:gd name="adj" fmla="val 15000"/>
-            </a:avLst>
-          </a:prstGeom>
-          <a:solidFill>
-            <a:srgbClr val="D5F5E3"/>
-          </a:solidFill>
-          <a:ln w="9525">
-            <a:solidFill>
-              <a:srgbClr val="58D68D"/>
-            </a:solidFill>
-          </a:ln>
-        </p:spPr>
-        <p:style>
-          <a:lnRef idx="1">
-            <a:schemeClr val="accent1"/>
-          </a:lnRef>
-          <a:fillRef idx="3">
-            <a:schemeClr val="accent1"/>
-          </a:fillRef>
-          <a:effectRef idx="2">
-            <a:schemeClr val="accent1"/>
-          </a:effectRef>
-          <a:fontRef idx="minor">
-            <a:schemeClr val="lt1"/>
-          </a:fontRef>
-        </p:style>
-        <p:txBody>
-          <a:bodyPr rtlCol="0" anchor="ctr" wrap="square" lIns="38100" rIns="38100" tIns="25400" bIns="12700"/>
-          <a:lstStyle/>
-          <a:p>
-            <a:pPr algn="ctr"/>
-            <a:r>
-              <a:rPr sz="700" b="1">
-                <a:solidFill>
-                  <a:srgbClr val="14532D"/>
-                </a:solidFill>
-                <a:latin typeface="Calibri"/>
-              </a:rPr>
-              <a:t>Low-stock Monitor</a:t>
-            </a:r>
-          </a:p>
-        </p:txBody>
-      </p:sp>
-      <p:sp>
-        <p:nvSpPr>
-          <p:cNvPr id="121" name="Rounded Rectangle 120"/>
-          <p:cNvSpPr/>
-          <p:nvPr/>
-        </p:nvSpPr>
-        <p:spPr>
-          <a:xfrm>
-            <a:off x="4901184" y="5431536"/>
-            <a:ext cx="1243584" cy="237744"/>
-          </a:xfrm>
-          <a:prstGeom prst="roundRect">
-            <a:avLst>
-              <a:gd name="adj" fmla="val 15000"/>
-            </a:avLst>
-          </a:prstGeom>
-          <a:solidFill>
-            <a:srgbClr val="D5F5E3"/>
-          </a:solidFill>
-          <a:ln w="9525">
-            <a:solidFill>
-              <a:srgbClr val="58D68D"/>
-            </a:solidFill>
-          </a:ln>
-        </p:spPr>
-        <p:style>
-          <a:lnRef idx="1">
-            <a:schemeClr val="accent1"/>
-          </a:lnRef>
-          <a:fillRef idx="3">
-            <a:schemeClr val="accent1"/>
-          </a:fillRef>
-          <a:effectRef idx="2">
-            <a:schemeClr val="accent1"/>
-          </a:effectRef>
-          <a:fontRef idx="minor">
-            <a:schemeClr val="lt1"/>
-          </a:fontRef>
-        </p:style>
-        <p:txBody>
-          <a:bodyPr rtlCol="0" anchor="ctr" wrap="square" lIns="38100" rIns="38100" tIns="25400" bIns="12700"/>
-          <a:lstStyle/>
-          <a:p>
-            <a:pPr algn="ctr"/>
-            <a:r>
-              <a:rPr sz="700" b="1">
-                <a:solidFill>
-                  <a:srgbClr val="14532D"/>
-                </a:solidFill>
-                <a:latin typeface="Calibri"/>
-              </a:rPr>
-              <a:t>Customer Ownership</a:t>
-            </a:r>
-          </a:p>
-        </p:txBody>
-      </p:sp>
-      <p:sp>
-        <p:nvSpPr>
-          <p:cNvPr id="122" name="Rounded Rectangle 121"/>
-          <p:cNvSpPr/>
-          <p:nvPr/>
-        </p:nvSpPr>
-        <p:spPr>
-          <a:xfrm>
-            <a:off x="6199632" y="5431536"/>
-            <a:ext cx="1243584" cy="237744"/>
-          </a:xfrm>
-          <a:prstGeom prst="roundRect">
-            <a:avLst>
-              <a:gd name="adj" fmla="val 15000"/>
-            </a:avLst>
-          </a:prstGeom>
-          <a:solidFill>
-            <a:srgbClr val="D5F5E3"/>
-          </a:solidFill>
-          <a:ln w="9525">
-            <a:solidFill>
-              <a:srgbClr val="58D68D"/>
-            </a:solidFill>
-          </a:ln>
-        </p:spPr>
-        <p:style>
-          <a:lnRef idx="1">
-            <a:schemeClr val="accent1"/>
-          </a:lnRef>
-          <a:fillRef idx="3">
-            <a:schemeClr val="accent1"/>
-          </a:fillRef>
-          <a:effectRef idx="2">
-            <a:schemeClr val="accent1"/>
-          </a:effectRef>
-          <a:fontRef idx="minor">
-            <a:schemeClr val="lt1"/>
-          </a:fontRef>
-        </p:style>
-        <p:txBody>
-          <a:bodyPr rtlCol="0" anchor="ctr" wrap="square" lIns="38100" rIns="38100" tIns="25400" bIns="12700"/>
-          <a:lstStyle/>
-          <a:p>
-            <a:pPr algn="ctr"/>
-            <a:r>
-              <a:rPr sz="700" b="1">
-                <a:solidFill>
-                  <a:srgbClr val="14532D"/>
-                </a:solidFill>
-                <a:latin typeface="Calibri"/>
-              </a:rPr>
-              <a:t>Coupon Wallet History</a:t>
-            </a:r>
-          </a:p>
-        </p:txBody>
-      </p:sp>
-      <p:sp>
-        <p:nvSpPr>
-          <p:cNvPr id="123" name="Rounded Rectangle 122"/>
-          <p:cNvSpPr/>
-          <p:nvPr/>
-        </p:nvSpPr>
-        <p:spPr>
-          <a:xfrm>
-            <a:off x="7498080" y="5431536"/>
-            <a:ext cx="1243584" cy="237744"/>
-          </a:xfrm>
-          <a:prstGeom prst="roundRect">
-            <a:avLst>
-              <a:gd name="adj" fmla="val 15000"/>
-            </a:avLst>
-          </a:prstGeom>
-          <a:solidFill>
-            <a:srgbClr val="D5F5E3"/>
-          </a:solidFill>
-          <a:ln w="9525">
-            <a:solidFill>
-              <a:srgbClr val="58D68D"/>
-            </a:solidFill>
-          </a:ln>
-        </p:spPr>
-        <p:style>
-          <a:lnRef idx="1">
-            <a:schemeClr val="accent1"/>
-          </a:lnRef>
-          <a:fillRef idx="3">
-            <a:schemeClr val="accent1"/>
-          </a:fillRef>
-          <a:effectRef idx="2">
-            <a:schemeClr val="accent1"/>
-          </a:effectRef>
-          <a:fontRef idx="minor">
-            <a:schemeClr val="lt1"/>
-          </a:fontRef>
-        </p:style>
-        <p:txBody>
-          <a:bodyPr rtlCol="0" anchor="ctr" wrap="square" lIns="38100" rIns="38100" tIns="25400" bIns="12700"/>
-          <a:lstStyle/>
-          <a:p>
-            <a:pPr algn="ctr"/>
-            <a:r>
-              <a:rPr sz="700" b="1">
-                <a:solidFill>
-                  <a:srgbClr val="14532D"/>
-                </a:solidFill>
-                <a:latin typeface="Calibri"/>
-              </a:rPr>
-              <a:t>Coupon Wallet Search</a:t>
-            </a:r>
-          </a:p>
-        </p:txBody>
-      </p:sp>
-      <p:sp>
-        <p:nvSpPr>
-          <p:cNvPr id="124" name="Rectangle 123"/>
-          <p:cNvSpPr/>
-          <p:nvPr/>
-        </p:nvSpPr>
-        <p:spPr>
-          <a:xfrm>
-            <a:off x="804672" y="5870448"/>
-            <a:ext cx="9646920" cy="713232"/>
-          </a:xfrm>
-          <a:prstGeom prst="rect">
-            <a:avLst/>
-          </a:prstGeom>
-          <a:solidFill>
-            <a:srgbClr val="F4F6F7"/>
-          </a:solidFill>
-          <a:ln w="9525">
-            <a:solidFill>
-              <a:srgbClr val="BFC9CA"/>
-            </a:solidFill>
-          </a:ln>
-        </p:spPr>
-        <p:style>
-          <a:lnRef idx="1">
-            <a:schemeClr val="accent1"/>
-          </a:lnRef>
-          <a:fillRef idx="3">
-            <a:schemeClr val="accent1"/>
-          </a:fillRef>
-          <a:effectRef idx="2">
-            <a:schemeClr val="accent1"/>
-          </a:effectRef>
-          <a:fontRef idx="minor">
-            <a:schemeClr val="lt1"/>
-          </a:fontRef>
-        </p:style>
-        <p:txBody>
-          <a:bodyPr rtlCol="0" anchor="ctr"/>
-          <a:lstStyle/>
-          <a:p>
-            <a:pPr algn="ctr"/>
-          </a:p>
-        </p:txBody>
-      </p:sp>
-      <p:sp>
-        <p:nvSpPr>
-          <p:cNvPr id="125" name="Rectangle 124"/>
-          <p:cNvSpPr/>
-          <p:nvPr/>
-        </p:nvSpPr>
-        <p:spPr>
-          <a:xfrm>
-            <a:off x="109728" y="5870448"/>
-            <a:ext cx="640080" cy="713232"/>
-          </a:xfrm>
-          <a:prstGeom prst="rect">
-            <a:avLst/>
-          </a:prstGeom>
-          <a:solidFill>
-            <a:srgbClr val="F4F6F7"/>
-          </a:solidFill>
-          <a:ln w="9525">
-            <a:solidFill>
-              <a:srgbClr val="BFC9CA"/>
-            </a:solidFill>
-          </a:ln>
-        </p:spPr>
-        <p:style>
-          <a:lnRef idx="1">
-            <a:schemeClr val="accent1"/>
-          </a:lnRef>
-          <a:fillRef idx="3">
-            <a:schemeClr val="accent1"/>
-          </a:fillRef>
-          <a:effectRef idx="2">
-            <a:schemeClr val="accent1"/>
-          </a:effectRef>
-          <a:fontRef idx="minor">
-            <a:schemeClr val="lt1"/>
-          </a:fontRef>
-        </p:style>
-        <p:txBody>
-          <a:bodyPr rtlCol="0" anchor="ctr"/>
-          <a:lstStyle/>
-          <a:p>
-            <a:pPr algn="ctr"/>
-          </a:p>
-        </p:txBody>
-      </p:sp>
-      <p:sp>
-        <p:nvSpPr>
-          <p:cNvPr id="126" name="TextBox 125"/>
-          <p:cNvSpPr txBox="1"/>
-          <p:nvPr/>
-        </p:nvSpPr>
-        <p:spPr>
-          <a:xfrm>
-            <a:off x="128016" y="5925312"/>
-            <a:ext cx="603504" cy="329184"/>
-          </a:xfrm>
-          <a:prstGeom prst="rect">
-            <a:avLst/>
-          </a:prstGeom>
-          <a:noFill/>
-        </p:spPr>
-        <p:txBody>
-          <a:bodyPr wrap="square" lIns="25400" rIns="25400" tIns="0" bIns="0">
-            <a:spAutoFit/>
-          </a:bodyPr>
-          <a:lstStyle/>
-          <a:p>
-            <a:pPr algn="ctr"/>
-            <a:r>
-              <a:rPr sz="800" b="1">
-                <a:solidFill>
-                  <a:srgbClr val="1B4F72"/>
-                </a:solidFill>
-                <a:latin typeface="Calibri"/>
-              </a:rPr>
-              <a:t>06
-Store &amp;
-edge</a:t>
-            </a:r>
-          </a:p>
-        </p:txBody>
-      </p:sp>
-      <p:sp>
-        <p:nvSpPr>
-          <p:cNvPr id="127" name="TextBox 126"/>
-          <p:cNvSpPr txBox="1"/>
-          <p:nvPr/>
-        </p:nvSpPr>
-        <p:spPr>
-          <a:xfrm>
-            <a:off x="128016" y="6236208"/>
-            <a:ext cx="603504" cy="365760"/>
-          </a:xfrm>
-          <a:prstGeom prst="rect">
-            <a:avLst/>
-          </a:prstGeom>
-          <a:noFill/>
-        </p:spPr>
-        <p:txBody>
-          <a:bodyPr wrap="square" lIns="25400" rIns="25400" tIns="0" bIns="0">
-            <a:spAutoFit/>
-          </a:bodyPr>
-          <a:lstStyle/>
-          <a:p>
-            <a:pPr algn="ctr"/>
-            <a:r>
-              <a:rPr sz="700" b="0">
-                <a:solidFill>
-                  <a:srgbClr val="7F8C8D"/>
-                </a:solidFill>
-                <a:latin typeface="Calibri"/>
-              </a:rPr>
-              <a:t>data +
-COD</a:t>
-            </a:r>
-          </a:p>
-        </p:txBody>
-      </p:sp>
-      <p:sp>
-        <p:nvSpPr>
-          <p:cNvPr id="128" name="TextBox 127"/>
-          <p:cNvSpPr txBox="1"/>
-          <p:nvPr/>
-        </p:nvSpPr>
-        <p:spPr>
-          <a:xfrm>
-            <a:off x="896112" y="5925312"/>
-            <a:ext cx="1280160" cy="146304"/>
-          </a:xfrm>
-          <a:prstGeom prst="rect">
-            <a:avLst/>
-          </a:prstGeom>
-          <a:noFill/>
-        </p:spPr>
-        <p:txBody>
-          <a:bodyPr wrap="square" lIns="25400" rIns="25400" tIns="0" bIns="0">
-            <a:spAutoFit/>
-          </a:bodyPr>
-          <a:lstStyle/>
-          <a:p>
-            <a:pPr algn="l"/>
-            <a:r>
-              <a:rPr sz="800" b="1">
-                <a:solidFill>
-                  <a:srgbClr val="1B4F72"/>
-                </a:solidFill>
-                <a:latin typeface="Calibri"/>
-              </a:rPr>
-              <a:t>Persistent layer</a:t>
-            </a:r>
-          </a:p>
-        </p:txBody>
-      </p:sp>
-      <p:sp>
-        <p:nvSpPr>
-          <p:cNvPr id="129" name="Can 128"/>
-          <p:cNvSpPr/>
-          <p:nvPr/>
-        </p:nvSpPr>
-        <p:spPr>
-          <a:xfrm>
-            <a:off x="896112" y="6089904"/>
-            <a:ext cx="960120" cy="420624"/>
-          </a:xfrm>
-          <a:prstGeom prst="can">
-            <a:avLst/>
-          </a:prstGeom>
-          <a:solidFill>
-            <a:srgbClr val="D5DBDB"/>
-          </a:solidFill>
-          <a:ln w="9525">
-            <a:solidFill>
-              <a:srgbClr val="BFC9CA"/>
-            </a:solidFill>
-          </a:ln>
-        </p:spPr>
-        <p:style>
-          <a:lnRef idx="1">
-            <a:schemeClr val="accent1"/>
-          </a:lnRef>
-          <a:fillRef idx="3">
-            <a:schemeClr val="accent1"/>
-          </a:fillRef>
-          <a:effectRef idx="2">
-            <a:schemeClr val="accent1"/>
-          </a:effectRef>
-          <a:fontRef idx="minor">
-            <a:schemeClr val="lt1"/>
-          </a:fontRef>
-        </p:style>
-        <p:txBody>
-          <a:bodyPr rtlCol="0" anchor="ctr" wrap="square" lIns="38100" rIns="38100" tIns="25400" bIns="12700"/>
-          <a:lstStyle/>
-          <a:p>
-            <a:pPr algn="ctr"/>
-            <a:r>
-              <a:rPr sz="800" b="1">
-                <a:solidFill>
-                  <a:srgbClr val="1C283A"/>
-                </a:solidFill>
-                <a:latin typeface="Calibri"/>
-              </a:rPr>
-              <a:t>Wallets</a:t>
-            </a:r>
-          </a:p>
-        </p:txBody>
-      </p:sp>
-      <p:sp>
-        <p:nvSpPr>
-          <p:cNvPr id="130" name="Can 129"/>
-          <p:cNvSpPr/>
-          <p:nvPr/>
-        </p:nvSpPr>
-        <p:spPr>
-          <a:xfrm>
-            <a:off x="1947672" y="6089904"/>
-            <a:ext cx="960120" cy="420624"/>
-          </a:xfrm>
-          <a:prstGeom prst="can">
-            <a:avLst/>
-          </a:prstGeom>
-          <a:solidFill>
-            <a:srgbClr val="D5DBDB"/>
-          </a:solidFill>
-          <a:ln w="9525">
-            <a:solidFill>
-              <a:srgbClr val="BFC9CA"/>
-            </a:solidFill>
-          </a:ln>
-        </p:spPr>
-        <p:style>
-          <a:lnRef idx="1">
-            <a:schemeClr val="accent1"/>
-          </a:lnRef>
-          <a:fillRef idx="3">
-            <a:schemeClr val="accent1"/>
-          </a:fillRef>
-          <a:effectRef idx="2">
-            <a:schemeClr val="accent1"/>
-          </a:effectRef>
-          <a:fontRef idx="minor">
-            <a:schemeClr val="lt1"/>
-          </a:fontRef>
-        </p:style>
-        <p:txBody>
-          <a:bodyPr rtlCol="0" anchor="ctr" wrap="square" lIns="38100" rIns="38100" tIns="25400" bIns="12700"/>
-          <a:lstStyle/>
-          <a:p>
-            <a:pPr algn="ctr"/>
-            <a:r>
-              <a:rPr sz="800" b="1">
-                <a:solidFill>
-                  <a:srgbClr val="1C283A"/>
-                </a:solidFill>
-                <a:latin typeface="Calibri"/>
-              </a:rPr>
-              <a:t>Rewards</a:t>
-            </a:r>
-          </a:p>
-        </p:txBody>
-      </p:sp>
-      <p:sp>
-        <p:nvSpPr>
-          <p:cNvPr id="131" name="Can 130"/>
-          <p:cNvSpPr/>
-          <p:nvPr/>
-        </p:nvSpPr>
-        <p:spPr>
-          <a:xfrm>
-            <a:off x="2999232" y="6089904"/>
-            <a:ext cx="960120" cy="420624"/>
-          </a:xfrm>
-          <a:prstGeom prst="can">
-            <a:avLst/>
-          </a:prstGeom>
-          <a:solidFill>
-            <a:srgbClr val="D5DBDB"/>
-          </a:solidFill>
-          <a:ln w="9525">
-            <a:solidFill>
-              <a:srgbClr val="BFC9CA"/>
-            </a:solidFill>
-          </a:ln>
-        </p:spPr>
-        <p:style>
-          <a:lnRef idx="1">
-            <a:schemeClr val="accent1"/>
-          </a:lnRef>
-          <a:fillRef idx="3">
-            <a:schemeClr val="accent1"/>
-          </a:fillRef>
-          <a:effectRef idx="2">
-            <a:schemeClr val="accent1"/>
-          </a:effectRef>
-          <a:fontRef idx="minor">
-            <a:schemeClr val="lt1"/>
-          </a:fontRef>
-        </p:style>
-        <p:txBody>
-          <a:bodyPr rtlCol="0" anchor="ctr" wrap="square" lIns="38100" rIns="38100" tIns="25400" bIns="12700"/>
-          <a:lstStyle/>
-          <a:p>
-            <a:pPr algn="ctr"/>
-            <a:r>
-              <a:rPr sz="800" b="1">
-                <a:solidFill>
-                  <a:srgbClr val="1C283A"/>
-                </a:solidFill>
-                <a:latin typeface="Calibri"/>
-              </a:rPr>
-              <a:t>CBP</a:t>
-            </a:r>
-          </a:p>
-        </p:txBody>
-      </p:sp>
-      <p:sp>
-        <p:nvSpPr>
-          <p:cNvPr id="132" name="Can 131"/>
-          <p:cNvSpPr/>
-          <p:nvPr/>
-        </p:nvSpPr>
-        <p:spPr>
-          <a:xfrm>
-            <a:off x="4050791" y="6089904"/>
-            <a:ext cx="960120" cy="420624"/>
-          </a:xfrm>
-          <a:prstGeom prst="can">
-            <a:avLst/>
-          </a:prstGeom>
-          <a:solidFill>
-            <a:srgbClr val="D5DBDB"/>
-          </a:solidFill>
-          <a:ln w="9525">
-            <a:solidFill>
-              <a:srgbClr val="BFC9CA"/>
-            </a:solidFill>
-          </a:ln>
-        </p:spPr>
-        <p:style>
-          <a:lnRef idx="1">
-            <a:schemeClr val="accent1"/>
-          </a:lnRef>
-          <a:fillRef idx="3">
-            <a:schemeClr val="accent1"/>
-          </a:fillRef>
-          <a:effectRef idx="2">
-            <a:schemeClr val="accent1"/>
-          </a:effectRef>
-          <a:fontRef idx="minor">
-            <a:schemeClr val="lt1"/>
-          </a:fontRef>
-        </p:style>
-        <p:txBody>
-          <a:bodyPr rtlCol="0" anchor="ctr" wrap="square" lIns="38100" rIns="38100" tIns="25400" bIns="12700"/>
-          <a:lstStyle/>
-          <a:p>
-            <a:pPr algn="ctr"/>
-            <a:r>
-              <a:rPr sz="800" b="1">
-                <a:solidFill>
-                  <a:srgbClr val="1C283A"/>
-                </a:solidFill>
-                <a:latin typeface="Calibri"/>
-              </a:rPr>
-              <a:t>Coupon stocks</a:t>
-            </a:r>
-          </a:p>
-        </p:txBody>
-      </p:sp>
-      <p:sp>
-        <p:nvSpPr>
-          <p:cNvPr id="133" name="Can 132"/>
-          <p:cNvSpPr/>
-          <p:nvPr/>
-        </p:nvSpPr>
-        <p:spPr>
-          <a:xfrm>
-            <a:off x="5102352" y="6089904"/>
-            <a:ext cx="960120" cy="420624"/>
-          </a:xfrm>
-          <a:prstGeom prst="can">
-            <a:avLst/>
-          </a:prstGeom>
-          <a:solidFill>
-            <a:srgbClr val="D5DBDB"/>
-          </a:solidFill>
-          <a:ln w="9525">
-            <a:solidFill>
-              <a:srgbClr val="BFC9CA"/>
-            </a:solidFill>
-          </a:ln>
-        </p:spPr>
-        <p:style>
-          <a:lnRef idx="1">
-            <a:schemeClr val="accent1"/>
-          </a:lnRef>
-          <a:fillRef idx="3">
-            <a:schemeClr val="accent1"/>
-          </a:fillRef>
-          <a:effectRef idx="2">
-            <a:schemeClr val="accent1"/>
-          </a:effectRef>
-          <a:fontRef idx="minor">
-            <a:schemeClr val="lt1"/>
-          </a:fontRef>
-        </p:style>
-        <p:txBody>
-          <a:bodyPr rtlCol="0" anchor="ctr" wrap="square" lIns="38100" rIns="38100" tIns="25400" bIns="12700"/>
-          <a:lstStyle/>
-          <a:p>
-            <a:pPr algn="ctr"/>
-            <a:r>
-              <a:rPr sz="800" b="1">
-                <a:solidFill>
-                  <a:srgbClr val="1C283A"/>
-                </a:solidFill>
-                <a:latin typeface="Calibri"/>
-              </a:rPr>
-              <a:t>Coupon wallet</a:t>
-            </a:r>
-          </a:p>
-        </p:txBody>
-      </p:sp>
-      <p:sp>
-        <p:nvSpPr>
-          <p:cNvPr id="134" name="Rounded Rectangle 133"/>
-          <p:cNvSpPr/>
-          <p:nvPr/>
-        </p:nvSpPr>
-        <p:spPr>
-          <a:xfrm>
-            <a:off x="6263640" y="5961888"/>
-            <a:ext cx="1874519" cy="530352"/>
-          </a:xfrm>
-          <a:prstGeom prst="roundRect">
-            <a:avLst>
-              <a:gd name="adj" fmla="val 8000"/>
-            </a:avLst>
-          </a:prstGeom>
-          <a:solidFill>
-            <a:srgbClr val="D5F5E3"/>
-          </a:solidFill>
-          <a:ln w="12700">
-            <a:solidFill>
-              <a:srgbClr val="1E8449"/>
-            </a:solidFill>
-          </a:ln>
-        </p:spPr>
-        <p:style>
-          <a:lnRef idx="1">
-            <a:schemeClr val="accent1"/>
-          </a:lnRef>
-          <a:fillRef idx="3">
-            <a:schemeClr val="accent1"/>
-          </a:fillRef>
-          <a:effectRef idx="2">
-            <a:schemeClr val="accent1"/>
-          </a:effectRef>
-          <a:fontRef idx="minor">
-            <a:schemeClr val="lt1"/>
-          </a:fontRef>
-        </p:style>
-        <p:txBody>
-          <a:bodyPr rtlCol="0" anchor="ctr"/>
-          <a:lstStyle/>
-          <a:p>
-            <a:pPr algn="ctr"/>
-          </a:p>
-        </p:txBody>
-      </p:sp>
-      <p:sp>
-        <p:nvSpPr>
-          <p:cNvPr id="135" name="Rounded Rectangle 134"/>
-          <p:cNvSpPr/>
-          <p:nvPr/>
-        </p:nvSpPr>
-        <p:spPr>
-          <a:xfrm>
-            <a:off x="6263640" y="5961888"/>
-            <a:ext cx="1874519" cy="530352"/>
-          </a:xfrm>
-          <a:prstGeom prst="roundRect">
-            <a:avLst>
-              <a:gd name="adj" fmla="val 8000"/>
-            </a:avLst>
-          </a:prstGeom>
-          <a:solidFill>
-            <a:srgbClr val="D5F5E3"/>
-          </a:solidFill>
-          <a:ln w="12700">
-            <a:solidFill>
-              <a:srgbClr val="1E8449"/>
-            </a:solidFill>
-          </a:ln>
-        </p:spPr>
-        <p:style>
-          <a:lnRef idx="1">
-            <a:schemeClr val="accent1"/>
-          </a:lnRef>
-          <a:fillRef idx="3">
-            <a:schemeClr val="accent1"/>
-          </a:fillRef>
-          <a:effectRef idx="2">
-            <a:schemeClr val="accent1"/>
-          </a:effectRef>
-          <a:fontRef idx="minor">
-            <a:schemeClr val="lt1"/>
-          </a:fontRef>
-        </p:style>
-        <p:txBody>
-          <a:bodyPr rtlCol="0" anchor="ctr" wrap="square" lIns="38100" rIns="38100" tIns="25400" bIns="12700"/>
-          <a:lstStyle/>
-          <a:p>
-            <a:pPr algn="ctr"/>
-            <a:r>
-              <a:rPr sz="900" b="1">
-                <a:solidFill>
-                  <a:srgbClr val="14532D"/>
-                </a:solidFill>
-                <a:latin typeface="Calibri"/>
-              </a:rPr>
-              <a:t>COD  ·  partner fulfill
-(server / rails)</a:t>
-            </a:r>
-          </a:p>
-        </p:txBody>
-      </p:sp>
-      <p:sp>
-        <p:nvSpPr>
-          <p:cNvPr id="136" name="Rounded Rectangle 135"/>
-          <p:cNvSpPr/>
-          <p:nvPr/>
-        </p:nvSpPr>
-        <p:spPr>
-          <a:xfrm>
-            <a:off x="8275320" y="5961888"/>
-            <a:ext cx="2029968" cy="530352"/>
-          </a:xfrm>
-          <a:prstGeom prst="roundRect">
-            <a:avLst>
-              <a:gd name="adj" fmla="val 8000"/>
-            </a:avLst>
-          </a:prstGeom>
-          <a:solidFill>
-            <a:srgbClr val="FFFFFF"/>
-          </a:solidFill>
-          <a:ln w="9525">
-            <a:solidFill>
-              <a:srgbClr val="BFC9CA"/>
-            </a:solidFill>
-          </a:ln>
-        </p:spPr>
-        <p:style>
-          <a:lnRef idx="1">
-            <a:schemeClr val="accent1"/>
-          </a:lnRef>
-          <a:fillRef idx="3">
-            <a:schemeClr val="accent1"/>
-          </a:fillRef>
-          <a:effectRef idx="2">
-            <a:schemeClr val="accent1"/>
-          </a:effectRef>
-          <a:fontRef idx="minor">
-            <a:schemeClr val="lt1"/>
-          </a:fontRef>
-        </p:style>
-        <p:txBody>
-          <a:bodyPr rtlCol="0" anchor="ctr"/>
-          <a:lstStyle/>
-          <a:p>
-            <a:pPr algn="ctr"/>
-          </a:p>
-        </p:txBody>
-      </p:sp>
-      <p:sp>
-        <p:nvSpPr>
-          <p:cNvPr id="137" name="TextBox 136"/>
-          <p:cNvSpPr txBox="1"/>
-          <p:nvPr/>
-        </p:nvSpPr>
-        <p:spPr>
-          <a:xfrm>
-            <a:off x="8339327" y="6016752"/>
-            <a:ext cx="1920240" cy="420624"/>
-          </a:xfrm>
-          <a:prstGeom prst="rect">
-            <a:avLst/>
-          </a:prstGeom>
-          <a:noFill/>
-        </p:spPr>
-        <p:txBody>
-          <a:bodyPr wrap="square" lIns="25400" rIns="25400" tIns="0" bIns="0">
-            <a:spAutoFit/>
-          </a:bodyPr>
-          <a:lstStyle/>
-          <a:p>
-            <a:pPr algn="l"/>
-            <a:r>
-              <a:rPr sz="800" b="0">
-                <a:solidFill>
-                  <a:srgbClr val="4A5568"/>
-                </a:solidFill>
-                <a:latin typeface="Calibri"/>
-              </a:rPr>
-              <a:t>RS never holds coupon stock.
-CBP/CRP executes coupon reality.</a:t>
-            </a:r>
-          </a:p>
-        </p:txBody>
-      </p:sp>
-      <p:sp>
-        <p:nvSpPr>
-          <p:cNvPr id="138" name="Rectangle 137"/>
-          <p:cNvSpPr/>
-          <p:nvPr/>
-        </p:nvSpPr>
-        <p:spPr>
-          <a:xfrm>
-            <a:off x="10588752" y="530352"/>
-            <a:ext cx="1444752" cy="6053328"/>
-          </a:xfrm>
-          <a:prstGeom prst="rect">
-            <a:avLst/>
-          </a:prstGeom>
-          <a:solidFill>
-            <a:srgbClr val="1A365D"/>
-          </a:solidFill>
-          <a:ln w="14604">
-            <a:solidFill>
-              <a:srgbClr val="1B4F72"/>
-            </a:solidFill>
-          </a:ln>
-        </p:spPr>
-        <p:style>
-          <a:lnRef idx="1">
-            <a:schemeClr val="accent1"/>
-          </a:lnRef>
-          <a:fillRef idx="3">
-            <a:schemeClr val="accent1"/>
-          </a:fillRef>
-          <a:effectRef idx="2">
-            <a:schemeClr val="accent1"/>
-          </a:effectRef>
-          <a:fontRef idx="minor">
-            <a:schemeClr val="lt1"/>
-          </a:fontRef>
-        </p:style>
-        <p:txBody>
-          <a:bodyPr rtlCol="0" anchor="ctr"/>
-          <a:lstStyle/>
-          <a:p>
-            <a:pPr algn="ctr"/>
-          </a:p>
-        </p:txBody>
-      </p:sp>
-      <p:sp>
-        <p:nvSpPr>
-          <p:cNvPr id="139" name="TextBox 138"/>
-          <p:cNvSpPr txBox="1"/>
-          <p:nvPr/>
-        </p:nvSpPr>
-        <p:spPr>
-          <a:xfrm>
-            <a:off x="10625328" y="603504"/>
-            <a:ext cx="1371600" cy="329184"/>
-          </a:xfrm>
-          <a:prstGeom prst="rect">
-            <a:avLst/>
-          </a:prstGeom>
-          <a:noFill/>
-        </p:spPr>
-        <p:txBody>
-          <a:bodyPr wrap="square" lIns="25400" rIns="25400" tIns="0" bIns="0">
-            <a:spAutoFit/>
-          </a:bodyPr>
-          <a:lstStyle/>
-          <a:p>
-            <a:pPr algn="ctr"/>
-            <a:r>
-              <a:rPr sz="900" b="1">
-                <a:solidFill>
-                  <a:srgbClr val="FFFFFF"/>
-                </a:solidFill>
-                <a:latin typeface="Calibri"/>
-              </a:rPr>
-              <a:t>EVENT BUS</a:t>
-            </a:r>
-          </a:p>
-        </p:txBody>
-      </p:sp>
-      <p:sp>
-        <p:nvSpPr>
-          <p:cNvPr id="140" name="TextBox 139"/>
-          <p:cNvSpPr txBox="1"/>
-          <p:nvPr/>
-        </p:nvSpPr>
-        <p:spPr>
-          <a:xfrm>
-            <a:off x="10625328" y="896112"/>
-            <a:ext cx="1371600" cy="164592"/>
-          </a:xfrm>
-          <a:prstGeom prst="rect">
-            <a:avLst/>
-          </a:prstGeom>
-          <a:noFill/>
-        </p:spPr>
-        <p:txBody>
-          <a:bodyPr wrap="square" lIns="25400" rIns="25400" tIns="0" bIns="0">
-            <a:spAutoFit/>
-          </a:bodyPr>
-          <a:lstStyle/>
-          <a:p>
-            <a:pPr algn="ctr"/>
-            <a:r>
-              <a:rPr sz="1000" b="1">
-                <a:solidFill>
-                  <a:srgbClr val="5DAEE2"/>
-                </a:solidFill>
-                <a:latin typeface="Calibri"/>
-              </a:rPr>
-              <a:t>Kafka</a:t>
-            </a:r>
-          </a:p>
-        </p:txBody>
-      </p:sp>
-      <p:sp>
-        <p:nvSpPr>
-          <p:cNvPr id="141" name="Rounded Rectangle 140"/>
-          <p:cNvSpPr/>
-          <p:nvPr/>
-        </p:nvSpPr>
-        <p:spPr>
-          <a:xfrm>
-            <a:off x="10680192" y="1188720"/>
-            <a:ext cx="1261872" cy="502920"/>
-          </a:xfrm>
-          <a:prstGeom prst="roundRect">
-            <a:avLst>
-              <a:gd name="adj" fmla="val 15000"/>
-            </a:avLst>
-          </a:prstGeom>
-          <a:solidFill>
-            <a:srgbClr val="2C5282"/>
-          </a:solidFill>
-          <a:ln w="9525">
-            <a:solidFill>
-              <a:srgbClr val="5DAEE2"/>
-            </a:solidFill>
-          </a:ln>
-        </p:spPr>
-        <p:style>
-          <a:lnRef idx="1">
-            <a:schemeClr val="accent1"/>
-          </a:lnRef>
-          <a:fillRef idx="3">
-            <a:schemeClr val="accent1"/>
-          </a:fillRef>
-          <a:effectRef idx="2">
-            <a:schemeClr val="accent1"/>
-          </a:effectRef>
-          <a:fontRef idx="minor">
-            <a:schemeClr val="lt1"/>
-          </a:fontRef>
-        </p:style>
-        <p:txBody>
-          <a:bodyPr rtlCol="0" anchor="ctr" wrap="square" lIns="38100" rIns="38100" tIns="25400" bIns="12700"/>
-          <a:lstStyle/>
-          <a:p>
-            <a:pPr algn="ctr"/>
-            <a:r>
-              <a:rPr sz="800" b="1">
-                <a:solidFill>
-                  <a:srgbClr val="FFFFFF"/>
-                </a:solidFill>
-                <a:latin typeface="Calibri"/>
-              </a:rPr>
-              <a:t>CC / Loan events</a:t>
-            </a:r>
-          </a:p>
-        </p:txBody>
-      </p:sp>
-      <p:sp>
-        <p:nvSpPr>
-          <p:cNvPr id="142" name="Rounded Rectangle 141"/>
-          <p:cNvSpPr/>
-          <p:nvPr/>
-        </p:nvSpPr>
-        <p:spPr>
-          <a:xfrm>
-            <a:off x="10680192" y="1810512"/>
-            <a:ext cx="1261872" cy="502920"/>
-          </a:xfrm>
-          <a:prstGeom prst="roundRect">
-            <a:avLst>
-              <a:gd name="adj" fmla="val 15000"/>
-            </a:avLst>
-          </a:prstGeom>
-          <a:solidFill>
-            <a:srgbClr val="2C5282"/>
-          </a:solidFill>
-          <a:ln w="9525">
-            <a:solidFill>
-              <a:srgbClr val="5DAEE2"/>
-            </a:solidFill>
-          </a:ln>
-        </p:spPr>
-        <p:style>
-          <a:lnRef idx="1">
-            <a:schemeClr val="accent1"/>
-          </a:lnRef>
-          <a:fillRef idx="3">
-            <a:schemeClr val="accent1"/>
-          </a:fillRef>
-          <a:effectRef idx="2">
-            <a:schemeClr val="accent1"/>
-          </a:effectRef>
-          <a:fontRef idx="minor">
-            <a:schemeClr val="lt1"/>
-          </a:fontRef>
-        </p:style>
-        <p:txBody>
-          <a:bodyPr rtlCol="0" anchor="ctr" wrap="square" lIns="38100" rIns="38100" tIns="25400" bIns="12700"/>
-          <a:lstStyle/>
-          <a:p>
-            <a:pPr algn="ctr"/>
-            <a:r>
-              <a:rPr sz="800" b="1">
-                <a:solidFill>
-                  <a:srgbClr val="FFFFFF"/>
-                </a:solidFill>
-                <a:latin typeface="Calibri"/>
-              </a:rPr>
-              <a:t>Idempotent ingest</a:t>
-            </a:r>
-          </a:p>
-        </p:txBody>
-      </p:sp>
-      <p:sp>
-        <p:nvSpPr>
-          <p:cNvPr id="143" name="Rounded Rectangle 142"/>
-          <p:cNvSpPr/>
-          <p:nvPr/>
-        </p:nvSpPr>
-        <p:spPr>
-          <a:xfrm>
-            <a:off x="10680192" y="2432304"/>
-            <a:ext cx="1261872" cy="502920"/>
-          </a:xfrm>
-          <a:prstGeom prst="roundRect">
-            <a:avLst>
-              <a:gd name="adj" fmla="val 15000"/>
-            </a:avLst>
-          </a:prstGeom>
-          <a:solidFill>
-            <a:srgbClr val="2C5282"/>
-          </a:solidFill>
-          <a:ln w="9525">
-            <a:solidFill>
-              <a:srgbClr val="5DAEE2"/>
-            </a:solidFill>
-          </a:ln>
-        </p:spPr>
-        <p:style>
-          <a:lnRef idx="1">
-            <a:schemeClr val="accent1"/>
-          </a:lnRef>
-          <a:fillRef idx="3">
-            <a:schemeClr val="accent1"/>
-          </a:fillRef>
-          <a:effectRef idx="2">
-            <a:schemeClr val="accent1"/>
-          </a:effectRef>
-          <a:fontRef idx="minor">
-            <a:schemeClr val="lt1"/>
-          </a:fontRef>
-        </p:style>
-        <p:txBody>
-          <a:bodyPr rtlCol="0" anchor="ctr" wrap="square" lIns="38100" rIns="38100" tIns="25400" bIns="12700"/>
-          <a:lstStyle/>
-          <a:p>
-            <a:pPr algn="ctr"/>
-            <a:r>
-              <a:rPr sz="800" b="1">
-                <a:solidFill>
-                  <a:srgbClr val="FFFFFF"/>
-                </a:solidFill>
-                <a:latin typeface="Calibri"/>
-              </a:rPr>
-              <a:t>Balance updated</a:t>
-            </a:r>
-          </a:p>
-        </p:txBody>
-      </p:sp>
-      <p:sp>
-        <p:nvSpPr>
-          <p:cNvPr id="144" name="Rounded Rectangle 143"/>
-          <p:cNvSpPr/>
-          <p:nvPr/>
-        </p:nvSpPr>
-        <p:spPr>
-          <a:xfrm>
-            <a:off x="10680192" y="3054096"/>
-            <a:ext cx="1261872" cy="502920"/>
-          </a:xfrm>
-          <a:prstGeom prst="roundRect">
-            <a:avLst>
-              <a:gd name="adj" fmla="val 15000"/>
-            </a:avLst>
-          </a:prstGeom>
-          <a:solidFill>
-            <a:srgbClr val="2C5282"/>
-          </a:solidFill>
-          <a:ln w="9525">
-            <a:solidFill>
-              <a:srgbClr val="5DAEE2"/>
-            </a:solidFill>
-          </a:ln>
-        </p:spPr>
-        <p:style>
-          <a:lnRef idx="1">
-            <a:schemeClr val="accent1"/>
-          </a:lnRef>
-          <a:fillRef idx="3">
-            <a:schemeClr val="accent1"/>
-          </a:fillRef>
-          <a:effectRef idx="2">
-            <a:schemeClr val="accent1"/>
-          </a:effectRef>
-          <a:fontRef idx="minor">
-            <a:schemeClr val="lt1"/>
-          </a:fontRef>
-        </p:style>
-        <p:txBody>
-          <a:bodyPr rtlCol="0" anchor="ctr" wrap="square" lIns="38100" rIns="38100" tIns="25400" bIns="12700"/>
-          <a:lstStyle/>
-          <a:p>
-            <a:pPr algn="ctr"/>
-            <a:r>
-              <a:rPr sz="800" b="1">
-                <a:solidFill>
-                  <a:srgbClr val="FFFFFF"/>
-                </a:solidFill>
-                <a:latin typeface="Calibri"/>
-              </a:rPr>
-              <a:t>Issue-coupon intent</a:t>
-            </a:r>
-          </a:p>
-        </p:txBody>
-      </p:sp>
-      <p:sp>
-        <p:nvSpPr>
-          <p:cNvPr id="145" name="Rounded Rectangle 144"/>
-          <p:cNvSpPr/>
-          <p:nvPr/>
-        </p:nvSpPr>
-        <p:spPr>
-          <a:xfrm>
-            <a:off x="10680192" y="3675888"/>
-            <a:ext cx="1261872" cy="502920"/>
-          </a:xfrm>
-          <a:prstGeom prst="roundRect">
-            <a:avLst>
-              <a:gd name="adj" fmla="val 15000"/>
-            </a:avLst>
-          </a:prstGeom>
-          <a:solidFill>
-            <a:srgbClr val="2C5282"/>
-          </a:solidFill>
-          <a:ln w="9525">
-            <a:solidFill>
-              <a:srgbClr val="5DAEE2"/>
-            </a:solidFill>
-          </a:ln>
-        </p:spPr>
-        <p:style>
-          <a:lnRef idx="1">
-            <a:schemeClr val="accent1"/>
-          </a:lnRef>
-          <a:fillRef idx="3">
-            <a:schemeClr val="accent1"/>
-          </a:fillRef>
-          <a:effectRef idx="2">
-            <a:schemeClr val="accent1"/>
-          </a:effectRef>
-          <a:fontRef idx="minor">
-            <a:schemeClr val="lt1"/>
-          </a:fontRef>
-        </p:style>
-        <p:txBody>
-          <a:bodyPr rtlCol="0" anchor="ctr" wrap="square" lIns="38100" rIns="38100" tIns="25400" bIns="12700"/>
-          <a:lstStyle/>
-          <a:p>
-            <a:pPr algn="ctr"/>
-            <a:r>
-              <a:rPr sz="800" b="1">
-                <a:solidFill>
-                  <a:srgbClr val="FFFFFF"/>
-                </a:solidFill>
-                <a:latin typeface="Calibri"/>
-              </a:rPr>
-              <a:t>Use-coupon intent</a:t>
-            </a:r>
-          </a:p>
-        </p:txBody>
-      </p:sp>
-      <p:sp>
-        <p:nvSpPr>
-          <p:cNvPr id="146" name="Rounded Rectangle 145"/>
-          <p:cNvSpPr/>
-          <p:nvPr/>
-        </p:nvSpPr>
-        <p:spPr>
-          <a:xfrm>
-            <a:off x="10680192" y="4297680"/>
-            <a:ext cx="1261872" cy="502920"/>
-          </a:xfrm>
-          <a:prstGeom prst="roundRect">
-            <a:avLst>
-              <a:gd name="adj" fmla="val 15000"/>
-            </a:avLst>
-          </a:prstGeom>
-          <a:solidFill>
-            <a:srgbClr val="2C5282"/>
-          </a:solidFill>
-          <a:ln w="9525">
-            <a:solidFill>
-              <a:srgbClr val="5DAEE2"/>
-            </a:solidFill>
-          </a:ln>
-        </p:spPr>
-        <p:style>
-          <a:lnRef idx="1">
-            <a:schemeClr val="accent1"/>
-          </a:lnRef>
-          <a:fillRef idx="3">
-            <a:schemeClr val="accent1"/>
-          </a:fillRef>
-          <a:effectRef idx="2">
-            <a:schemeClr val="accent1"/>
-          </a:effectRef>
-          <a:fontRef idx="minor">
-            <a:schemeClr val="lt1"/>
-          </a:fontRef>
-        </p:style>
-        <p:txBody>
-          <a:bodyPr rtlCol="0" anchor="ctr" wrap="square" lIns="38100" rIns="38100" tIns="25400" bIns="12700"/>
-          <a:lstStyle/>
-          <a:p>
-            <a:pPr algn="ctr"/>
-            <a:r>
-              <a:rPr sz="800" b="1">
-                <a:solidFill>
-                  <a:srgbClr val="FFFFFF"/>
-                </a:solidFill>
-                <a:latin typeface="Calibri"/>
-              </a:rPr>
-              <a:t>Redeemable list</a:t>
-            </a:r>
-          </a:p>
-        </p:txBody>
-      </p:sp>
-      <p:sp>
-        <p:nvSpPr>
-          <p:cNvPr id="147" name="Rounded Rectangle 146"/>
-          <p:cNvSpPr/>
-          <p:nvPr/>
-        </p:nvSpPr>
-        <p:spPr>
-          <a:xfrm>
-            <a:off x="10680192" y="4919472"/>
-            <a:ext cx="1261872" cy="502920"/>
-          </a:xfrm>
-          <a:prstGeom prst="roundRect">
-            <a:avLst>
-              <a:gd name="adj" fmla="val 15000"/>
-            </a:avLst>
-          </a:prstGeom>
-          <a:solidFill>
-            <a:srgbClr val="2C5282"/>
-          </a:solidFill>
-          <a:ln w="9525">
-            <a:solidFill>
-              <a:srgbClr val="5DAEE2"/>
-            </a:solidFill>
-          </a:ln>
-        </p:spPr>
-        <p:style>
-          <a:lnRef idx="1">
-            <a:schemeClr val="accent1"/>
-          </a:lnRef>
-          <a:fillRef idx="3">
-            <a:schemeClr val="accent1"/>
-          </a:fillRef>
-          <a:effectRef idx="2">
-            <a:schemeClr val="accent1"/>
-          </a:effectRef>
-          <a:fontRef idx="minor">
-            <a:schemeClr val="lt1"/>
-          </a:fontRef>
-        </p:style>
-        <p:txBody>
-          <a:bodyPr rtlCol="0" anchor="ctr" wrap="square" lIns="38100" rIns="38100" tIns="25400" bIns="12700"/>
-          <a:lstStyle/>
-          <a:p>
-            <a:pPr algn="ctr"/>
-            <a:r>
-              <a:rPr sz="800" b="1">
-                <a:solidFill>
-                  <a:srgbClr val="FFFFFF"/>
-                </a:solidFill>
-                <a:latin typeface="Calibri"/>
-              </a:rPr>
-              <a:t>Audit / trail</a:t>
-            </a:r>
-          </a:p>
-        </p:txBody>
-      </p:sp>
-      <p:sp>
-        <p:nvSpPr>
-          <p:cNvPr id="148" name="Rounded Rectangle 147"/>
-          <p:cNvSpPr/>
-          <p:nvPr/>
-        </p:nvSpPr>
-        <p:spPr>
-          <a:xfrm>
-            <a:off x="10680192" y="5541264"/>
-            <a:ext cx="1261872" cy="502920"/>
-          </a:xfrm>
-          <a:prstGeom prst="roundRect">
-            <a:avLst>
-              <a:gd name="adj" fmla="val 15000"/>
-            </a:avLst>
-          </a:prstGeom>
-          <a:solidFill>
-            <a:srgbClr val="2C5282"/>
-          </a:solidFill>
-          <a:ln w="9525">
-            <a:solidFill>
-              <a:srgbClr val="5DAEE2"/>
-            </a:solidFill>
-          </a:ln>
-        </p:spPr>
-        <p:style>
-          <a:lnRef idx="1">
-            <a:schemeClr val="accent1"/>
-          </a:lnRef>
-          <a:fillRef idx="3">
-            <a:schemeClr val="accent1"/>
-          </a:fillRef>
-          <a:effectRef idx="2">
-            <a:schemeClr val="accent1"/>
-          </a:effectRef>
-          <a:fontRef idx="minor">
-            <a:schemeClr val="lt1"/>
-          </a:fontRef>
-        </p:style>
-        <p:txBody>
-          <a:bodyPr rtlCol="0" anchor="ctr" wrap="square" lIns="38100" rIns="38100" tIns="25400" bIns="12700"/>
-          <a:lstStyle/>
-          <a:p>
-            <a:pPr algn="ctr"/>
-            <a:r>
-              <a:rPr sz="800" b="1">
-                <a:solidFill>
-                  <a:srgbClr val="FFFFFF"/>
-                </a:solidFill>
-                <a:latin typeface="Calibri"/>
-              </a:rPr>
-              <a:t>Ops entitlements</a:t>
+              <a:t>Audit</a:t>
             </a:r>
           </a:p>
         </p:txBody>
